--- a/FinML/Open_lesson_Backtasting/Presentation/Backtesting.pptx
+++ b/FinML/Open_lesson_Backtasting/Presentation/Backtesting.pptx
@@ -34,11 +34,11 @@
     <p:sldId id="288" r:id="rId25"/>
     <p:sldId id="474" r:id="rId26"/>
     <p:sldId id="372" r:id="rId27"/>
-    <p:sldId id="475" r:id="rId28"/>
-    <p:sldId id="476" r:id="rId29"/>
-    <p:sldId id="477" r:id="rId30"/>
-    <p:sldId id="478" r:id="rId31"/>
-    <p:sldId id="479" r:id="rId32"/>
+    <p:sldId id="487" r:id="rId28"/>
+    <p:sldId id="475" r:id="rId29"/>
+    <p:sldId id="476" r:id="rId30"/>
+    <p:sldId id="477" r:id="rId31"/>
+    <p:sldId id="478" r:id="rId32"/>
     <p:sldId id="480" r:id="rId33"/>
     <p:sldId id="401" r:id="rId34"/>
     <p:sldId id="289" r:id="rId35"/>
@@ -48,18 +48,11 @@
   <p:notesSz cx="6858000" cy="9144000"/>
   <p:embeddedFontLst>
     <p:embeddedFont>
-      <p:font typeface="AkayaTelivigala" panose="020F0502020204030204" pitchFamily="34" charset="0"/>
+      <p:font typeface="Roboto" panose="02000000000000000000" pitchFamily="2" charset="0"/>
       <p:regular r:id="rId38"/>
       <p:bold r:id="rId39"/>
       <p:italic r:id="rId40"/>
       <p:boldItalic r:id="rId41"/>
-    </p:embeddedFont>
-    <p:embeddedFont>
-      <p:font typeface="Roboto" panose="02000000000000000000" pitchFamily="2" charset="0"/>
-      <p:regular r:id="rId42"/>
-      <p:bold r:id="rId43"/>
-      <p:italic r:id="rId44"/>
-      <p:boldItalic r:id="rId45"/>
     </p:embeddedFont>
   </p:embeddedFontLst>
   <p:defaultTextStyle>
@@ -1948,7 +1941,7 @@
     </p:spTree>
     <p:extLst>
       <p:ext uri="{BB962C8B-B14F-4D97-AF65-F5344CB8AC3E}">
-        <p14:creationId xmlns:p14="http://schemas.microsoft.com/office/powerpoint/2010/main" val="1308146291"/>
+        <p14:creationId xmlns:p14="http://schemas.microsoft.com/office/powerpoint/2010/main" val="1701156592"/>
       </p:ext>
     </p:extLst>
   </p:cSld>
@@ -2161,7 +2154,7 @@
     </p:spTree>
     <p:extLst>
       <p:ext uri="{BB962C8B-B14F-4D97-AF65-F5344CB8AC3E}">
-        <p14:creationId xmlns:p14="http://schemas.microsoft.com/office/powerpoint/2010/main" val="3528160601"/>
+        <p14:creationId xmlns:p14="http://schemas.microsoft.com/office/powerpoint/2010/main" val="1308146291"/>
       </p:ext>
     </p:extLst>
   </p:cSld>
@@ -2270,7 +2263,7 @@
     </p:spTree>
     <p:extLst>
       <p:ext uri="{BB962C8B-B14F-4D97-AF65-F5344CB8AC3E}">
-        <p14:creationId xmlns:p14="http://schemas.microsoft.com/office/powerpoint/2010/main" val="2882154733"/>
+        <p14:creationId xmlns:p14="http://schemas.microsoft.com/office/powerpoint/2010/main" val="3528160601"/>
       </p:ext>
     </p:extLst>
   </p:cSld>
@@ -2379,7 +2372,7 @@
     </p:spTree>
     <p:extLst>
       <p:ext uri="{BB962C8B-B14F-4D97-AF65-F5344CB8AC3E}">
-        <p14:creationId xmlns:p14="http://schemas.microsoft.com/office/powerpoint/2010/main" val="2833922738"/>
+        <p14:creationId xmlns:p14="http://schemas.microsoft.com/office/powerpoint/2010/main" val="2882154733"/>
       </p:ext>
     </p:extLst>
   </p:cSld>
@@ -2488,7 +2481,7 @@
     </p:spTree>
     <p:extLst>
       <p:ext uri="{BB962C8B-B14F-4D97-AF65-F5344CB8AC3E}">
-        <p14:creationId xmlns:p14="http://schemas.microsoft.com/office/powerpoint/2010/main" val="4284470124"/>
+        <p14:creationId xmlns:p14="http://schemas.microsoft.com/office/powerpoint/2010/main" val="2833922738"/>
       </p:ext>
     </p:extLst>
   </p:cSld>
@@ -18762,14 +18755,14 @@
           <p:nvPr>
             <p:extLst>
               <p:ext uri="{D42A27DB-BD31-4B8C-83A1-F6EECF244321}">
-                <p14:modId xmlns:p14="http://schemas.microsoft.com/office/powerpoint/2010/main" val="3452013509"/>
+                <p14:modId xmlns:p14="http://schemas.microsoft.com/office/powerpoint/2010/main" val="714175356"/>
               </p:ext>
             </p:extLst>
           </p:nvPr>
         </p:nvGraphicFramePr>
         <p:xfrm>
           <a:off x="952500" y="1544194"/>
-          <a:ext cx="7239000" cy="1047912"/>
+          <a:ext cx="7239000" cy="698608"/>
         </p:xfrm>
         <a:graphic>
           <a:graphicData uri="http://schemas.openxmlformats.org/drawingml/2006/table">
@@ -19078,7 +19071,7 @@
                           <a:cs typeface="Roboto"/>
                           <a:sym typeface="Roboto"/>
                         </a:rPr>
-                        <a:t>Backtesting.py</a:t>
+                        <a:t>Backtesting</a:t>
                       </a:r>
                       <a:endParaRPr lang="en-US" sz="1300" dirty="0">
                         <a:latin typeface="Roboto"/>
@@ -19135,182 +19128,6 @@
                   </a:ext>
                 </a:extLst>
               </a:tr>
-              <a:tr h="285750">
-                <a:tc>
-                  <a:txBody>
-                    <a:bodyPr/>
-                    <a:lstStyle/>
-                    <a:p>
-                      <a:pPr marL="0" lvl="0" indent="0" algn="l" rtl="0">
-                        <a:spcBef>
-                          <a:spcPts val="0"/>
-                        </a:spcBef>
-                        <a:spcAft>
-                          <a:spcPts val="0"/>
-                        </a:spcAft>
-                        <a:buNone/>
-                      </a:pPr>
-                      <a:r>
-                        <a:rPr lang="ru-RU" sz="1300" b="1" dirty="0">
-                          <a:solidFill>
-                            <a:srgbClr val="FF7700"/>
-                          </a:solidFill>
-                          <a:latin typeface="Roboto"/>
-                          <a:ea typeface="Roboto"/>
-                          <a:cs typeface="Roboto"/>
-                          <a:sym typeface="Roboto"/>
-                        </a:rPr>
-                        <a:t>3.</a:t>
-                      </a:r>
-                      <a:endParaRPr sz="1300" b="1" dirty="0">
-                        <a:solidFill>
-                          <a:srgbClr val="FF7700"/>
-                        </a:solidFill>
-                        <a:latin typeface="Roboto"/>
-                        <a:ea typeface="Roboto"/>
-                        <a:cs typeface="Roboto"/>
-                        <a:sym typeface="Roboto"/>
-                      </a:endParaRPr>
-                    </a:p>
-                  </a:txBody>
-                  <a:tcPr marL="198000" marR="91425" marT="68575" marB="68575">
-                    <a:lnL w="9525" cap="flat" cmpd="sng">
-                      <a:solidFill>
-                        <a:srgbClr val="BFC1F0">
-                          <a:alpha val="0"/>
-                        </a:srgbClr>
-                      </a:solidFill>
-                      <a:prstDash val="solid"/>
-                      <a:round/>
-                      <a:headEnd type="none" w="sm" len="sm"/>
-                      <a:tailEnd type="none" w="sm" len="sm"/>
-                    </a:lnL>
-                    <a:lnR w="9525" cap="flat" cmpd="sng" algn="ctr">
-                      <a:solidFill>
-                        <a:schemeClr val="lt1"/>
-                      </a:solidFill>
-                      <a:prstDash val="solid"/>
-                      <a:round/>
-                      <a:headEnd type="none" w="sm" len="sm"/>
-                      <a:tailEnd type="none" w="sm" len="sm"/>
-                    </a:lnR>
-                    <a:lnT w="9525" cap="flat" cmpd="sng" algn="ctr">
-                      <a:solidFill>
-                        <a:srgbClr val="9E9E9E"/>
-                      </a:solidFill>
-                      <a:prstDash val="solid"/>
-                      <a:round/>
-                      <a:headEnd type="none" w="sm" len="sm"/>
-                      <a:tailEnd type="none" w="sm" len="sm"/>
-                    </a:lnT>
-                    <a:lnB w="9525" cap="flat" cmpd="sng" algn="ctr">
-                      <a:solidFill>
-                        <a:srgbClr val="9E9E9E"/>
-                      </a:solidFill>
-                      <a:prstDash val="solid"/>
-                      <a:round/>
-                      <a:headEnd type="none" w="sm" len="sm"/>
-                      <a:tailEnd type="none" w="sm" len="sm"/>
-                    </a:lnB>
-                  </a:tcPr>
-                </a:tc>
-                <a:tc>
-                  <a:txBody>
-                    <a:bodyPr/>
-                    <a:lstStyle/>
-                    <a:p>
-                      <a:pPr marL="0" marR="0" lvl="0" indent="0" algn="l" defTabSz="914400" rtl="0" eaLnBrk="1" fontAlgn="auto" latinLnBrk="0" hangingPunct="1">
-                        <a:lnSpc>
-                          <a:spcPct val="115000"/>
-                        </a:lnSpc>
-                        <a:spcBef>
-                          <a:spcPts val="0"/>
-                        </a:spcBef>
-                        <a:spcAft>
-                          <a:spcPts val="0"/>
-                        </a:spcAft>
-                        <a:buClr>
-                          <a:srgbClr val="000000"/>
-                        </a:buClr>
-                        <a:buSzTx/>
-                        <a:buFont typeface="Arial"/>
-                        <a:buNone/>
-                        <a:tabLst/>
-                        <a:defRPr/>
-                      </a:pPr>
-                      <a:r>
-                        <a:rPr lang="ru-RU" sz="1300" dirty="0">
-                          <a:latin typeface="Roboto"/>
-                          <a:ea typeface="Roboto"/>
-                          <a:cs typeface="Roboto"/>
-                          <a:sym typeface="Roboto"/>
-                        </a:rPr>
-                        <a:t>Рассмотрим </a:t>
-                      </a:r>
-                      <a:r>
-                        <a:rPr lang="en-US" sz="1300" dirty="0" err="1">
-                          <a:latin typeface="Roboto"/>
-                          <a:ea typeface="Roboto"/>
-                          <a:cs typeface="Roboto"/>
-                          <a:sym typeface="Roboto"/>
-                        </a:rPr>
-                        <a:t>Backtrader</a:t>
-                      </a:r>
-                      <a:endParaRPr lang="en-US" sz="1300" dirty="0">
-                        <a:latin typeface="Roboto"/>
-                        <a:ea typeface="Roboto"/>
-                        <a:cs typeface="Roboto"/>
-                        <a:sym typeface="Roboto"/>
-                      </a:endParaRPr>
-                    </a:p>
-                  </a:txBody>
-                  <a:tcPr marL="198000" marR="91425" marT="68575" marB="68575">
-                    <a:lnL w="9525" cap="flat" cmpd="sng" algn="ctr">
-                      <a:solidFill>
-                        <a:schemeClr val="lt1"/>
-                      </a:solidFill>
-                      <a:prstDash val="solid"/>
-                      <a:round/>
-                      <a:headEnd type="none" w="sm" len="sm"/>
-                      <a:tailEnd type="none" w="sm" len="sm"/>
-                    </a:lnL>
-                    <a:lnR w="9525" cap="flat" cmpd="sng">
-                      <a:solidFill>
-                        <a:srgbClr val="BFC1F0">
-                          <a:alpha val="0"/>
-                        </a:srgbClr>
-                      </a:solidFill>
-                      <a:prstDash val="solid"/>
-                      <a:round/>
-                      <a:headEnd type="none" w="sm" len="sm"/>
-                      <a:tailEnd type="none" w="sm" len="sm"/>
-                    </a:lnR>
-                    <a:lnT w="9525" cap="flat" cmpd="sng" algn="ctr">
-                      <a:solidFill>
-                        <a:srgbClr val="9E9E9E"/>
-                      </a:solidFill>
-                      <a:prstDash val="solid"/>
-                      <a:round/>
-                      <a:headEnd type="none" w="sm" len="sm"/>
-                      <a:tailEnd type="none" w="sm" len="sm"/>
-                    </a:lnT>
-                    <a:lnB w="9525" cap="flat" cmpd="sng" algn="ctr">
-                      <a:solidFill>
-                        <a:srgbClr val="9E9E9E"/>
-                      </a:solidFill>
-                      <a:prstDash val="solid"/>
-                      <a:round/>
-                      <a:headEnd type="none" w="sm" len="sm"/>
-                      <a:tailEnd type="none" w="sm" len="sm"/>
-                    </a:lnB>
-                  </a:tcPr>
-                </a:tc>
-                <a:extLst>
-                  <a:ext uri="{0D108BD9-81ED-4DB2-BD59-A6C34878D82A}">
-                    <a16:rowId xmlns:a16="http://schemas.microsoft.com/office/drawing/2014/main" val="2003168869"/>
-                  </a:ext>
-                </a:extLst>
-              </a:tr>
             </a:tbl>
           </a:graphicData>
         </a:graphic>
@@ -19686,7 +19503,7 @@
           <p:nvPr>
             <p:extLst>
               <p:ext uri="{D42A27DB-BD31-4B8C-83A1-F6EECF244321}">
-                <p14:modId xmlns:p14="http://schemas.microsoft.com/office/powerpoint/2010/main" val="2572124173"/>
+                <p14:modId xmlns:p14="http://schemas.microsoft.com/office/powerpoint/2010/main" val="3016037739"/>
               </p:ext>
             </p:extLst>
           </p:nvPr>
@@ -20150,7 +19967,7 @@
                           <a:cs typeface="Roboto"/>
                           <a:sym typeface="Roboto"/>
                         </a:rPr>
-                        <a:t>Попробовали использовать два из них – </a:t>
+                        <a:t>Попробовали использовать один из них – </a:t>
                       </a:r>
                       <a:r>
                         <a:rPr lang="en-US" sz="1300" dirty="0" err="1">
@@ -20160,33 +19977,6 @@
                           <a:sym typeface="Roboto"/>
                         </a:rPr>
                         <a:t>Backtesting</a:t>
-                      </a:r>
-                      <a:r>
-                        <a:rPr lang="en-US" sz="1300" dirty="0">
-                          <a:latin typeface="Roboto"/>
-                          <a:ea typeface="Roboto"/>
-                          <a:cs typeface="Roboto"/>
-                          <a:sym typeface="Roboto"/>
-                        </a:rPr>
-                        <a:t> </a:t>
-                      </a:r>
-                      <a:r>
-                        <a:rPr lang="ru-RU" sz="1300" dirty="0">
-                          <a:latin typeface="Roboto"/>
-                          <a:ea typeface="Roboto"/>
-                          <a:cs typeface="Roboto"/>
-                          <a:sym typeface="Roboto"/>
-                        </a:rPr>
-                        <a:t>и </a:t>
-                      </a:r>
-                      <a:r>
-                        <a:rPr lang="en-US" sz="1300" dirty="0" err="1">
-                          <a:latin typeface="Roboto"/>
-                          <a:ea typeface="Roboto"/>
-                          <a:cs typeface="Roboto"/>
-                          <a:sym typeface="Roboto"/>
-                        </a:rPr>
-                        <a:t>Backtrader</a:t>
                       </a:r>
                       <a:endParaRPr sz="1300" dirty="0">
                         <a:latin typeface="Roboto"/>
@@ -20455,7 +20245,17 @@
                 <a:latin typeface="+mn-lt"/>
                 <a:sym typeface="Roboto"/>
               </a:rPr>
-              <a:t>Введение в финансовые рынки и машинное обучение</a:t>
+              <a:t>Введение в </a:t>
+            </a:r>
+            <a:r>
+              <a:rPr lang="en-US" sz="1050" dirty="0">
+                <a:solidFill>
+                  <a:srgbClr val="1F1F1F"/>
+                </a:solidFill>
+                <a:latin typeface="+mn-lt"/>
+                <a:sym typeface="Roboto"/>
+              </a:rPr>
+              <a:t>ML</a:t>
             </a:r>
             <a:endParaRPr sz="1050" dirty="0">
               <a:solidFill>
@@ -20475,7 +20275,7 @@
         </p:nvSpPr>
         <p:spPr>
           <a:xfrm>
-            <a:off x="654005" y="1664080"/>
+            <a:off x="654005" y="1827113"/>
             <a:ext cx="3060000" cy="579300"/>
           </a:xfrm>
           <a:prstGeom prst="roundRect">
@@ -20536,7 +20336,7 @@
         </p:nvSpPr>
         <p:spPr>
           <a:xfrm>
-            <a:off x="5074342" y="2505600"/>
+            <a:off x="5074342" y="2920270"/>
             <a:ext cx="3229663" cy="579300"/>
           </a:xfrm>
           <a:prstGeom prst="roundRect">
@@ -20577,7 +20377,7 @@
                 <a:latin typeface="+mn-lt"/>
                 <a:sym typeface="Roboto"/>
               </a:rPr>
-              <a:t>Моделирование и стратегии на финансовых рынках</a:t>
+              <a:t>Продвинутые нейросети</a:t>
             </a:r>
             <a:endParaRPr sz="1050" dirty="0">
               <a:solidFill>
@@ -20597,7 +20397,7 @@
         </p:nvSpPr>
         <p:spPr>
           <a:xfrm>
-            <a:off x="5244005" y="1664080"/>
+            <a:off x="5244005" y="1827113"/>
             <a:ext cx="3060000" cy="579300"/>
           </a:xfrm>
           <a:prstGeom prst="roundRect">
@@ -20638,7 +20438,7 @@
                 <a:latin typeface="+mn-lt"/>
                 <a:sym typeface="Roboto"/>
               </a:rPr>
-              <a:t>Подготовка данных и признаковая инженерия</a:t>
+              <a:t>Глубокое обучение</a:t>
             </a:r>
             <a:endParaRPr sz="1050" dirty="0">
               <a:solidFill>
@@ -20662,8 +20462,8 @@
         </p:nvCxnSpPr>
         <p:spPr>
           <a:xfrm rot="10800000" flipV="1">
-            <a:off x="2184006" y="1059620"/>
-            <a:ext cx="857995" cy="604460"/>
+            <a:off x="2184006" y="1059619"/>
+            <a:ext cx="857995" cy="767493"/>
           </a:xfrm>
           <a:prstGeom prst="curvedConnector2">
             <a:avLst/>
@@ -20688,7 +20488,7 @@
         </p:nvSpPr>
         <p:spPr>
           <a:xfrm>
-            <a:off x="654005" y="2511737"/>
+            <a:off x="654005" y="2926407"/>
             <a:ext cx="3060000" cy="579300"/>
           </a:xfrm>
           <a:prstGeom prst="roundRect">
@@ -20729,7 +20529,7 @@
                 <a:latin typeface="+mn-lt"/>
                 <a:sym typeface="Roboto"/>
               </a:rPr>
-              <a:t>Глубокое обучение и практические аспекты</a:t>
+              <a:t>Перенос модели в облачную среду</a:t>
             </a:r>
           </a:p>
         </p:txBody>
@@ -20746,7 +20546,7 @@
         </p:nvCxnSpPr>
         <p:spPr>
           <a:xfrm>
-            <a:off x="3714005" y="1953730"/>
+            <a:off x="3714005" y="2116763"/>
             <a:ext cx="1530000" cy="12700"/>
           </a:xfrm>
           <a:prstGeom prst="curvedConnector3">
@@ -20778,8 +20578,8 @@
         </p:nvCxnSpPr>
         <p:spPr>
           <a:xfrm>
-            <a:off x="8304005" y="1953730"/>
-            <a:ext cx="12700" cy="841520"/>
+            <a:off x="8304005" y="2116763"/>
+            <a:ext cx="12700" cy="1093157"/>
           </a:xfrm>
           <a:prstGeom prst="curvedConnector3">
             <a:avLst>
@@ -20810,7 +20610,7 @@
         </p:nvCxnSpPr>
         <p:spPr>
           <a:xfrm rot="10800000" flipV="1">
-            <a:off x="3714006" y="2795249"/>
+            <a:off x="3714006" y="3209919"/>
             <a:ext cx="1360337" cy="6137"/>
           </a:xfrm>
           <a:prstGeom prst="curvedConnector3">
@@ -20830,77 +20630,6 @@
           </a:ln>
         </p:spPr>
       </p:cxnSp>
-      <p:sp>
-        <p:nvSpPr>
-          <p:cNvPr id="189" name="Google Shape;189;p34"/>
-          <p:cNvSpPr/>
-          <p:nvPr/>
-        </p:nvSpPr>
-        <p:spPr>
-          <a:xfrm>
-            <a:off x="654005" y="3365815"/>
-            <a:ext cx="3060000" cy="579300"/>
-          </a:xfrm>
-          <a:prstGeom prst="roundRect">
-            <a:avLst>
-              <a:gd name="adj" fmla="val 16667"/>
-            </a:avLst>
-          </a:prstGeom>
-          <a:solidFill>
-            <a:srgbClr val="FFD966"/>
-          </a:solidFill>
-          <a:ln>
-            <a:noFill/>
-          </a:ln>
-          <a:effectLst/>
-        </p:spPr>
-        <p:txBody>
-          <a:bodyPr spcFirstLastPara="1" wrap="square" lIns="162000" tIns="91425" rIns="162000" bIns="91425" anchor="ctr" anchorCtr="0">
-            <a:noAutofit/>
-          </a:bodyPr>
-          <a:lstStyle/>
-          <a:p>
-            <a:pPr marL="432000"/>
-            <a:r>
-              <a:rPr lang="en-US" sz="1050" dirty="0">
-                <a:solidFill>
-                  <a:srgbClr val="1F1F1F"/>
-                </a:solidFill>
-                <a:latin typeface="+mn-lt"/>
-                <a:sym typeface="Roboto"/>
-              </a:rPr>
-              <a:t>6. </a:t>
-            </a:r>
-            <a:r>
-              <a:rPr lang="ru-RU" sz="1050" dirty="0">
-                <a:solidFill>
-                  <a:srgbClr val="1F1F1F"/>
-                </a:solidFill>
-                <a:latin typeface="+mn-lt"/>
-                <a:sym typeface="Roboto"/>
-              </a:rPr>
-              <a:t>Сложные модели торгового агента и перенос обучения в </a:t>
-            </a:r>
-            <a:r>
-              <a:rPr lang="en-US" sz="1050" dirty="0">
-                <a:solidFill>
-                  <a:srgbClr val="1F1F1F"/>
-                </a:solidFill>
-                <a:latin typeface="+mn-lt"/>
-                <a:sym typeface="Roboto"/>
-              </a:rPr>
-              <a:t>production</a:t>
-            </a:r>
-            <a:endParaRPr sz="1050" dirty="0">
-              <a:solidFill>
-                <a:srgbClr val="1F1F1F"/>
-              </a:solidFill>
-              <a:latin typeface="+mn-lt"/>
-              <a:sym typeface="Roboto"/>
-            </a:endParaRPr>
-          </a:p>
-        </p:txBody>
-      </p:sp>
       <p:sp>
         <p:nvSpPr>
           <p:cNvPr id="34" name="Google Shape;189;p34">
@@ -21000,53 +20729,15 @@
           </p:cNvPr>
           <p:cNvCxnSpPr>
             <a:cxnSpLocks/>
-            <a:stCxn id="189" idx="1"/>
-            <a:endCxn id="185" idx="1"/>
+            <a:stCxn id="34" idx="1"/>
+            <a:endCxn id="185" idx="2"/>
           </p:cNvCxnSpPr>
           <p:nvPr/>
         </p:nvCxnSpPr>
         <p:spPr>
           <a:xfrm rot="10800000">
-            <a:off x="654005" y="2801387"/>
-            <a:ext cx="12700" cy="854078"/>
-          </a:xfrm>
-          <a:prstGeom prst="curvedConnector3">
-            <a:avLst>
-              <a:gd name="adj1" fmla="val 1800000"/>
-            </a:avLst>
-          </a:prstGeom>
-          <a:noFill/>
-          <a:ln w="9525" cap="flat" cmpd="sng">
-            <a:solidFill>
-              <a:schemeClr val="dk1"/>
-            </a:solidFill>
-            <a:prstDash val="dash"/>
-            <a:round/>
-            <a:headEnd type="arrow" w="med" len="med"/>
-            <a:tailEnd type="none" w="med" len="med"/>
-          </a:ln>
-        </p:spPr>
-      </p:cxnSp>
-      <p:cxnSp>
-        <p:nvCxnSpPr>
-          <p:cNvPr id="38" name="Google Shape;188;p34">
-            <a:extLst>
-              <a:ext uri="{FF2B5EF4-FFF2-40B4-BE49-F238E27FC236}">
-                <a16:creationId xmlns:a16="http://schemas.microsoft.com/office/drawing/2014/main" id="{F7B38074-28CA-DC44-8191-7A278B3DB050}"/>
-              </a:ext>
-            </a:extLst>
-          </p:cNvPr>
-          <p:cNvCxnSpPr>
-            <a:cxnSpLocks/>
-            <a:stCxn id="34" idx="0"/>
-            <a:endCxn id="189" idx="3"/>
-          </p:cNvCxnSpPr>
-          <p:nvPr/>
-        </p:nvCxnSpPr>
-        <p:spPr>
-          <a:xfrm rot="16200000" flipV="1">
-            <a:off x="3853353" y="3516117"/>
-            <a:ext cx="579300" cy="857995"/>
+            <a:off x="2184006" y="3505707"/>
+            <a:ext cx="857995" cy="1018708"/>
           </a:xfrm>
           <a:prstGeom prst="curvedConnector2">
             <a:avLst/>
@@ -21177,7 +20868,7 @@
         </p:blipFill>
         <p:spPr>
           <a:xfrm>
-            <a:off x="2795778" y="2238233"/>
+            <a:off x="2795778" y="2401266"/>
             <a:ext cx="246222" cy="246221"/>
           </a:xfrm>
           <a:prstGeom prst="rect">
@@ -21203,7 +20894,7 @@
         </p:nvSpPr>
         <p:spPr>
           <a:xfrm>
-            <a:off x="3042000" y="2238234"/>
+            <a:off x="3042000" y="2401267"/>
             <a:ext cx="764953" cy="246221"/>
           </a:xfrm>
           <a:prstGeom prst="rect">
@@ -21261,7 +20952,7 @@
         </p:blipFill>
         <p:spPr>
           <a:xfrm>
-            <a:off x="7308984" y="2232180"/>
+            <a:off x="7308984" y="2395213"/>
             <a:ext cx="246222" cy="246221"/>
           </a:xfrm>
           <a:prstGeom prst="rect">
@@ -21287,7 +20978,7 @@
         </p:nvSpPr>
         <p:spPr>
           <a:xfrm>
-            <a:off x="7555206" y="2232181"/>
+            <a:off x="7555206" y="2395214"/>
             <a:ext cx="764953" cy="246221"/>
           </a:xfrm>
           <a:prstGeom prst="rect">
@@ -21345,7 +21036,7 @@
         </p:blipFill>
         <p:spPr>
           <a:xfrm>
-            <a:off x="7308984" y="3091037"/>
+            <a:off x="7308984" y="3505707"/>
             <a:ext cx="246222" cy="246221"/>
           </a:xfrm>
           <a:prstGeom prst="rect">
@@ -21371,7 +21062,7 @@
         </p:nvSpPr>
         <p:spPr>
           <a:xfrm>
-            <a:off x="7555206" y="3091038"/>
+            <a:off x="7555206" y="3505708"/>
             <a:ext cx="764953" cy="246221"/>
           </a:xfrm>
           <a:prstGeom prst="rect">
@@ -21429,7 +21120,7 @@
         </p:blipFill>
         <p:spPr>
           <a:xfrm>
-            <a:off x="2747413" y="3091037"/>
+            <a:off x="2747413" y="3505707"/>
             <a:ext cx="246222" cy="246221"/>
           </a:xfrm>
           <a:prstGeom prst="rect">
@@ -21455,91 +21146,7 @@
         </p:nvSpPr>
         <p:spPr>
           <a:xfrm>
-            <a:off x="2993635" y="3091038"/>
-            <a:ext cx="764953" cy="246221"/>
-          </a:xfrm>
-          <a:prstGeom prst="rect">
-            <a:avLst/>
-          </a:prstGeom>
-          <a:noFill/>
-        </p:spPr>
-        <p:txBody>
-          <a:bodyPr wrap="none" rtlCol="0">
-            <a:spAutoFit/>
-          </a:bodyPr>
-          <a:lstStyle/>
-          <a:p>
-            <a:r>
-              <a:rPr lang="en-US" sz="1000" dirty="0" err="1">
-                <a:latin typeface="Apple Chancery" panose="03020702040506060504" pitchFamily="66" charset="-79"/>
-                <a:cs typeface="Apple Chancery" panose="03020702040506060504" pitchFamily="66" charset="-79"/>
-              </a:rPr>
-              <a:t>HomeTask</a:t>
-            </a:r>
-            <a:endParaRPr lang="en-US" sz="1000" dirty="0">
-              <a:latin typeface="Apple Chancery" panose="03020702040506060504" pitchFamily="66" charset="-79"/>
-              <a:cs typeface="Apple Chancery" panose="03020702040506060504" pitchFamily="66" charset="-79"/>
-            </a:endParaRPr>
-          </a:p>
-        </p:txBody>
-      </p:sp>
-      <p:pic>
-        <p:nvPicPr>
-          <p:cNvPr id="47" name="Google Shape;530;p82">
-            <a:extLst>
-              <a:ext uri="{FF2B5EF4-FFF2-40B4-BE49-F238E27FC236}">
-                <a16:creationId xmlns:a16="http://schemas.microsoft.com/office/drawing/2014/main" id="{C44CB1B9-3F0C-B640-9B91-7E329BDB5ABD}"/>
-              </a:ext>
-            </a:extLst>
-          </p:cNvPr>
-          <p:cNvPicPr preferRelativeResize="0">
-            <a:picLocks noChangeAspect="1"/>
-          </p:cNvPicPr>
-          <p:nvPr/>
-        </p:nvPicPr>
-        <p:blipFill rotWithShape="1">
-          <a:blip r:embed="rId3">
-            <a:alphaModFix/>
-            <a:duotone>
-              <a:schemeClr val="accent5">
-                <a:shade val="45000"/>
-                <a:satMod val="135000"/>
-              </a:schemeClr>
-              <a:prstClr val="white"/>
-            </a:duotone>
-          </a:blip>
-          <a:srcRect/>
-          <a:stretch/>
-        </p:blipFill>
-        <p:spPr>
-          <a:xfrm>
-            <a:off x="2747413" y="3945115"/>
-            <a:ext cx="246222" cy="246221"/>
-          </a:xfrm>
-          <a:prstGeom prst="rect">
-            <a:avLst/>
-          </a:prstGeom>
-          <a:noFill/>
-          <a:ln>
-            <a:noFill/>
-          </a:ln>
-        </p:spPr>
-      </p:pic>
-      <p:sp>
-        <p:nvSpPr>
-          <p:cNvPr id="48" name="TextBox 47">
-            <a:extLst>
-              <a:ext uri="{FF2B5EF4-FFF2-40B4-BE49-F238E27FC236}">
-                <a16:creationId xmlns:a16="http://schemas.microsoft.com/office/drawing/2014/main" id="{6F2CEF8E-768B-2A42-AE60-B91443CA1636}"/>
-              </a:ext>
-            </a:extLst>
-          </p:cNvPr>
-          <p:cNvSpPr txBox="1"/>
-          <p:nvPr/>
-        </p:nvSpPr>
-        <p:spPr>
-          <a:xfrm>
-            <a:off x="2993635" y="3945116"/>
+            <a:off x="2993635" y="3505708"/>
             <a:ext cx="764953" cy="246221"/>
           </a:xfrm>
           <a:prstGeom prst="rect">
@@ -21617,7 +21224,7 @@
         </p:blipFill>
         <p:spPr>
           <a:xfrm>
-            <a:off x="761508" y="2616086"/>
+            <a:off x="761508" y="3030756"/>
             <a:ext cx="419930" cy="396001"/>
           </a:xfrm>
           <a:prstGeom prst="ellipse">
@@ -21648,7 +21255,7 @@
         </p:blipFill>
         <p:spPr>
           <a:xfrm>
-            <a:off x="5379110" y="1770693"/>
+            <a:off x="5379110" y="1933726"/>
             <a:ext cx="419930" cy="396001"/>
           </a:xfrm>
           <a:prstGeom prst="ellipse">
@@ -21679,38 +21286,7 @@
         </p:blipFill>
         <p:spPr>
           <a:xfrm>
-            <a:off x="5169145" y="2616086"/>
-            <a:ext cx="419930" cy="396001"/>
-          </a:xfrm>
-          <a:prstGeom prst="ellipse">
-            <a:avLst/>
-          </a:prstGeom>
-          <a:noFill/>
-          <a:ln>
-            <a:noFill/>
-          </a:ln>
-        </p:spPr>
-      </p:pic>
-      <p:pic>
-        <p:nvPicPr>
-          <p:cNvPr id="56" name="Google Shape;225;p40">
-            <a:extLst>
-              <a:ext uri="{FF2B5EF4-FFF2-40B4-BE49-F238E27FC236}">
-                <a16:creationId xmlns:a16="http://schemas.microsoft.com/office/drawing/2014/main" id="{961AE516-CE39-C146-B04E-6F9CCFC749A3}"/>
-              </a:ext>
-            </a:extLst>
-          </p:cNvPr>
-          <p:cNvPicPr preferRelativeResize="0"/>
-          <p:nvPr/>
-        </p:nvPicPr>
-        <p:blipFill>
-          <a:blip r:embed="rId8"/>
-          <a:srcRect t="2849" b="2849"/>
-          <a:stretch/>
-        </p:blipFill>
-        <p:spPr>
-          <a:xfrm>
-            <a:off x="787457" y="3436703"/>
+            <a:off x="5169145" y="3030756"/>
             <a:ext cx="419930" cy="396001"/>
           </a:xfrm>
           <a:prstGeom prst="ellipse">
@@ -21735,13 +21311,13 @@
           <p:nvPr/>
         </p:nvPicPr>
         <p:blipFill>
-          <a:blip r:embed="rId9"/>
+          <a:blip r:embed="rId8"/>
           <a:srcRect t="2849" b="2849"/>
           <a:stretch/>
         </p:blipFill>
         <p:spPr>
           <a:xfrm>
-            <a:off x="787457" y="1770693"/>
+            <a:off x="787457" y="1933726"/>
             <a:ext cx="419930" cy="396001"/>
           </a:xfrm>
           <a:prstGeom prst="ellipse">
@@ -21766,7 +21342,7 @@
           <p:nvPr/>
         </p:nvPicPr>
         <p:blipFill>
-          <a:blip r:embed="rId10"/>
+          <a:blip r:embed="rId9"/>
           <a:srcRect t="2849" b="2849"/>
           <a:stretch/>
         </p:blipFill>
@@ -21902,7 +21478,17 @@
                 <a:latin typeface="+mn-lt"/>
                 <a:sym typeface="Roboto"/>
               </a:rPr>
-              <a:t>Введение в финансовые рынки и машинное обучение</a:t>
+              <a:t>Введение в </a:t>
+            </a:r>
+            <a:r>
+              <a:rPr lang="en-US" sz="1200" dirty="0">
+                <a:solidFill>
+                  <a:srgbClr val="1F1F1F"/>
+                </a:solidFill>
+                <a:latin typeface="+mn-lt"/>
+                <a:sym typeface="Roboto"/>
+              </a:rPr>
+              <a:t>ML</a:t>
             </a:r>
             <a:endParaRPr sz="1200" dirty="0">
               <a:solidFill>
@@ -21958,14 +21544,44 @@
           <a:lstStyle/>
           <a:p>
             <a:r>
-              <a:rPr lang="ru-RU" sz="1200" dirty="0">
+              <a:rPr lang="en-US" sz="1200" dirty="0" err="1">
                 <a:solidFill>
                   <a:srgbClr val="1F1F1F"/>
                 </a:solidFill>
                 <a:latin typeface="+mn-lt"/>
                 <a:sym typeface="Roboto"/>
               </a:rPr>
-              <a:t>Введение в финансовые рынки и основные понятия</a:t>
+              <a:t>Numpy</a:t>
+            </a:r>
+            <a:r>
+              <a:rPr lang="en-US" sz="1200" dirty="0">
+                <a:solidFill>
+                  <a:srgbClr val="1F1F1F"/>
+                </a:solidFill>
+                <a:latin typeface="+mn-lt"/>
+                <a:sym typeface="Roboto"/>
+              </a:rPr>
+              <a:t> </a:t>
+            </a:r>
+            <a:r>
+              <a:rPr lang="ru-RU" sz="1200" dirty="0">
+                <a:solidFill>
+                  <a:srgbClr val="1F1F1F"/>
+                </a:solidFill>
+                <a:latin typeface="+mn-lt"/>
+                <a:sym typeface="Roboto"/>
+              </a:rPr>
+              <a:t>и</a:t>
+            </a:r>
+            <a:r>
+              <a:rPr lang="en-US" sz="1200" dirty="0">
+                <a:solidFill>
+                  <a:srgbClr val="1F1F1F"/>
+                </a:solidFill>
+                <a:latin typeface="+mn-lt"/>
+                <a:sym typeface="Roboto"/>
+              </a:rPr>
+              <a:t> Pandas</a:t>
             </a:r>
             <a:endParaRPr sz="1200" dirty="0">
               <a:solidFill>
@@ -22028,17 +21644,27 @@
                 <a:latin typeface="+mn-lt"/>
                 <a:sym typeface="Roboto"/>
               </a:rPr>
-              <a:t>Основы машинного обучения и его применение </a:t>
+              <a:t>Графики</a:t>
             </a:r>
             <a:r>
-              <a:rPr lang="ru-RU" sz="1200">
+              <a:rPr lang="en-US" sz="1200" dirty="0">
                 <a:solidFill>
                   <a:srgbClr val="1F1F1F"/>
                 </a:solidFill>
                 <a:latin typeface="+mn-lt"/>
                 <a:sym typeface="Roboto"/>
               </a:rPr>
-              <a:t>в финансах</a:t>
+              <a:t>, </a:t>
+            </a:r>
+            <a:r>
+              <a:rPr lang="en-US" sz="1200" dirty="0" err="1">
+                <a:solidFill>
+                  <a:srgbClr val="1F1F1F"/>
+                </a:solidFill>
+                <a:latin typeface="+mn-lt"/>
+                <a:sym typeface="Roboto"/>
+              </a:rPr>
+              <a:t>mplfinance</a:t>
             </a:r>
             <a:endParaRPr lang="ru-RU" sz="1200" dirty="0">
               <a:solidFill>
@@ -22094,14 +21720,24 @@
           <a:lstStyle/>
           <a:p>
             <a:r>
-              <a:rPr lang="ru-RU" sz="1200" dirty="0">
+              <a:rPr lang="en-US" sz="1200" dirty="0">
                 <a:solidFill>
                   <a:srgbClr val="1F1F1F"/>
                 </a:solidFill>
                 <a:latin typeface="+mn-lt"/>
                 <a:sym typeface="Roboto"/>
               </a:rPr>
-              <a:t>Основы статистики и временных рядов в анализе финансов</a:t>
+              <a:t>EDA: </a:t>
+            </a:r>
+            <a:r>
+              <a:rPr lang="ru-RU" sz="1200" dirty="0">
+                <a:solidFill>
+                  <a:srgbClr val="1F1F1F"/>
+                </a:solidFill>
+                <a:latin typeface="+mn-lt"/>
+                <a:sym typeface="Roboto"/>
+              </a:rPr>
+              <a:t>сбор и очистка данных</a:t>
             </a:r>
             <a:endParaRPr sz="1200" dirty="0">
               <a:solidFill>
@@ -22164,7 +21800,7 @@
                 <a:latin typeface="+mn-lt"/>
                 <a:sym typeface="Roboto"/>
               </a:rPr>
-              <a:t>Инструменты анализа финансовых данных</a:t>
+              <a:t>Вспоминаем статистику, случайные величины</a:t>
             </a:r>
             <a:endParaRPr sz="1200" dirty="0">
               <a:solidFill>
@@ -22360,12 +21996,223 @@
           </a:fontRef>
         </p:style>
       </p:cxnSp>
+      <p:sp>
+        <p:nvSpPr>
+          <p:cNvPr id="18" name="Google Shape;271;p44">
+            <a:extLst>
+              <a:ext uri="{FF2B5EF4-FFF2-40B4-BE49-F238E27FC236}">
+                <a16:creationId xmlns:a16="http://schemas.microsoft.com/office/drawing/2014/main" id="{D77AA650-7B6A-2E4F-A234-07C44F1AF1CD}"/>
+              </a:ext>
+            </a:extLst>
+          </p:cNvPr>
+          <p:cNvSpPr/>
+          <p:nvPr/>
+        </p:nvSpPr>
+        <p:spPr>
+          <a:xfrm>
+            <a:off x="2226713" y="3915856"/>
+            <a:ext cx="5355965" cy="396000"/>
+          </a:xfrm>
+          <a:prstGeom prst="roundRect">
+            <a:avLst>
+              <a:gd name="adj" fmla="val 16667"/>
+            </a:avLst>
+          </a:prstGeom>
+          <a:solidFill>
+            <a:srgbClr val="FFD966"/>
+          </a:solidFill>
+          <a:ln>
+            <a:noFill/>
+          </a:ln>
+          <a:effectLst>
+            <a:glow>
+              <a:schemeClr val="accent1">
+                <a:satMod val="175000"/>
+                <a:alpha val="40000"/>
+              </a:schemeClr>
+            </a:glow>
+          </a:effectLst>
+        </p:spPr>
+        <p:txBody>
+          <a:bodyPr spcFirstLastPara="1" wrap="square" lIns="162000" tIns="91425" rIns="162000" bIns="91425" anchor="ctr" anchorCtr="0">
+            <a:noAutofit/>
+          </a:bodyPr>
+          <a:lstStyle/>
+          <a:p>
+            <a:r>
+              <a:rPr lang="ru-RU" sz="1200" dirty="0">
+                <a:solidFill>
+                  <a:srgbClr val="1F1F1F"/>
+                </a:solidFill>
+                <a:latin typeface="+mn-lt"/>
+                <a:sym typeface="Roboto"/>
+              </a:rPr>
+              <a:t>Большие данные</a:t>
+            </a:r>
+            <a:endParaRPr sz="1200" dirty="0">
+              <a:solidFill>
+                <a:srgbClr val="1F1F1F"/>
+              </a:solidFill>
+              <a:latin typeface="+mn-lt"/>
+              <a:sym typeface="Roboto"/>
+            </a:endParaRPr>
+          </a:p>
+        </p:txBody>
+      </p:sp>
+      <p:cxnSp>
+        <p:nvCxnSpPr>
+          <p:cNvPr id="19" name="Elbow Connector 18">
+            <a:extLst>
+              <a:ext uri="{FF2B5EF4-FFF2-40B4-BE49-F238E27FC236}">
+                <a16:creationId xmlns:a16="http://schemas.microsoft.com/office/drawing/2014/main" id="{4E4FCD50-FA53-BF4C-9AB8-F81862AA8721}"/>
+              </a:ext>
+            </a:extLst>
+          </p:cNvPr>
+          <p:cNvCxnSpPr>
+            <a:cxnSpLocks/>
+            <a:stCxn id="271" idx="2"/>
+            <a:endCxn id="18" idx="1"/>
+          </p:cNvCxnSpPr>
+          <p:nvPr/>
+        </p:nvCxnSpPr>
+        <p:spPr>
+          <a:xfrm rot="16200000" flipH="1">
+            <a:off x="893333" y="2780475"/>
+            <a:ext cx="2430137" cy="236623"/>
+          </a:xfrm>
+          <a:prstGeom prst="bentConnector2">
+            <a:avLst/>
+          </a:prstGeom>
+          <a:ln>
+            <a:solidFill>
+              <a:schemeClr val="tx1"/>
+            </a:solidFill>
+            <a:tailEnd type="triangle"/>
+          </a:ln>
+        </p:spPr>
+        <p:style>
+          <a:lnRef idx="1">
+            <a:schemeClr val="accent1"/>
+          </a:lnRef>
+          <a:fillRef idx="0">
+            <a:schemeClr val="accent1"/>
+          </a:fillRef>
+          <a:effectRef idx="0">
+            <a:schemeClr val="accent1"/>
+          </a:effectRef>
+          <a:fontRef idx="minor">
+            <a:schemeClr val="tx1"/>
+          </a:fontRef>
+        </p:style>
+      </p:cxnSp>
+      <p:pic>
+        <p:nvPicPr>
+          <p:cNvPr id="32" name="Google Shape;225;p40">
+            <a:extLst>
+              <a:ext uri="{FF2B5EF4-FFF2-40B4-BE49-F238E27FC236}">
+                <a16:creationId xmlns:a16="http://schemas.microsoft.com/office/drawing/2014/main" id="{81ED1289-B687-F04C-ACCE-E6C6681EFFC3}"/>
+              </a:ext>
+            </a:extLst>
+          </p:cNvPr>
+          <p:cNvPicPr preferRelativeResize="0"/>
+          <p:nvPr/>
+        </p:nvPicPr>
+        <p:blipFill>
+          <a:blip r:embed="rId3"/>
+          <a:srcRect l="18187" r="18187"/>
+          <a:stretch/>
+        </p:blipFill>
+        <p:spPr>
+          <a:xfrm>
+            <a:off x="612428" y="1196068"/>
+            <a:ext cx="419930" cy="396001"/>
+          </a:xfrm>
+          <a:prstGeom prst="ellipse">
+            <a:avLst/>
+          </a:prstGeom>
+          <a:noFill/>
+          <a:ln>
+            <a:noFill/>
+          </a:ln>
+        </p:spPr>
+      </p:pic>
+      <p:sp>
+        <p:nvSpPr>
+          <p:cNvPr id="21" name="Google Shape;271;p44">
+            <a:extLst>
+              <a:ext uri="{FF2B5EF4-FFF2-40B4-BE49-F238E27FC236}">
+                <a16:creationId xmlns:a16="http://schemas.microsoft.com/office/drawing/2014/main" id="{729BB019-C6C6-024F-B93E-27A337C996C0}"/>
+              </a:ext>
+            </a:extLst>
+          </p:cNvPr>
+          <p:cNvSpPr/>
+          <p:nvPr/>
+        </p:nvSpPr>
+        <p:spPr>
+          <a:xfrm>
+            <a:off x="2226713" y="4416776"/>
+            <a:ext cx="5355965" cy="396000"/>
+          </a:xfrm>
+          <a:prstGeom prst="roundRect">
+            <a:avLst>
+              <a:gd name="adj" fmla="val 16667"/>
+            </a:avLst>
+          </a:prstGeom>
+          <a:gradFill>
+            <a:gsLst>
+              <a:gs pos="0">
+                <a:srgbClr val="FFD966"/>
+              </a:gs>
+              <a:gs pos="100000">
+                <a:schemeClr val="bg1"/>
+              </a:gs>
+            </a:gsLst>
+            <a:lin ang="5400000" scaled="1"/>
+          </a:gradFill>
+          <a:ln>
+            <a:noFill/>
+          </a:ln>
+          <a:effectLst>
+            <a:glow>
+              <a:schemeClr val="accent1">
+                <a:satMod val="175000"/>
+                <a:alpha val="40000"/>
+              </a:schemeClr>
+            </a:glow>
+          </a:effectLst>
+        </p:spPr>
+        <p:txBody>
+          <a:bodyPr spcFirstLastPara="1" wrap="square" lIns="162000" tIns="91425" rIns="162000" bIns="91425" anchor="ctr" anchorCtr="0">
+            <a:noAutofit/>
+          </a:bodyPr>
+          <a:lstStyle/>
+          <a:p>
+            <a:r>
+              <a:rPr lang="ru-RU" sz="1200" dirty="0">
+                <a:solidFill>
+                  <a:srgbClr val="1F1F1F"/>
+                </a:solidFill>
+                <a:latin typeface="+mn-lt"/>
+                <a:sym typeface="Roboto"/>
+              </a:rPr>
+              <a:t>…</a:t>
+            </a:r>
+            <a:endParaRPr sz="1200" dirty="0">
+              <a:solidFill>
+                <a:srgbClr val="1F1F1F"/>
+              </a:solidFill>
+              <a:latin typeface="+mn-lt"/>
+              <a:sym typeface="Roboto"/>
+            </a:endParaRPr>
+          </a:p>
+        </p:txBody>
+      </p:sp>
       <p:graphicFrame>
         <p:nvGraphicFramePr>
-          <p:cNvPr id="23" name="Table 23">
+          <p:cNvPr id="22" name="Table 23">
             <a:extLst>
               <a:ext uri="{FF2B5EF4-FFF2-40B4-BE49-F238E27FC236}">
-                <a16:creationId xmlns:a16="http://schemas.microsoft.com/office/drawing/2014/main" id="{7207DC4F-0418-0E43-AEA2-26001954E05D}"/>
+                <a16:creationId xmlns:a16="http://schemas.microsoft.com/office/drawing/2014/main" id="{3DC0A0B1-54E3-F244-BD6D-3259F3B16906}"/>
               </a:ext>
             </a:extLst>
           </p:cNvPr>
@@ -22375,14 +22222,14 @@
           <p:nvPr>
             <p:extLst>
               <p:ext uri="{D42A27DB-BD31-4B8C-83A1-F6EECF244321}">
-                <p14:modId xmlns:p14="http://schemas.microsoft.com/office/powerpoint/2010/main" val="1510702577"/>
+                <p14:modId xmlns:p14="http://schemas.microsoft.com/office/powerpoint/2010/main" val="3530625483"/>
               </p:ext>
             </p:extLst>
           </p:nvPr>
         </p:nvGraphicFramePr>
         <p:xfrm>
-          <a:off x="5355768" y="573874"/>
-          <a:ext cx="2226910" cy="304800"/>
+          <a:off x="5673898" y="573874"/>
+          <a:ext cx="1908780" cy="304800"/>
         </p:xfrm>
         <a:graphic>
           <a:graphicData uri="http://schemas.openxmlformats.org/drawingml/2006/table">
@@ -22428,13 +22275,6 @@
                   <a:extLst>
                     <a:ext uri="{9D8B030D-6E8A-4147-A177-3AD203B41FA5}">
                       <a16:colId xmlns:a16="http://schemas.microsoft.com/office/drawing/2014/main" val="4238538779"/>
-                    </a:ext>
-                  </a:extLst>
-                </a:gridCol>
-                <a:gridCol w="318130">
-                  <a:extLst>
-                    <a:ext uri="{9D8B030D-6E8A-4147-A177-3AD203B41FA5}">
-                      <a16:colId xmlns:a16="http://schemas.microsoft.com/office/drawing/2014/main" val="4263781807"/>
                     </a:ext>
                   </a:extLst>
                 </a:gridCol>
@@ -22617,25 +22457,6 @@
                     </a:solidFill>
                   </a:tcPr>
                 </a:tc>
-                <a:tc>
-                  <a:txBody>
-                    <a:bodyPr/>
-                    <a:lstStyle/>
-                    <a:p>
-                      <a:pPr algn="ctr"/>
-                      <a:r>
-                        <a:rPr lang="ru-RU" dirty="0"/>
-                        <a:t>7</a:t>
-                      </a:r>
-                      <a:endParaRPr lang="en-US" dirty="0"/>
-                    </a:p>
-                  </a:txBody>
-                  <a:tcPr>
-                    <a:solidFill>
-                      <a:srgbClr val="FFD966"/>
-                    </a:solidFill>
-                  </a:tcPr>
-                </a:tc>
                 <a:extLst>
                   <a:ext uri="{0D108BD9-81ED-4DB2-BD59-A6C34878D82A}">
                     <a16:rowId xmlns:a16="http://schemas.microsoft.com/office/drawing/2014/main" val="97753204"/>
@@ -22646,250 +22467,6 @@
           </a:graphicData>
         </a:graphic>
       </p:graphicFrame>
-      <p:pic>
-        <p:nvPicPr>
-          <p:cNvPr id="46" name="Google Shape;530;p82">
-            <a:extLst>
-              <a:ext uri="{FF2B5EF4-FFF2-40B4-BE49-F238E27FC236}">
-                <a16:creationId xmlns:a16="http://schemas.microsoft.com/office/drawing/2014/main" id="{43F299C2-9666-D540-A69A-8BF402009BEF}"/>
-              </a:ext>
-            </a:extLst>
-          </p:cNvPr>
-          <p:cNvPicPr preferRelativeResize="0">
-            <a:picLocks noChangeAspect="1"/>
-          </p:cNvPicPr>
-          <p:nvPr/>
-        </p:nvPicPr>
-        <p:blipFill rotWithShape="1">
-          <a:blip r:embed="rId3">
-            <a:alphaModFix/>
-            <a:duotone>
-              <a:schemeClr val="accent5">
-                <a:shade val="45000"/>
-                <a:satMod val="135000"/>
-              </a:schemeClr>
-              <a:prstClr val="white"/>
-            </a:duotone>
-          </a:blip>
-          <a:srcRect/>
-          <a:stretch/>
-        </p:blipFill>
-        <p:spPr>
-          <a:xfrm>
-            <a:off x="7244284" y="3446039"/>
-            <a:ext cx="324002" cy="324000"/>
-          </a:xfrm>
-          <a:prstGeom prst="rect">
-            <a:avLst/>
-          </a:prstGeom>
-          <a:noFill/>
-          <a:ln>
-            <a:noFill/>
-          </a:ln>
-        </p:spPr>
-      </p:pic>
-      <p:sp>
-        <p:nvSpPr>
-          <p:cNvPr id="47" name="TextBox 46">
-            <a:extLst>
-              <a:ext uri="{FF2B5EF4-FFF2-40B4-BE49-F238E27FC236}">
-                <a16:creationId xmlns:a16="http://schemas.microsoft.com/office/drawing/2014/main" id="{B64000B9-CA8D-D74A-98B4-3BFBB2C52658}"/>
-              </a:ext>
-            </a:extLst>
-          </p:cNvPr>
-          <p:cNvSpPr txBox="1"/>
-          <p:nvPr/>
-        </p:nvSpPr>
-        <p:spPr>
-          <a:xfrm rot="20748746">
-            <a:off x="7603438" y="3389945"/>
-            <a:ext cx="936475" cy="307777"/>
-          </a:xfrm>
-          <a:prstGeom prst="rect">
-            <a:avLst/>
-          </a:prstGeom>
-          <a:noFill/>
-        </p:spPr>
-        <p:txBody>
-          <a:bodyPr wrap="none" rtlCol="0">
-            <a:spAutoFit/>
-          </a:bodyPr>
-          <a:lstStyle/>
-          <a:p>
-            <a:r>
-              <a:rPr lang="en-US" dirty="0" err="1">
-                <a:latin typeface="AkayaTelivigala" pitchFamily="2" charset="77"/>
-                <a:cs typeface="Apple Chancery" panose="03020702040506060504" pitchFamily="66" charset="-79"/>
-              </a:rPr>
-              <a:t>HomeTask</a:t>
-            </a:r>
-            <a:endParaRPr lang="en-US" dirty="0">
-              <a:latin typeface="Bradley Hand" pitchFamily="2" charset="77"/>
-              <a:cs typeface="Apple Chancery" panose="03020702040506060504" pitchFamily="66" charset="-79"/>
-            </a:endParaRPr>
-          </a:p>
-        </p:txBody>
-      </p:sp>
-      <p:sp>
-        <p:nvSpPr>
-          <p:cNvPr id="18" name="Google Shape;271;p44">
-            <a:extLst>
-              <a:ext uri="{FF2B5EF4-FFF2-40B4-BE49-F238E27FC236}">
-                <a16:creationId xmlns:a16="http://schemas.microsoft.com/office/drawing/2014/main" id="{D77AA650-7B6A-2E4F-A234-07C44F1AF1CD}"/>
-              </a:ext>
-            </a:extLst>
-          </p:cNvPr>
-          <p:cNvSpPr/>
-          <p:nvPr/>
-        </p:nvSpPr>
-        <p:spPr>
-          <a:xfrm>
-            <a:off x="2226713" y="3915856"/>
-            <a:ext cx="5355965" cy="396000"/>
-          </a:xfrm>
-          <a:prstGeom prst="roundRect">
-            <a:avLst>
-              <a:gd name="adj" fmla="val 16667"/>
-            </a:avLst>
-          </a:prstGeom>
-          <a:solidFill>
-            <a:srgbClr val="FFD966"/>
-          </a:solidFill>
-          <a:ln>
-            <a:noFill/>
-          </a:ln>
-          <a:effectLst>
-            <a:glow>
-              <a:schemeClr val="accent1">
-                <a:satMod val="175000"/>
-                <a:alpha val="40000"/>
-              </a:schemeClr>
-            </a:glow>
-          </a:effectLst>
-        </p:spPr>
-        <p:txBody>
-          <a:bodyPr spcFirstLastPara="1" wrap="square" lIns="162000" tIns="91425" rIns="162000" bIns="91425" anchor="ctr" anchorCtr="0">
-            <a:noAutofit/>
-          </a:bodyPr>
-          <a:lstStyle/>
-          <a:p>
-            <a:r>
-              <a:rPr lang="ru-RU" sz="1200" dirty="0">
-                <a:solidFill>
-                  <a:srgbClr val="1F1F1F"/>
-                </a:solidFill>
-                <a:latin typeface="+mn-lt"/>
-                <a:sym typeface="Roboto"/>
-              </a:rPr>
-              <a:t>Практическое введение в </a:t>
-            </a:r>
-            <a:r>
-              <a:rPr lang="en-US" sz="1200" dirty="0">
-                <a:solidFill>
-                  <a:srgbClr val="1F1F1F"/>
-                </a:solidFill>
-                <a:latin typeface="+mn-lt"/>
-                <a:sym typeface="Roboto"/>
-              </a:rPr>
-              <a:t>Python </a:t>
-            </a:r>
-            <a:r>
-              <a:rPr lang="ru-RU" sz="1200" dirty="0">
-                <a:solidFill>
-                  <a:srgbClr val="1F1F1F"/>
-                </a:solidFill>
-                <a:latin typeface="+mn-lt"/>
-                <a:sym typeface="Roboto"/>
-              </a:rPr>
-              <a:t>для финансового анализа</a:t>
-            </a:r>
-            <a:endParaRPr sz="1200" dirty="0">
-              <a:solidFill>
-                <a:srgbClr val="1F1F1F"/>
-              </a:solidFill>
-              <a:latin typeface="+mn-lt"/>
-              <a:sym typeface="Roboto"/>
-            </a:endParaRPr>
-          </a:p>
-        </p:txBody>
-      </p:sp>
-      <p:cxnSp>
-        <p:nvCxnSpPr>
-          <p:cNvPr id="19" name="Elbow Connector 18">
-            <a:extLst>
-              <a:ext uri="{FF2B5EF4-FFF2-40B4-BE49-F238E27FC236}">
-                <a16:creationId xmlns:a16="http://schemas.microsoft.com/office/drawing/2014/main" id="{4E4FCD50-FA53-BF4C-9AB8-F81862AA8721}"/>
-              </a:ext>
-            </a:extLst>
-          </p:cNvPr>
-          <p:cNvCxnSpPr>
-            <a:cxnSpLocks/>
-            <a:stCxn id="271" idx="2"/>
-            <a:endCxn id="18" idx="1"/>
-          </p:cNvCxnSpPr>
-          <p:nvPr/>
-        </p:nvCxnSpPr>
-        <p:spPr>
-          <a:xfrm rot="16200000" flipH="1">
-            <a:off x="893333" y="2780475"/>
-            <a:ext cx="2430137" cy="236623"/>
-          </a:xfrm>
-          <a:prstGeom prst="bentConnector2">
-            <a:avLst/>
-          </a:prstGeom>
-          <a:ln>
-            <a:solidFill>
-              <a:schemeClr val="tx1"/>
-            </a:solidFill>
-            <a:tailEnd type="triangle"/>
-          </a:ln>
-        </p:spPr>
-        <p:style>
-          <a:lnRef idx="1">
-            <a:schemeClr val="accent1"/>
-          </a:lnRef>
-          <a:fillRef idx="0">
-            <a:schemeClr val="accent1"/>
-          </a:fillRef>
-          <a:effectRef idx="0">
-            <a:schemeClr val="accent1"/>
-          </a:effectRef>
-          <a:fontRef idx="minor">
-            <a:schemeClr val="tx1"/>
-          </a:fontRef>
-        </p:style>
-      </p:cxnSp>
-      <p:pic>
-        <p:nvPicPr>
-          <p:cNvPr id="32" name="Google Shape;225;p40">
-            <a:extLst>
-              <a:ext uri="{FF2B5EF4-FFF2-40B4-BE49-F238E27FC236}">
-                <a16:creationId xmlns:a16="http://schemas.microsoft.com/office/drawing/2014/main" id="{81ED1289-B687-F04C-ACCE-E6C6681EFFC3}"/>
-              </a:ext>
-            </a:extLst>
-          </p:cNvPr>
-          <p:cNvPicPr preferRelativeResize="0"/>
-          <p:nvPr/>
-        </p:nvPicPr>
-        <p:blipFill>
-          <a:blip r:embed="rId4"/>
-          <a:srcRect l="18187" r="18187"/>
-          <a:stretch/>
-        </p:blipFill>
-        <p:spPr>
-          <a:xfrm>
-            <a:off x="612428" y="1196068"/>
-            <a:ext cx="419930" cy="396001"/>
-          </a:xfrm>
-          <a:prstGeom prst="ellipse">
-            <a:avLst/>
-          </a:prstGeom>
-          <a:noFill/>
-          <a:ln>
-            <a:noFill/>
-          </a:ln>
-        </p:spPr>
-      </p:pic>
     </p:spTree>
     <p:extLst>
       <p:ext uri="{BB962C8B-B14F-4D97-AF65-F5344CB8AC3E}">
@@ -22984,7 +22561,14 @@
           <a:ln>
             <a:noFill/>
           </a:ln>
-          <a:effectLst/>
+          <a:effectLst>
+            <a:glow rad="139700">
+              <a:schemeClr val="accent1">
+                <a:satMod val="175000"/>
+                <a:alpha val="40000"/>
+              </a:schemeClr>
+            </a:glow>
+          </a:effectLst>
         </p:spPr>
         <p:txBody>
           <a:bodyPr spcFirstLastPara="1" wrap="square" lIns="162000" tIns="91425" rIns="162000" bIns="91425" anchor="ctr" anchorCtr="0">
@@ -23001,63 +22585,17 @@
                 <a:latin typeface="+mn-lt"/>
                 <a:sym typeface="Roboto"/>
               </a:rPr>
-              <a:t>Технический анализ финансовых рынков</a:t>
+              <a:t>Введение в </a:t>
             </a:r>
-            <a:endParaRPr sz="1200" dirty="0">
-              <a:solidFill>
-                <a:srgbClr val="1F1F1F"/>
-              </a:solidFill>
-              <a:latin typeface="+mn-lt"/>
-              <a:sym typeface="Roboto"/>
-            </a:endParaRPr>
-          </a:p>
-        </p:txBody>
-      </p:sp>
-      <p:sp>
-        <p:nvSpPr>
-          <p:cNvPr id="12" name="Google Shape;271;p44">
-            <a:extLst>
-              <a:ext uri="{FF2B5EF4-FFF2-40B4-BE49-F238E27FC236}">
-                <a16:creationId xmlns:a16="http://schemas.microsoft.com/office/drawing/2014/main" id="{D8FD06C8-E377-A548-A8E0-938A22A6A104}"/>
-              </a:ext>
-            </a:extLst>
-          </p:cNvPr>
-          <p:cNvSpPr/>
-          <p:nvPr/>
-        </p:nvSpPr>
-        <p:spPr>
-          <a:xfrm>
-            <a:off x="2226713" y="1892008"/>
-            <a:ext cx="5355965" cy="396000"/>
-          </a:xfrm>
-          <a:prstGeom prst="roundRect">
-            <a:avLst>
-              <a:gd name="adj" fmla="val 16667"/>
-            </a:avLst>
-          </a:prstGeom>
-          <a:solidFill>
-            <a:srgbClr val="FFD966"/>
-          </a:solidFill>
-          <a:ln>
-            <a:noFill/>
-          </a:ln>
-          <a:effectLst/>
-        </p:spPr>
-        <p:txBody>
-          <a:bodyPr spcFirstLastPara="1" wrap="square" lIns="162000" tIns="91425" rIns="162000" bIns="91425" anchor="ctr" anchorCtr="0">
-            <a:noAutofit/>
-          </a:bodyPr>
-          <a:lstStyle/>
-          <a:p>
             <a:r>
-              <a:rPr lang="ru-RU" sz="1200" dirty="0">
+              <a:rPr lang="en-US" sz="1200" dirty="0">
                 <a:solidFill>
                   <a:srgbClr val="1F1F1F"/>
                 </a:solidFill>
                 <a:latin typeface="+mn-lt"/>
                 <a:sym typeface="Roboto"/>
               </a:rPr>
-              <a:t>Введение в технический анализ: графики и индикаторы</a:t>
+              <a:t>ML</a:t>
             </a:r>
             <a:endParaRPr sz="1200" dirty="0">
               <a:solidFill>
@@ -23120,7 +22658,7 @@
                 <a:latin typeface="+mn-lt"/>
                 <a:sym typeface="Roboto"/>
               </a:rPr>
-              <a:t>Паттерны и стратегии технического анализа</a:t>
+              <a:t>Основы машинного обучения, основные задачи</a:t>
             </a:r>
           </a:p>
         </p:txBody>
@@ -23176,15 +22714,8 @@
                 <a:latin typeface="+mn-lt"/>
                 <a:sym typeface="Roboto"/>
               </a:rPr>
-              <a:t>Интеграция технического анализа с методами машинного обучения</a:t>
+              <a:t>Обратное тестирование торговых стратегий</a:t>
             </a:r>
-            <a:endParaRPr sz="1200" dirty="0">
-              <a:solidFill>
-                <a:srgbClr val="1F1F1F"/>
-              </a:solidFill>
-              <a:latin typeface="+mn-lt"/>
-              <a:sym typeface="Roboto"/>
-            </a:endParaRPr>
           </a:p>
         </p:txBody>
       </p:sp>
@@ -23239,7 +22770,7 @@
                 <a:latin typeface="+mn-lt"/>
                 <a:sym typeface="Roboto"/>
               </a:rPr>
-              <a:t>Применение технического анализа к различным классам активов</a:t>
+              <a:t>Временные ряды</a:t>
             </a:r>
             <a:endParaRPr sz="1200" dirty="0">
               <a:solidFill>
@@ -23251,52 +22782,6 @@
           </a:p>
         </p:txBody>
       </p:sp>
-      <p:cxnSp>
-        <p:nvCxnSpPr>
-          <p:cNvPr id="3" name="Elbow Connector 2">
-            <a:extLst>
-              <a:ext uri="{FF2B5EF4-FFF2-40B4-BE49-F238E27FC236}">
-                <a16:creationId xmlns:a16="http://schemas.microsoft.com/office/drawing/2014/main" id="{C1180B41-AAC0-2546-8533-191E5D9B7F77}"/>
-              </a:ext>
-            </a:extLst>
-          </p:cNvPr>
-          <p:cNvCxnSpPr>
-            <a:cxnSpLocks/>
-            <a:stCxn id="271" idx="2"/>
-            <a:endCxn id="12" idx="1"/>
-          </p:cNvCxnSpPr>
-          <p:nvPr/>
-        </p:nvCxnSpPr>
-        <p:spPr>
-          <a:xfrm rot="16200000" flipH="1">
-            <a:off x="1905257" y="1768551"/>
-            <a:ext cx="406289" cy="236623"/>
-          </a:xfrm>
-          <a:prstGeom prst="bentConnector2">
-            <a:avLst/>
-          </a:prstGeom>
-          <a:ln>
-            <a:solidFill>
-              <a:schemeClr val="tx1"/>
-            </a:solidFill>
-            <a:tailEnd type="triangle"/>
-          </a:ln>
-        </p:spPr>
-        <p:style>
-          <a:lnRef idx="1">
-            <a:schemeClr val="accent1"/>
-          </a:lnRef>
-          <a:fillRef idx="0">
-            <a:schemeClr val="accent1"/>
-          </a:fillRef>
-          <a:effectRef idx="0">
-            <a:schemeClr val="accent1"/>
-          </a:effectRef>
-          <a:fontRef idx="minor">
-            <a:schemeClr val="tx1"/>
-          </a:fontRef>
-        </p:style>
-      </p:cxnSp>
       <p:cxnSp>
         <p:nvCxnSpPr>
           <p:cNvPr id="7" name="Elbow Connector 6">
@@ -23450,14 +22935,14 @@
           <p:nvPr>
             <p:extLst>
               <p:ext uri="{D42A27DB-BD31-4B8C-83A1-F6EECF244321}">
-                <p14:modId xmlns:p14="http://schemas.microsoft.com/office/powerpoint/2010/main" val="1424726478"/>
+                <p14:modId xmlns:p14="http://schemas.microsoft.com/office/powerpoint/2010/main" val="3848016871"/>
               </p:ext>
             </p:extLst>
           </p:nvPr>
         </p:nvGraphicFramePr>
         <p:xfrm>
-          <a:off x="5355768" y="573874"/>
-          <a:ext cx="2226910" cy="304800"/>
+          <a:off x="5673898" y="573874"/>
+          <a:ext cx="1908780" cy="304800"/>
         </p:xfrm>
         <a:graphic>
           <a:graphicData uri="http://schemas.openxmlformats.org/drawingml/2006/table">
@@ -23506,10 +22991,1278 @@
                     </a:ext>
                   </a:extLst>
                 </a:gridCol>
+              </a:tblGrid>
+              <a:tr h="250242">
+                <a:tc>
+                  <a:txBody>
+                    <a:bodyPr/>
+                    <a:lstStyle/>
+                    <a:p>
+                      <a:pPr algn="ctr"/>
+                      <a:r>
+                        <a:rPr lang="ru-RU" dirty="0"/>
+                        <a:t>1</a:t>
+                      </a:r>
+                      <a:endParaRPr lang="en-US" dirty="0"/>
+                    </a:p>
+                  </a:txBody>
+                  <a:tcPr>
+                    <a:solidFill>
+                      <a:schemeClr val="accent1">
+                        <a:lumMod val="60000"/>
+                        <a:lumOff val="40000"/>
+                      </a:schemeClr>
+                    </a:solidFill>
+                  </a:tcPr>
+                </a:tc>
+                <a:tc>
+                  <a:txBody>
+                    <a:bodyPr/>
+                    <a:lstStyle/>
+                    <a:p>
+                      <a:pPr marR="0" algn="ctr" rtl="0">
+                        <a:lnSpc>
+                          <a:spcPct val="100000"/>
+                        </a:lnSpc>
+                        <a:spcBef>
+                          <a:spcPts val="0"/>
+                        </a:spcBef>
+                        <a:spcAft>
+                          <a:spcPts val="0"/>
+                        </a:spcAft>
+                        <a:buClr>
+                          <a:srgbClr val="000000"/>
+                        </a:buClr>
+                        <a:buFont typeface="Arial"/>
+                      </a:pPr>
+                      <a:r>
+                        <a:rPr lang="ru-RU" sz="1400" b="0" i="0" u="none" strike="noStrike" cap="none" dirty="0">
+                          <a:solidFill>
+                            <a:schemeClr val="tx1"/>
+                          </a:solidFill>
+                          <a:latin typeface="+mn-lt"/>
+                          <a:ea typeface="+mn-ea"/>
+                          <a:cs typeface="+mn-cs"/>
+                          <a:sym typeface="Arial"/>
+                        </a:rPr>
+                        <a:t>2</a:t>
+                      </a:r>
+                      <a:endParaRPr lang="en-US" sz="1400" b="0" i="0" u="none" strike="noStrike" cap="none" dirty="0">
+                        <a:solidFill>
+                          <a:schemeClr val="tx1"/>
+                        </a:solidFill>
+                        <a:latin typeface="+mn-lt"/>
+                        <a:ea typeface="+mn-ea"/>
+                        <a:cs typeface="+mn-cs"/>
+                        <a:sym typeface="Arial"/>
+                      </a:endParaRPr>
+                    </a:p>
+                  </a:txBody>
+                  <a:tcPr>
+                    <a:solidFill>
+                      <a:srgbClr val="FFD966"/>
+                    </a:solidFill>
+                  </a:tcPr>
+                </a:tc>
+                <a:tc>
+                  <a:txBody>
+                    <a:bodyPr/>
+                    <a:lstStyle/>
+                    <a:p>
+                      <a:pPr marR="0" algn="ctr" rtl="0">
+                        <a:lnSpc>
+                          <a:spcPct val="100000"/>
+                        </a:lnSpc>
+                        <a:spcBef>
+                          <a:spcPts val="0"/>
+                        </a:spcBef>
+                        <a:spcAft>
+                          <a:spcPts val="0"/>
+                        </a:spcAft>
+                        <a:buClr>
+                          <a:srgbClr val="000000"/>
+                        </a:buClr>
+                        <a:buFont typeface="Arial"/>
+                      </a:pPr>
+                      <a:r>
+                        <a:rPr lang="ru-RU" sz="1400" b="0" i="0" u="none" strike="noStrike" cap="none" dirty="0">
+                          <a:solidFill>
+                            <a:schemeClr val="tx1"/>
+                          </a:solidFill>
+                          <a:latin typeface="+mn-lt"/>
+                          <a:ea typeface="+mn-ea"/>
+                          <a:cs typeface="+mn-cs"/>
+                          <a:sym typeface="Arial"/>
+                        </a:rPr>
+                        <a:t>3</a:t>
+                      </a:r>
+                      <a:endParaRPr lang="en-US" sz="1400" b="0" i="0" u="none" strike="noStrike" cap="none" dirty="0">
+                        <a:solidFill>
+                          <a:schemeClr val="tx1"/>
+                        </a:solidFill>
+                        <a:latin typeface="+mn-lt"/>
+                        <a:ea typeface="+mn-ea"/>
+                        <a:cs typeface="+mn-cs"/>
+                        <a:sym typeface="Arial"/>
+                      </a:endParaRPr>
+                    </a:p>
+                  </a:txBody>
+                  <a:tcPr>
+                    <a:solidFill>
+                      <a:srgbClr val="FFD966"/>
+                    </a:solidFill>
+                  </a:tcPr>
+                </a:tc>
+                <a:tc>
+                  <a:txBody>
+                    <a:bodyPr/>
+                    <a:lstStyle/>
+                    <a:p>
+                      <a:pPr algn="ctr"/>
+                      <a:r>
+                        <a:rPr lang="ru-RU" dirty="0"/>
+                        <a:t>4</a:t>
+                      </a:r>
+                      <a:endParaRPr lang="en-US" dirty="0"/>
+                    </a:p>
+                  </a:txBody>
+                  <a:tcPr>
+                    <a:solidFill>
+                      <a:srgbClr val="FFD966"/>
+                    </a:solidFill>
+                  </a:tcPr>
+                </a:tc>
+                <a:tc>
+                  <a:txBody>
+                    <a:bodyPr/>
+                    <a:lstStyle/>
+                    <a:p>
+                      <a:pPr algn="ctr"/>
+                      <a:r>
+                        <a:rPr lang="ru-RU" dirty="0"/>
+                        <a:t>5</a:t>
+                      </a:r>
+                      <a:endParaRPr lang="en-US" dirty="0"/>
+                    </a:p>
+                  </a:txBody>
+                  <a:tcPr>
+                    <a:solidFill>
+                      <a:srgbClr val="FFD966"/>
+                    </a:solidFill>
+                  </a:tcPr>
+                </a:tc>
+                <a:tc>
+                  <a:txBody>
+                    <a:bodyPr/>
+                    <a:lstStyle/>
+                    <a:p>
+                      <a:pPr algn="ctr"/>
+                      <a:r>
+                        <a:rPr lang="ru-RU" dirty="0"/>
+                        <a:t>6</a:t>
+                      </a:r>
+                      <a:endParaRPr lang="en-US" dirty="0"/>
+                    </a:p>
+                  </a:txBody>
+                  <a:tcPr>
+                    <a:solidFill>
+                      <a:srgbClr val="FFD966"/>
+                    </a:solidFill>
+                  </a:tcPr>
+                </a:tc>
+                <a:extLst>
+                  <a:ext uri="{0D108BD9-81ED-4DB2-BD59-A6C34878D82A}">
+                    <a16:rowId xmlns:a16="http://schemas.microsoft.com/office/drawing/2014/main" val="97753204"/>
+                  </a:ext>
+                </a:extLst>
+              </a:tr>
+            </a:tbl>
+          </a:graphicData>
+        </a:graphic>
+      </p:graphicFrame>
+      <p:sp>
+        <p:nvSpPr>
+          <p:cNvPr id="18" name="Google Shape;271;p44">
+            <a:extLst>
+              <a:ext uri="{FF2B5EF4-FFF2-40B4-BE49-F238E27FC236}">
+                <a16:creationId xmlns:a16="http://schemas.microsoft.com/office/drawing/2014/main" id="{D77AA650-7B6A-2E4F-A234-07C44F1AF1CD}"/>
+              </a:ext>
+            </a:extLst>
+          </p:cNvPr>
+          <p:cNvSpPr/>
+          <p:nvPr/>
+        </p:nvSpPr>
+        <p:spPr>
+          <a:xfrm>
+            <a:off x="2226713" y="3915856"/>
+            <a:ext cx="5355965" cy="396000"/>
+          </a:xfrm>
+          <a:prstGeom prst="roundRect">
+            <a:avLst>
+              <a:gd name="adj" fmla="val 16667"/>
+            </a:avLst>
+          </a:prstGeom>
+          <a:solidFill>
+            <a:srgbClr val="FFD966"/>
+          </a:solidFill>
+          <a:ln>
+            <a:noFill/>
+          </a:ln>
+          <a:effectLst>
+            <a:glow>
+              <a:schemeClr val="accent1">
+                <a:satMod val="175000"/>
+                <a:alpha val="40000"/>
+              </a:schemeClr>
+            </a:glow>
+          </a:effectLst>
+        </p:spPr>
+        <p:txBody>
+          <a:bodyPr spcFirstLastPara="1" wrap="square" lIns="162000" tIns="91425" rIns="162000" bIns="91425" anchor="ctr" anchorCtr="0">
+            <a:noAutofit/>
+          </a:bodyPr>
+          <a:lstStyle/>
+          <a:p>
+            <a:r>
+              <a:rPr lang="ru-RU" sz="1200" dirty="0">
+                <a:solidFill>
+                  <a:srgbClr val="1F1F1F"/>
+                </a:solidFill>
+                <a:latin typeface="+mn-lt"/>
+                <a:sym typeface="Roboto"/>
+              </a:rPr>
+              <a:t>Задача регрессии в деталях</a:t>
+            </a:r>
+            <a:endParaRPr sz="1200" dirty="0">
+              <a:solidFill>
+                <a:srgbClr val="1F1F1F"/>
+              </a:solidFill>
+              <a:latin typeface="+mn-lt"/>
+              <a:sym typeface="Roboto"/>
+            </a:endParaRPr>
+          </a:p>
+        </p:txBody>
+      </p:sp>
+      <p:cxnSp>
+        <p:nvCxnSpPr>
+          <p:cNvPr id="19" name="Elbow Connector 18">
+            <a:extLst>
+              <a:ext uri="{FF2B5EF4-FFF2-40B4-BE49-F238E27FC236}">
+                <a16:creationId xmlns:a16="http://schemas.microsoft.com/office/drawing/2014/main" id="{4E4FCD50-FA53-BF4C-9AB8-F81862AA8721}"/>
+              </a:ext>
+            </a:extLst>
+          </p:cNvPr>
+          <p:cNvCxnSpPr>
+            <a:cxnSpLocks/>
+            <a:stCxn id="271" idx="2"/>
+            <a:endCxn id="18" idx="1"/>
+          </p:cNvCxnSpPr>
+          <p:nvPr/>
+        </p:nvCxnSpPr>
+        <p:spPr>
+          <a:xfrm rot="16200000" flipH="1">
+            <a:off x="893333" y="2780475"/>
+            <a:ext cx="2430137" cy="236623"/>
+          </a:xfrm>
+          <a:prstGeom prst="bentConnector2">
+            <a:avLst/>
+          </a:prstGeom>
+          <a:ln>
+            <a:solidFill>
+              <a:schemeClr val="tx1"/>
+            </a:solidFill>
+            <a:tailEnd type="triangle"/>
+          </a:ln>
+        </p:spPr>
+        <p:style>
+          <a:lnRef idx="1">
+            <a:schemeClr val="accent1"/>
+          </a:lnRef>
+          <a:fillRef idx="0">
+            <a:schemeClr val="accent1"/>
+          </a:fillRef>
+          <a:effectRef idx="0">
+            <a:schemeClr val="accent1"/>
+          </a:effectRef>
+          <a:fontRef idx="minor">
+            <a:schemeClr val="tx1"/>
+          </a:fontRef>
+        </p:style>
+      </p:cxnSp>
+      <p:pic>
+        <p:nvPicPr>
+          <p:cNvPr id="32" name="Google Shape;225;p40">
+            <a:extLst>
+              <a:ext uri="{FF2B5EF4-FFF2-40B4-BE49-F238E27FC236}">
+                <a16:creationId xmlns:a16="http://schemas.microsoft.com/office/drawing/2014/main" id="{81ED1289-B687-F04C-ACCE-E6C6681EFFC3}"/>
+              </a:ext>
+            </a:extLst>
+          </p:cNvPr>
+          <p:cNvPicPr preferRelativeResize="0"/>
+          <p:nvPr/>
+        </p:nvPicPr>
+        <p:blipFill>
+          <a:blip r:embed="rId3"/>
+          <a:srcRect l="18187" r="18187"/>
+          <a:stretch/>
+        </p:blipFill>
+        <p:spPr>
+          <a:xfrm>
+            <a:off x="612428" y="1196068"/>
+            <a:ext cx="419930" cy="396001"/>
+          </a:xfrm>
+          <a:prstGeom prst="ellipse">
+            <a:avLst/>
+          </a:prstGeom>
+          <a:noFill/>
+          <a:ln>
+            <a:noFill/>
+          </a:ln>
+        </p:spPr>
+      </p:pic>
+      <p:sp>
+        <p:nvSpPr>
+          <p:cNvPr id="21" name="Google Shape;271;p44">
+            <a:extLst>
+              <a:ext uri="{FF2B5EF4-FFF2-40B4-BE49-F238E27FC236}">
+                <a16:creationId xmlns:a16="http://schemas.microsoft.com/office/drawing/2014/main" id="{729BB019-C6C6-024F-B93E-27A337C996C0}"/>
+              </a:ext>
+            </a:extLst>
+          </p:cNvPr>
+          <p:cNvSpPr/>
+          <p:nvPr/>
+        </p:nvSpPr>
+        <p:spPr>
+          <a:xfrm>
+            <a:off x="2226713" y="1886863"/>
+            <a:ext cx="5355965" cy="396000"/>
+          </a:xfrm>
+          <a:prstGeom prst="roundRect">
+            <a:avLst>
+              <a:gd name="adj" fmla="val 16667"/>
+            </a:avLst>
+          </a:prstGeom>
+          <a:gradFill>
+            <a:gsLst>
+              <a:gs pos="0">
+                <a:schemeClr val="bg1"/>
+              </a:gs>
+              <a:gs pos="100000">
+                <a:srgbClr val="FFD966"/>
+              </a:gs>
+            </a:gsLst>
+            <a:lin ang="5400000" scaled="1"/>
+          </a:gradFill>
+          <a:ln>
+            <a:noFill/>
+          </a:ln>
+          <a:effectLst>
+            <a:glow>
+              <a:schemeClr val="accent1">
+                <a:satMod val="175000"/>
+                <a:alpha val="40000"/>
+              </a:schemeClr>
+            </a:glow>
+          </a:effectLst>
+        </p:spPr>
+        <p:txBody>
+          <a:bodyPr spcFirstLastPara="1" wrap="square" lIns="162000" tIns="91425" rIns="162000" bIns="91425" anchor="ctr" anchorCtr="0">
+            <a:noAutofit/>
+          </a:bodyPr>
+          <a:lstStyle/>
+          <a:p>
+            <a:r>
+              <a:rPr lang="ru-RU" sz="1200" dirty="0">
+                <a:solidFill>
+                  <a:srgbClr val="1F1F1F"/>
+                </a:solidFill>
+                <a:latin typeface="+mn-lt"/>
+                <a:sym typeface="Roboto"/>
+              </a:rPr>
+              <a:t>…</a:t>
+            </a:r>
+            <a:endParaRPr sz="1200" dirty="0">
+              <a:solidFill>
+                <a:srgbClr val="1F1F1F"/>
+              </a:solidFill>
+              <a:latin typeface="+mn-lt"/>
+              <a:sym typeface="Roboto"/>
+            </a:endParaRPr>
+          </a:p>
+        </p:txBody>
+      </p:sp>
+    </p:spTree>
+    <p:extLst>
+      <p:ext uri="{BB962C8B-B14F-4D97-AF65-F5344CB8AC3E}">
+        <p14:creationId xmlns:p14="http://schemas.microsoft.com/office/powerpoint/2010/main" val="3437255126"/>
+      </p:ext>
+    </p:extLst>
+  </p:cSld>
+  <p:clrMapOvr>
+    <a:masterClrMapping/>
+  </p:clrMapOvr>
+</p:sld>
+</file>
+
+<file path=ppt/slides/slide27.xml><?xml version="1.0" encoding="utf-8"?>
+<p:sld xmlns:a="http://schemas.openxmlformats.org/drawingml/2006/main" xmlns:r="http://schemas.openxmlformats.org/officeDocument/2006/relationships" xmlns:p="http://schemas.openxmlformats.org/presentationml/2006/main">
+  <p:cSld>
+    <p:spTree>
+      <p:nvGrpSpPr>
+        <p:cNvPr id="1" name="Shape 269"/>
+        <p:cNvGrpSpPr/>
+        <p:nvPr/>
+      </p:nvGrpSpPr>
+      <p:grpSpPr>
+        <a:xfrm>
+          <a:off x="0" y="0"/>
+          <a:ext cx="0" cy="0"/>
+          <a:chOff x="0" y="0"/>
+          <a:chExt cx="0" cy="0"/>
+        </a:xfrm>
+      </p:grpSpPr>
+      <p:sp>
+        <p:nvSpPr>
+          <p:cNvPr id="270" name="Google Shape;270;p44"/>
+          <p:cNvSpPr txBox="1">
+            <a:spLocks noGrp="1"/>
+          </p:cNvSpPr>
+          <p:nvPr>
+            <p:ph type="title"/>
+          </p:nvPr>
+        </p:nvSpPr>
+        <p:spPr>
+          <a:xfrm>
+            <a:off x="500550" y="330724"/>
+            <a:ext cx="8520600" cy="1095900"/>
+          </a:xfrm>
+          <a:prstGeom prst="rect">
+            <a:avLst/>
+          </a:prstGeom>
+        </p:spPr>
+        <p:txBody>
+          <a:bodyPr spcFirstLastPara="1" wrap="square" lIns="91425" tIns="91425" rIns="91425" bIns="91425" anchor="t" anchorCtr="0">
+            <a:noAutofit/>
+          </a:bodyPr>
+          <a:lstStyle/>
+          <a:p>
+            <a:pPr marL="0" lvl="0" indent="0" algn="l" rtl="0">
+              <a:spcBef>
+                <a:spcPts val="0"/>
+              </a:spcBef>
+              <a:spcAft>
+                <a:spcPts val="0"/>
+              </a:spcAft>
+              <a:buNone/>
+            </a:pPr>
+            <a:r>
+              <a:rPr lang="ru" dirty="0"/>
+              <a:t>Программа курса</a:t>
+            </a:r>
+            <a:endParaRPr dirty="0"/>
+          </a:p>
+        </p:txBody>
+      </p:sp>
+      <p:sp>
+        <p:nvSpPr>
+          <p:cNvPr id="271" name="Google Shape;271;p44"/>
+          <p:cNvSpPr/>
+          <p:nvPr/>
+        </p:nvSpPr>
+        <p:spPr>
+          <a:xfrm>
+            <a:off x="500550" y="1104419"/>
+            <a:ext cx="2979080" cy="579300"/>
+          </a:xfrm>
+          <a:prstGeom prst="roundRect">
+            <a:avLst>
+              <a:gd name="adj" fmla="val 16667"/>
+            </a:avLst>
+          </a:prstGeom>
+          <a:solidFill>
+            <a:srgbClr val="FFD966"/>
+          </a:solidFill>
+          <a:ln>
+            <a:noFill/>
+          </a:ln>
+          <a:effectLst/>
+        </p:spPr>
+        <p:txBody>
+          <a:bodyPr spcFirstLastPara="1" wrap="square" lIns="162000" tIns="91425" rIns="162000" bIns="91425" anchor="ctr" anchorCtr="0">
+            <a:noAutofit/>
+          </a:bodyPr>
+          <a:lstStyle/>
+          <a:p>
+            <a:pPr marL="444500"/>
+            <a:r>
+              <a:rPr lang="ru-RU" sz="1200" dirty="0">
+                <a:solidFill>
+                  <a:srgbClr val="1F1F1F"/>
+                </a:solidFill>
+                <a:latin typeface="+mn-lt"/>
+                <a:sym typeface="Roboto"/>
+              </a:rPr>
+              <a:t>Технический анализ финансовых рынков</a:t>
+            </a:r>
+            <a:endParaRPr sz="1200" dirty="0">
+              <a:solidFill>
+                <a:srgbClr val="1F1F1F"/>
+              </a:solidFill>
+              <a:latin typeface="+mn-lt"/>
+              <a:sym typeface="Roboto"/>
+            </a:endParaRPr>
+          </a:p>
+        </p:txBody>
+      </p:sp>
+      <p:sp>
+        <p:nvSpPr>
+          <p:cNvPr id="12" name="Google Shape;271;p44">
+            <a:extLst>
+              <a:ext uri="{FF2B5EF4-FFF2-40B4-BE49-F238E27FC236}">
+                <a16:creationId xmlns:a16="http://schemas.microsoft.com/office/drawing/2014/main" id="{D8FD06C8-E377-A548-A8E0-938A22A6A104}"/>
+              </a:ext>
+            </a:extLst>
+          </p:cNvPr>
+          <p:cNvSpPr/>
+          <p:nvPr/>
+        </p:nvSpPr>
+        <p:spPr>
+          <a:xfrm>
+            <a:off x="2226713" y="1892008"/>
+            <a:ext cx="5355965" cy="396000"/>
+          </a:xfrm>
+          <a:prstGeom prst="roundRect">
+            <a:avLst>
+              <a:gd name="adj" fmla="val 16667"/>
+            </a:avLst>
+          </a:prstGeom>
+          <a:solidFill>
+            <a:srgbClr val="FFD966"/>
+          </a:solidFill>
+          <a:ln>
+            <a:noFill/>
+          </a:ln>
+          <a:effectLst/>
+        </p:spPr>
+        <p:txBody>
+          <a:bodyPr spcFirstLastPara="1" wrap="square" lIns="162000" tIns="91425" rIns="162000" bIns="91425" anchor="ctr" anchorCtr="0">
+            <a:noAutofit/>
+          </a:bodyPr>
+          <a:lstStyle/>
+          <a:p>
+            <a:r>
+              <a:rPr lang="ru-RU" sz="1200" dirty="0">
+                <a:solidFill>
+                  <a:srgbClr val="1F1F1F"/>
+                </a:solidFill>
+                <a:latin typeface="+mn-lt"/>
+                <a:sym typeface="Roboto"/>
+              </a:rPr>
+              <a:t>Введение в технический анализ: графики, индикаторы и паттерны</a:t>
+            </a:r>
+            <a:endParaRPr sz="1200" dirty="0">
+              <a:solidFill>
+                <a:srgbClr val="1F1F1F"/>
+              </a:solidFill>
+              <a:latin typeface="+mn-lt"/>
+              <a:sym typeface="Roboto"/>
+            </a:endParaRPr>
+          </a:p>
+        </p:txBody>
+      </p:sp>
+      <p:sp>
+        <p:nvSpPr>
+          <p:cNvPr id="13" name="Google Shape;271;p44">
+            <a:extLst>
+              <a:ext uri="{FF2B5EF4-FFF2-40B4-BE49-F238E27FC236}">
+                <a16:creationId xmlns:a16="http://schemas.microsoft.com/office/drawing/2014/main" id="{0FE2E67F-87DB-BA4A-8DD0-D5FDE2391C49}"/>
+              </a:ext>
+            </a:extLst>
+          </p:cNvPr>
+          <p:cNvSpPr/>
+          <p:nvPr/>
+        </p:nvSpPr>
+        <p:spPr>
+          <a:xfrm>
+            <a:off x="2226713" y="2397970"/>
+            <a:ext cx="5355965" cy="396000"/>
+          </a:xfrm>
+          <a:prstGeom prst="roundRect">
+            <a:avLst>
+              <a:gd name="adj" fmla="val 16667"/>
+            </a:avLst>
+          </a:prstGeom>
+          <a:solidFill>
+            <a:srgbClr val="FFD966"/>
+          </a:solidFill>
+          <a:ln>
+            <a:noFill/>
+          </a:ln>
+          <a:effectLst>
+            <a:glow>
+              <a:schemeClr val="accent1">
+                <a:satMod val="175000"/>
+                <a:alpha val="40000"/>
+              </a:schemeClr>
+            </a:glow>
+          </a:effectLst>
+        </p:spPr>
+        <p:txBody>
+          <a:bodyPr spcFirstLastPara="1" wrap="square" lIns="162000" tIns="91425" rIns="162000" bIns="91425" anchor="ctr" anchorCtr="0">
+            <a:noAutofit/>
+          </a:bodyPr>
+          <a:lstStyle/>
+          <a:p>
+            <a:r>
+              <a:rPr lang="ru-RU" sz="1200" dirty="0">
+                <a:solidFill>
+                  <a:srgbClr val="1F1F1F"/>
+                </a:solidFill>
+                <a:latin typeface="+mn-lt"/>
+                <a:sym typeface="Roboto"/>
+              </a:rPr>
+              <a:t>Торговая стратегия</a:t>
+            </a:r>
+          </a:p>
+        </p:txBody>
+      </p:sp>
+      <p:sp>
+        <p:nvSpPr>
+          <p:cNvPr id="16" name="Google Shape;271;p44">
+            <a:extLst>
+              <a:ext uri="{FF2B5EF4-FFF2-40B4-BE49-F238E27FC236}">
+                <a16:creationId xmlns:a16="http://schemas.microsoft.com/office/drawing/2014/main" id="{7A56B114-1520-2F4F-BC28-2EADE862D379}"/>
+              </a:ext>
+            </a:extLst>
+          </p:cNvPr>
+          <p:cNvSpPr/>
+          <p:nvPr/>
+        </p:nvSpPr>
+        <p:spPr>
+          <a:xfrm>
+            <a:off x="2212321" y="2903932"/>
+            <a:ext cx="5355965" cy="396000"/>
+          </a:xfrm>
+          <a:prstGeom prst="roundRect">
+            <a:avLst>
+              <a:gd name="adj" fmla="val 16667"/>
+            </a:avLst>
+          </a:prstGeom>
+          <a:solidFill>
+            <a:srgbClr val="FFD966"/>
+          </a:solidFill>
+          <a:ln>
+            <a:noFill/>
+          </a:ln>
+          <a:effectLst>
+            <a:glow>
+              <a:schemeClr val="accent1">
+                <a:satMod val="175000"/>
+                <a:alpha val="40000"/>
+              </a:schemeClr>
+            </a:glow>
+          </a:effectLst>
+        </p:spPr>
+        <p:txBody>
+          <a:bodyPr spcFirstLastPara="1" wrap="square" lIns="162000" tIns="91425" rIns="162000" bIns="91425" anchor="ctr" anchorCtr="0">
+            <a:noAutofit/>
+          </a:bodyPr>
+          <a:lstStyle/>
+          <a:p>
+            <a:r>
+              <a:rPr lang="ru-RU" sz="1200" dirty="0">
+                <a:solidFill>
+                  <a:srgbClr val="1F1F1F"/>
+                </a:solidFill>
+                <a:latin typeface="+mn-lt"/>
+                <a:sym typeface="Roboto"/>
+              </a:rPr>
+              <a:t>Корреляции признаков, </a:t>
+            </a:r>
+            <a:r>
+              <a:rPr lang="en-US" sz="1200" dirty="0">
+                <a:solidFill>
+                  <a:srgbClr val="1F1F1F"/>
+                </a:solidFill>
+                <a:latin typeface="+mn-lt"/>
+                <a:sym typeface="Roboto"/>
+              </a:rPr>
+              <a:t>PCA</a:t>
+            </a:r>
+            <a:endParaRPr sz="1200" dirty="0">
+              <a:solidFill>
+                <a:srgbClr val="1F1F1F"/>
+              </a:solidFill>
+              <a:latin typeface="+mn-lt"/>
+              <a:sym typeface="Roboto"/>
+            </a:endParaRPr>
+          </a:p>
+        </p:txBody>
+      </p:sp>
+      <p:sp>
+        <p:nvSpPr>
+          <p:cNvPr id="17" name="Google Shape;271;p44">
+            <a:extLst>
+              <a:ext uri="{FF2B5EF4-FFF2-40B4-BE49-F238E27FC236}">
+                <a16:creationId xmlns:a16="http://schemas.microsoft.com/office/drawing/2014/main" id="{93DB87C6-9A77-BE48-AFE8-9E6FD684BDEB}"/>
+              </a:ext>
+            </a:extLst>
+          </p:cNvPr>
+          <p:cNvSpPr/>
+          <p:nvPr/>
+        </p:nvSpPr>
+        <p:spPr>
+          <a:xfrm>
+            <a:off x="2226713" y="3409894"/>
+            <a:ext cx="5355965" cy="396000"/>
+          </a:xfrm>
+          <a:prstGeom prst="roundRect">
+            <a:avLst>
+              <a:gd name="adj" fmla="val 16667"/>
+            </a:avLst>
+          </a:prstGeom>
+          <a:solidFill>
+            <a:srgbClr val="FFD966"/>
+          </a:solidFill>
+          <a:ln>
+            <a:noFill/>
+          </a:ln>
+          <a:effectLst>
+            <a:glow>
+              <a:schemeClr val="accent1">
+                <a:satMod val="175000"/>
+                <a:alpha val="40000"/>
+              </a:schemeClr>
+            </a:glow>
+          </a:effectLst>
+        </p:spPr>
+        <p:txBody>
+          <a:bodyPr spcFirstLastPara="1" wrap="square" lIns="162000" tIns="91425" rIns="162000" bIns="91425" anchor="ctr" anchorCtr="0">
+            <a:noAutofit/>
+          </a:bodyPr>
+          <a:lstStyle/>
+          <a:p>
+            <a:r>
+              <a:rPr lang="ru-RU" sz="1200" dirty="0">
+                <a:solidFill>
+                  <a:srgbClr val="1F1F1F"/>
+                </a:solidFill>
+                <a:latin typeface="+mn-lt"/>
+                <a:sym typeface="Roboto"/>
+              </a:rPr>
+              <a:t>Оценка важности признаков</a:t>
+            </a:r>
+            <a:endParaRPr sz="1200" dirty="0">
+              <a:solidFill>
+                <a:srgbClr val="1F1F1F"/>
+              </a:solidFill>
+              <a:latin typeface="+mn-lt"/>
+              <a:sym typeface="Roboto"/>
+            </a:endParaRPr>
+          </a:p>
+        </p:txBody>
+      </p:sp>
+      <p:cxnSp>
+        <p:nvCxnSpPr>
+          <p:cNvPr id="3" name="Elbow Connector 2">
+            <a:extLst>
+              <a:ext uri="{FF2B5EF4-FFF2-40B4-BE49-F238E27FC236}">
+                <a16:creationId xmlns:a16="http://schemas.microsoft.com/office/drawing/2014/main" id="{C1180B41-AAC0-2546-8533-191E5D9B7F77}"/>
+              </a:ext>
+            </a:extLst>
+          </p:cNvPr>
+          <p:cNvCxnSpPr>
+            <a:cxnSpLocks/>
+            <a:stCxn id="271" idx="2"/>
+            <a:endCxn id="12" idx="1"/>
+          </p:cNvCxnSpPr>
+          <p:nvPr/>
+        </p:nvCxnSpPr>
+        <p:spPr>
+          <a:xfrm rot="16200000" flipH="1">
+            <a:off x="1905257" y="1768551"/>
+            <a:ext cx="406289" cy="236623"/>
+          </a:xfrm>
+          <a:prstGeom prst="bentConnector2">
+            <a:avLst/>
+          </a:prstGeom>
+          <a:ln>
+            <a:solidFill>
+              <a:schemeClr val="tx1"/>
+            </a:solidFill>
+            <a:tailEnd type="triangle"/>
+          </a:ln>
+        </p:spPr>
+        <p:style>
+          <a:lnRef idx="1">
+            <a:schemeClr val="accent1"/>
+          </a:lnRef>
+          <a:fillRef idx="0">
+            <a:schemeClr val="accent1"/>
+          </a:fillRef>
+          <a:effectRef idx="0">
+            <a:schemeClr val="accent1"/>
+          </a:effectRef>
+          <a:fontRef idx="minor">
+            <a:schemeClr val="tx1"/>
+          </a:fontRef>
+        </p:style>
+      </p:cxnSp>
+      <p:cxnSp>
+        <p:nvCxnSpPr>
+          <p:cNvPr id="7" name="Elbow Connector 6">
+            <a:extLst>
+              <a:ext uri="{FF2B5EF4-FFF2-40B4-BE49-F238E27FC236}">
+                <a16:creationId xmlns:a16="http://schemas.microsoft.com/office/drawing/2014/main" id="{F828FA00-64F5-D64E-A4E8-78AD68A71E2D}"/>
+              </a:ext>
+            </a:extLst>
+          </p:cNvPr>
+          <p:cNvCxnSpPr>
+            <a:cxnSpLocks/>
+            <a:stCxn id="271" idx="2"/>
+            <a:endCxn id="13" idx="1"/>
+          </p:cNvCxnSpPr>
+          <p:nvPr/>
+        </p:nvCxnSpPr>
+        <p:spPr>
+          <a:xfrm rot="16200000" flipH="1">
+            <a:off x="1652276" y="2021532"/>
+            <a:ext cx="912251" cy="236623"/>
+          </a:xfrm>
+          <a:prstGeom prst="bentConnector2">
+            <a:avLst/>
+          </a:prstGeom>
+          <a:ln>
+            <a:solidFill>
+              <a:schemeClr val="tx1"/>
+            </a:solidFill>
+            <a:tailEnd type="triangle"/>
+          </a:ln>
+        </p:spPr>
+        <p:style>
+          <a:lnRef idx="1">
+            <a:schemeClr val="accent1"/>
+          </a:lnRef>
+          <a:fillRef idx="0">
+            <a:schemeClr val="accent1"/>
+          </a:fillRef>
+          <a:effectRef idx="0">
+            <a:schemeClr val="accent1"/>
+          </a:effectRef>
+          <a:fontRef idx="minor">
+            <a:schemeClr val="tx1"/>
+          </a:fontRef>
+        </p:style>
+      </p:cxnSp>
+      <p:cxnSp>
+        <p:nvCxnSpPr>
+          <p:cNvPr id="11" name="Elbow Connector 10">
+            <a:extLst>
+              <a:ext uri="{FF2B5EF4-FFF2-40B4-BE49-F238E27FC236}">
+                <a16:creationId xmlns:a16="http://schemas.microsoft.com/office/drawing/2014/main" id="{1B9CA35D-F3DD-2349-BB63-178A3D48C12C}"/>
+              </a:ext>
+            </a:extLst>
+          </p:cNvPr>
+          <p:cNvCxnSpPr>
+            <a:cxnSpLocks/>
+            <a:stCxn id="271" idx="2"/>
+            <a:endCxn id="16" idx="1"/>
+          </p:cNvCxnSpPr>
+          <p:nvPr/>
+        </p:nvCxnSpPr>
+        <p:spPr>
+          <a:xfrm rot="16200000" flipH="1">
+            <a:off x="1392099" y="2281709"/>
+            <a:ext cx="1418213" cy="222231"/>
+          </a:xfrm>
+          <a:prstGeom prst="bentConnector2">
+            <a:avLst/>
+          </a:prstGeom>
+          <a:ln>
+            <a:solidFill>
+              <a:schemeClr val="tx1"/>
+            </a:solidFill>
+            <a:tailEnd type="triangle"/>
+          </a:ln>
+        </p:spPr>
+        <p:style>
+          <a:lnRef idx="1">
+            <a:schemeClr val="accent1"/>
+          </a:lnRef>
+          <a:fillRef idx="0">
+            <a:schemeClr val="accent1"/>
+          </a:fillRef>
+          <a:effectRef idx="0">
+            <a:schemeClr val="accent1"/>
+          </a:effectRef>
+          <a:fontRef idx="minor">
+            <a:schemeClr val="tx1"/>
+          </a:fontRef>
+        </p:style>
+      </p:cxnSp>
+      <p:cxnSp>
+        <p:nvCxnSpPr>
+          <p:cNvPr id="20" name="Elbow Connector 19">
+            <a:extLst>
+              <a:ext uri="{FF2B5EF4-FFF2-40B4-BE49-F238E27FC236}">
+                <a16:creationId xmlns:a16="http://schemas.microsoft.com/office/drawing/2014/main" id="{77BABB97-37B4-2248-9138-F1BB4D6122DE}"/>
+              </a:ext>
+            </a:extLst>
+          </p:cNvPr>
+          <p:cNvCxnSpPr>
+            <a:cxnSpLocks/>
+            <a:stCxn id="271" idx="2"/>
+            <a:endCxn id="17" idx="1"/>
+          </p:cNvCxnSpPr>
+          <p:nvPr/>
+        </p:nvCxnSpPr>
+        <p:spPr>
+          <a:xfrm rot="16200000" flipH="1">
+            <a:off x="1146314" y="2527494"/>
+            <a:ext cx="1924175" cy="236623"/>
+          </a:xfrm>
+          <a:prstGeom prst="bentConnector2">
+            <a:avLst/>
+          </a:prstGeom>
+          <a:ln>
+            <a:solidFill>
+              <a:schemeClr val="tx1"/>
+            </a:solidFill>
+            <a:tailEnd type="triangle"/>
+          </a:ln>
+        </p:spPr>
+        <p:style>
+          <a:lnRef idx="1">
+            <a:schemeClr val="accent1"/>
+          </a:lnRef>
+          <a:fillRef idx="0">
+            <a:schemeClr val="accent1"/>
+          </a:fillRef>
+          <a:effectRef idx="0">
+            <a:schemeClr val="accent1"/>
+          </a:effectRef>
+          <a:fontRef idx="minor">
+            <a:schemeClr val="tx1"/>
+          </a:fontRef>
+        </p:style>
+      </p:cxnSp>
+      <p:sp>
+        <p:nvSpPr>
+          <p:cNvPr id="18" name="Google Shape;271;p44">
+            <a:extLst>
+              <a:ext uri="{FF2B5EF4-FFF2-40B4-BE49-F238E27FC236}">
+                <a16:creationId xmlns:a16="http://schemas.microsoft.com/office/drawing/2014/main" id="{D77AA650-7B6A-2E4F-A234-07C44F1AF1CD}"/>
+              </a:ext>
+            </a:extLst>
+          </p:cNvPr>
+          <p:cNvSpPr/>
+          <p:nvPr/>
+        </p:nvSpPr>
+        <p:spPr>
+          <a:xfrm>
+            <a:off x="2226713" y="3915856"/>
+            <a:ext cx="5355965" cy="396000"/>
+          </a:xfrm>
+          <a:prstGeom prst="roundRect">
+            <a:avLst>
+              <a:gd name="adj" fmla="val 16667"/>
+            </a:avLst>
+          </a:prstGeom>
+          <a:solidFill>
+            <a:srgbClr val="FFD966"/>
+          </a:solidFill>
+          <a:ln>
+            <a:noFill/>
+          </a:ln>
+          <a:effectLst>
+            <a:glow>
+              <a:schemeClr val="accent1">
+                <a:satMod val="175000"/>
+                <a:alpha val="40000"/>
+              </a:schemeClr>
+            </a:glow>
+          </a:effectLst>
+        </p:spPr>
+        <p:txBody>
+          <a:bodyPr spcFirstLastPara="1" wrap="square" lIns="162000" tIns="91425" rIns="162000" bIns="91425" anchor="ctr" anchorCtr="0">
+            <a:noAutofit/>
+          </a:bodyPr>
+          <a:lstStyle/>
+          <a:p>
+            <a:r>
+              <a:rPr lang="ru-RU" sz="1200" dirty="0">
+                <a:solidFill>
+                  <a:srgbClr val="1F1F1F"/>
+                </a:solidFill>
+                <a:latin typeface="+mn-lt"/>
+                <a:sym typeface="Roboto"/>
+              </a:rPr>
+              <a:t>Ансамбли моделей</a:t>
+            </a:r>
+            <a:endParaRPr sz="1200" dirty="0">
+              <a:solidFill>
+                <a:srgbClr val="1F1F1F"/>
+              </a:solidFill>
+              <a:latin typeface="+mn-lt"/>
+              <a:sym typeface="Roboto"/>
+            </a:endParaRPr>
+          </a:p>
+        </p:txBody>
+      </p:sp>
+      <p:cxnSp>
+        <p:nvCxnSpPr>
+          <p:cNvPr id="19" name="Elbow Connector 18">
+            <a:extLst>
+              <a:ext uri="{FF2B5EF4-FFF2-40B4-BE49-F238E27FC236}">
+                <a16:creationId xmlns:a16="http://schemas.microsoft.com/office/drawing/2014/main" id="{4E4FCD50-FA53-BF4C-9AB8-F81862AA8721}"/>
+              </a:ext>
+            </a:extLst>
+          </p:cNvPr>
+          <p:cNvCxnSpPr>
+            <a:cxnSpLocks/>
+            <a:stCxn id="271" idx="2"/>
+            <a:endCxn id="18" idx="1"/>
+          </p:cNvCxnSpPr>
+          <p:nvPr/>
+        </p:nvCxnSpPr>
+        <p:spPr>
+          <a:xfrm rot="16200000" flipH="1">
+            <a:off x="893333" y="2780475"/>
+            <a:ext cx="2430137" cy="236623"/>
+          </a:xfrm>
+          <a:prstGeom prst="bentConnector2">
+            <a:avLst/>
+          </a:prstGeom>
+          <a:ln>
+            <a:solidFill>
+              <a:schemeClr val="tx1"/>
+            </a:solidFill>
+            <a:tailEnd type="triangle"/>
+          </a:ln>
+        </p:spPr>
+        <p:style>
+          <a:lnRef idx="1">
+            <a:schemeClr val="accent1"/>
+          </a:lnRef>
+          <a:fillRef idx="0">
+            <a:schemeClr val="accent1"/>
+          </a:fillRef>
+          <a:effectRef idx="0">
+            <a:schemeClr val="accent1"/>
+          </a:effectRef>
+          <a:fontRef idx="minor">
+            <a:schemeClr val="tx1"/>
+          </a:fontRef>
+        </p:style>
+      </p:cxnSp>
+      <p:pic>
+        <p:nvPicPr>
+          <p:cNvPr id="28" name="Google Shape;225;p40">
+            <a:extLst>
+              <a:ext uri="{FF2B5EF4-FFF2-40B4-BE49-F238E27FC236}">
+                <a16:creationId xmlns:a16="http://schemas.microsoft.com/office/drawing/2014/main" id="{459B96E0-370F-2F4D-9DE2-3AC8A96E4A9D}"/>
+              </a:ext>
+            </a:extLst>
+          </p:cNvPr>
+          <p:cNvPicPr preferRelativeResize="0"/>
+          <p:nvPr/>
+        </p:nvPicPr>
+        <p:blipFill>
+          <a:blip r:embed="rId3"/>
+          <a:srcRect t="2849" b="2849"/>
+          <a:stretch/>
+        </p:blipFill>
+        <p:spPr>
+          <a:xfrm>
+            <a:off x="625735" y="1205170"/>
+            <a:ext cx="419930" cy="396001"/>
+          </a:xfrm>
+          <a:prstGeom prst="ellipse">
+            <a:avLst/>
+          </a:prstGeom>
+          <a:noFill/>
+          <a:ln>
+            <a:noFill/>
+          </a:ln>
+        </p:spPr>
+      </p:pic>
+      <p:sp>
+        <p:nvSpPr>
+          <p:cNvPr id="21" name="Google Shape;271;p44">
+            <a:extLst>
+              <a:ext uri="{FF2B5EF4-FFF2-40B4-BE49-F238E27FC236}">
+                <a16:creationId xmlns:a16="http://schemas.microsoft.com/office/drawing/2014/main" id="{BC1FF1BA-B74F-8C4C-BD18-27A8E47EF9D5}"/>
+              </a:ext>
+            </a:extLst>
+          </p:cNvPr>
+          <p:cNvSpPr/>
+          <p:nvPr/>
+        </p:nvSpPr>
+        <p:spPr>
+          <a:xfrm>
+            <a:off x="2226713" y="4421818"/>
+            <a:ext cx="5355965" cy="396000"/>
+          </a:xfrm>
+          <a:prstGeom prst="roundRect">
+            <a:avLst>
+              <a:gd name="adj" fmla="val 16667"/>
+            </a:avLst>
+          </a:prstGeom>
+          <a:solidFill>
+            <a:srgbClr val="FFD966"/>
+          </a:solidFill>
+          <a:ln>
+            <a:noFill/>
+          </a:ln>
+          <a:effectLst>
+            <a:glow>
+              <a:schemeClr val="accent1">
+                <a:satMod val="175000"/>
+                <a:alpha val="40000"/>
+              </a:schemeClr>
+            </a:glow>
+          </a:effectLst>
+        </p:spPr>
+        <p:txBody>
+          <a:bodyPr spcFirstLastPara="1" wrap="square" lIns="162000" tIns="91425" rIns="162000" bIns="91425" anchor="ctr" anchorCtr="0">
+            <a:noAutofit/>
+          </a:bodyPr>
+          <a:lstStyle/>
+          <a:p>
+            <a:r>
+              <a:rPr lang="ru-RU" sz="1200" dirty="0">
+                <a:solidFill>
+                  <a:srgbClr val="1F1F1F"/>
+                </a:solidFill>
+                <a:latin typeface="+mn-lt"/>
+                <a:sym typeface="Roboto"/>
+              </a:rPr>
+              <a:t>Портфельная стратегия</a:t>
+            </a:r>
+            <a:endParaRPr sz="1200" dirty="0">
+              <a:solidFill>
+                <a:srgbClr val="1F1F1F"/>
+              </a:solidFill>
+              <a:latin typeface="+mn-lt"/>
+              <a:sym typeface="Roboto"/>
+            </a:endParaRPr>
+          </a:p>
+        </p:txBody>
+      </p:sp>
+      <p:cxnSp>
+        <p:nvCxnSpPr>
+          <p:cNvPr id="22" name="Elbow Connector 21">
+            <a:extLst>
+              <a:ext uri="{FF2B5EF4-FFF2-40B4-BE49-F238E27FC236}">
+                <a16:creationId xmlns:a16="http://schemas.microsoft.com/office/drawing/2014/main" id="{4FE9ED47-DB1E-DF41-B2D9-AD0B746BDB34}"/>
+              </a:ext>
+            </a:extLst>
+          </p:cNvPr>
+          <p:cNvCxnSpPr>
+            <a:cxnSpLocks/>
+            <a:stCxn id="271" idx="2"/>
+            <a:endCxn id="21" idx="1"/>
+          </p:cNvCxnSpPr>
+          <p:nvPr/>
+        </p:nvCxnSpPr>
+        <p:spPr>
+          <a:xfrm rot="16200000" flipH="1">
+            <a:off x="640352" y="3033456"/>
+            <a:ext cx="2936099" cy="236623"/>
+          </a:xfrm>
+          <a:prstGeom prst="bentConnector2">
+            <a:avLst/>
+          </a:prstGeom>
+          <a:ln>
+            <a:solidFill>
+              <a:schemeClr val="tx1"/>
+            </a:solidFill>
+            <a:tailEnd type="triangle"/>
+          </a:ln>
+        </p:spPr>
+        <p:style>
+          <a:lnRef idx="1">
+            <a:schemeClr val="accent1"/>
+          </a:lnRef>
+          <a:fillRef idx="0">
+            <a:schemeClr val="accent1"/>
+          </a:fillRef>
+          <a:effectRef idx="0">
+            <a:schemeClr val="accent1"/>
+          </a:effectRef>
+          <a:fontRef idx="minor">
+            <a:schemeClr val="tx1"/>
+          </a:fontRef>
+        </p:style>
+      </p:cxnSp>
+      <p:graphicFrame>
+        <p:nvGraphicFramePr>
+          <p:cNvPr id="24" name="Table 23">
+            <a:extLst>
+              <a:ext uri="{FF2B5EF4-FFF2-40B4-BE49-F238E27FC236}">
+                <a16:creationId xmlns:a16="http://schemas.microsoft.com/office/drawing/2014/main" id="{C0C64ECD-0072-C246-89E7-BF44660F392F}"/>
+              </a:ext>
+            </a:extLst>
+          </p:cNvPr>
+          <p:cNvGraphicFramePr>
+            <a:graphicFrameLocks noGrp="1"/>
+          </p:cNvGraphicFramePr>
+          <p:nvPr>
+            <p:extLst>
+              <p:ext uri="{D42A27DB-BD31-4B8C-83A1-F6EECF244321}">
+                <p14:modId xmlns:p14="http://schemas.microsoft.com/office/powerpoint/2010/main" val="4254089113"/>
+              </p:ext>
+            </p:extLst>
+          </p:nvPr>
+        </p:nvGraphicFramePr>
+        <p:xfrm>
+          <a:off x="5673898" y="573874"/>
+          <a:ext cx="1908780" cy="304800"/>
+        </p:xfrm>
+        <a:graphic>
+          <a:graphicData uri="http://schemas.openxmlformats.org/drawingml/2006/table">
+            <a:tbl>
+              <a:tblPr firstRow="1" bandRow="1"/>
+              <a:tblGrid>
                 <a:gridCol w="318130">
                   <a:extLst>
                     <a:ext uri="{9D8B030D-6E8A-4147-A177-3AD203B41FA5}">
-                      <a16:colId xmlns:a16="http://schemas.microsoft.com/office/drawing/2014/main" val="4263781807"/>
+                      <a16:colId xmlns:a16="http://schemas.microsoft.com/office/drawing/2014/main" val="884960188"/>
+                    </a:ext>
+                  </a:extLst>
+                </a:gridCol>
+                <a:gridCol w="318130">
+                  <a:extLst>
+                    <a:ext uri="{9D8B030D-6E8A-4147-A177-3AD203B41FA5}">
+                      <a16:colId xmlns:a16="http://schemas.microsoft.com/office/drawing/2014/main" val="277746667"/>
+                    </a:ext>
+                  </a:extLst>
+                </a:gridCol>
+                <a:gridCol w="318130">
+                  <a:extLst>
+                    <a:ext uri="{9D8B030D-6E8A-4147-A177-3AD203B41FA5}">
+                      <a16:colId xmlns:a16="http://schemas.microsoft.com/office/drawing/2014/main" val="354781870"/>
+                    </a:ext>
+                  </a:extLst>
+                </a:gridCol>
+                <a:gridCol w="318130">
+                  <a:extLst>
+                    <a:ext uri="{9D8B030D-6E8A-4147-A177-3AD203B41FA5}">
+                      <a16:colId xmlns:a16="http://schemas.microsoft.com/office/drawing/2014/main" val="1334008315"/>
+                    </a:ext>
+                  </a:extLst>
+                </a:gridCol>
+                <a:gridCol w="318130">
+                  <a:extLst>
+                    <a:ext uri="{9D8B030D-6E8A-4147-A177-3AD203B41FA5}">
+                      <a16:colId xmlns:a16="http://schemas.microsoft.com/office/drawing/2014/main" val="3209860974"/>
+                    </a:ext>
+                  </a:extLst>
+                </a:gridCol>
+                <a:gridCol w="318130">
+                  <a:extLst>
+                    <a:ext uri="{9D8B030D-6E8A-4147-A177-3AD203B41FA5}">
+                      <a16:colId xmlns:a16="http://schemas.microsoft.com/office/drawing/2014/main" val="4238538779"/>
                     </a:ext>
                   </a:extLst>
                 </a:gridCol>
@@ -23531,7 +24284,7 @@
                   <a:tcPr>
                     <a:solidFill>
                       <a:schemeClr val="bg1">
-                        <a:lumMod val="85000"/>
+                        <a:lumMod val="95000"/>
                       </a:schemeClr>
                     </a:solidFill>
                   </a:tcPr>
@@ -23582,8 +24335,8 @@
                   <a:tcPr>
                     <a:solidFill>
                       <a:schemeClr val="accent1">
-                        <a:lumMod val="60000"/>
-                        <a:lumOff val="40000"/>
+                        <a:lumMod val="40000"/>
+                        <a:lumOff val="60000"/>
                       </a:schemeClr>
                     </a:solidFill>
                   </a:tcPr>
@@ -23694,25 +24447,6 @@
                     </a:solidFill>
                   </a:tcPr>
                 </a:tc>
-                <a:tc>
-                  <a:txBody>
-                    <a:bodyPr/>
-                    <a:lstStyle/>
-                    <a:p>
-                      <a:pPr algn="ctr"/>
-                      <a:r>
-                        <a:rPr lang="ru-RU" dirty="0"/>
-                        <a:t>7</a:t>
-                      </a:r>
-                      <a:endParaRPr lang="en-US" dirty="0"/>
-                    </a:p>
-                  </a:txBody>
-                  <a:tcPr>
-                    <a:solidFill>
-                      <a:srgbClr val="FFD966"/>
-                    </a:solidFill>
-                  </a:tcPr>
-                </a:tc>
                 <a:extLst>
                   <a:ext uri="{0D108BD9-81ED-4DB2-BD59-A6C34878D82A}">
                     <a16:rowId xmlns:a16="http://schemas.microsoft.com/office/drawing/2014/main" val="97753204"/>
@@ -23723,230 +24457,6 @@
           </a:graphicData>
         </a:graphic>
       </p:graphicFrame>
-      <p:sp>
-        <p:nvSpPr>
-          <p:cNvPr id="18" name="Google Shape;271;p44">
-            <a:extLst>
-              <a:ext uri="{FF2B5EF4-FFF2-40B4-BE49-F238E27FC236}">
-                <a16:creationId xmlns:a16="http://schemas.microsoft.com/office/drawing/2014/main" id="{D77AA650-7B6A-2E4F-A234-07C44F1AF1CD}"/>
-              </a:ext>
-            </a:extLst>
-          </p:cNvPr>
-          <p:cNvSpPr/>
-          <p:nvPr/>
-        </p:nvSpPr>
-        <p:spPr>
-          <a:xfrm>
-            <a:off x="2226713" y="3915856"/>
-            <a:ext cx="5355965" cy="396000"/>
-          </a:xfrm>
-          <a:prstGeom prst="roundRect">
-            <a:avLst>
-              <a:gd name="adj" fmla="val 16667"/>
-            </a:avLst>
-          </a:prstGeom>
-          <a:solidFill>
-            <a:srgbClr val="FFD966"/>
-          </a:solidFill>
-          <a:ln>
-            <a:noFill/>
-          </a:ln>
-          <a:effectLst>
-            <a:glow>
-              <a:schemeClr val="accent1">
-                <a:satMod val="175000"/>
-                <a:alpha val="40000"/>
-              </a:schemeClr>
-            </a:glow>
-          </a:effectLst>
-        </p:spPr>
-        <p:txBody>
-          <a:bodyPr spcFirstLastPara="1" wrap="square" lIns="162000" tIns="91425" rIns="162000" bIns="91425" anchor="ctr" anchorCtr="0">
-            <a:noAutofit/>
-          </a:bodyPr>
-          <a:lstStyle/>
-          <a:p>
-            <a:r>
-              <a:rPr lang="ru-RU" sz="1200" dirty="0">
-                <a:solidFill>
-                  <a:srgbClr val="1F1F1F"/>
-                </a:solidFill>
-                <a:latin typeface="+mn-lt"/>
-                <a:sym typeface="Roboto"/>
-              </a:rPr>
-              <a:t>Оценка и сравнение эффективности технического анализа</a:t>
-            </a:r>
-            <a:endParaRPr sz="1200" dirty="0">
-              <a:solidFill>
-                <a:srgbClr val="1F1F1F"/>
-              </a:solidFill>
-              <a:latin typeface="+mn-lt"/>
-              <a:sym typeface="Roboto"/>
-            </a:endParaRPr>
-          </a:p>
-        </p:txBody>
-      </p:sp>
-      <p:cxnSp>
-        <p:nvCxnSpPr>
-          <p:cNvPr id="19" name="Elbow Connector 18">
-            <a:extLst>
-              <a:ext uri="{FF2B5EF4-FFF2-40B4-BE49-F238E27FC236}">
-                <a16:creationId xmlns:a16="http://schemas.microsoft.com/office/drawing/2014/main" id="{4E4FCD50-FA53-BF4C-9AB8-F81862AA8721}"/>
-              </a:ext>
-            </a:extLst>
-          </p:cNvPr>
-          <p:cNvCxnSpPr>
-            <a:cxnSpLocks/>
-            <a:stCxn id="271" idx="2"/>
-            <a:endCxn id="18" idx="1"/>
-          </p:cNvCxnSpPr>
-          <p:nvPr/>
-        </p:nvCxnSpPr>
-        <p:spPr>
-          <a:xfrm rot="16200000" flipH="1">
-            <a:off x="893333" y="2780475"/>
-            <a:ext cx="2430137" cy="236623"/>
-          </a:xfrm>
-          <a:prstGeom prst="bentConnector2">
-            <a:avLst/>
-          </a:prstGeom>
-          <a:ln>
-            <a:solidFill>
-              <a:schemeClr val="tx1"/>
-            </a:solidFill>
-            <a:tailEnd type="triangle"/>
-          </a:ln>
-        </p:spPr>
-        <p:style>
-          <a:lnRef idx="1">
-            <a:schemeClr val="accent1"/>
-          </a:lnRef>
-          <a:fillRef idx="0">
-            <a:schemeClr val="accent1"/>
-          </a:fillRef>
-          <a:effectRef idx="0">
-            <a:schemeClr val="accent1"/>
-          </a:effectRef>
-          <a:fontRef idx="minor">
-            <a:schemeClr val="tx1"/>
-          </a:fontRef>
-        </p:style>
-      </p:cxnSp>
-      <p:pic>
-        <p:nvPicPr>
-          <p:cNvPr id="28" name="Google Shape;225;p40">
-            <a:extLst>
-              <a:ext uri="{FF2B5EF4-FFF2-40B4-BE49-F238E27FC236}">
-                <a16:creationId xmlns:a16="http://schemas.microsoft.com/office/drawing/2014/main" id="{459B96E0-370F-2F4D-9DE2-3AC8A96E4A9D}"/>
-              </a:ext>
-            </a:extLst>
-          </p:cNvPr>
-          <p:cNvPicPr preferRelativeResize="0"/>
-          <p:nvPr/>
-        </p:nvPicPr>
-        <p:blipFill>
-          <a:blip r:embed="rId3"/>
-          <a:srcRect t="2849" b="2849"/>
-          <a:stretch/>
-        </p:blipFill>
-        <p:spPr>
-          <a:xfrm>
-            <a:off x="625735" y="1205170"/>
-            <a:ext cx="419930" cy="396001"/>
-          </a:xfrm>
-          <a:prstGeom prst="ellipse">
-            <a:avLst/>
-          </a:prstGeom>
-          <a:noFill/>
-          <a:ln>
-            <a:noFill/>
-          </a:ln>
-        </p:spPr>
-      </p:pic>
-      <p:pic>
-        <p:nvPicPr>
-          <p:cNvPr id="46" name="Google Shape;530;p82">
-            <a:extLst>
-              <a:ext uri="{FF2B5EF4-FFF2-40B4-BE49-F238E27FC236}">
-                <a16:creationId xmlns:a16="http://schemas.microsoft.com/office/drawing/2014/main" id="{43F299C2-9666-D540-A69A-8BF402009BEF}"/>
-              </a:ext>
-            </a:extLst>
-          </p:cNvPr>
-          <p:cNvPicPr preferRelativeResize="0">
-            <a:picLocks noChangeAspect="1"/>
-          </p:cNvPicPr>
-          <p:nvPr/>
-        </p:nvPicPr>
-        <p:blipFill rotWithShape="1">
-          <a:blip r:embed="rId4">
-            <a:alphaModFix/>
-            <a:duotone>
-              <a:schemeClr val="accent5">
-                <a:shade val="45000"/>
-                <a:satMod val="135000"/>
-              </a:schemeClr>
-              <a:prstClr val="white"/>
-            </a:duotone>
-          </a:blip>
-          <a:srcRect/>
-          <a:stretch/>
-        </p:blipFill>
-        <p:spPr>
-          <a:xfrm>
-            <a:off x="7244284" y="3951208"/>
-            <a:ext cx="324002" cy="324000"/>
-          </a:xfrm>
-          <a:prstGeom prst="rect">
-            <a:avLst/>
-          </a:prstGeom>
-          <a:noFill/>
-          <a:ln>
-            <a:noFill/>
-          </a:ln>
-        </p:spPr>
-      </p:pic>
-      <p:sp>
-        <p:nvSpPr>
-          <p:cNvPr id="47" name="TextBox 46">
-            <a:extLst>
-              <a:ext uri="{FF2B5EF4-FFF2-40B4-BE49-F238E27FC236}">
-                <a16:creationId xmlns:a16="http://schemas.microsoft.com/office/drawing/2014/main" id="{B64000B9-CA8D-D74A-98B4-3BFBB2C52658}"/>
-              </a:ext>
-            </a:extLst>
-          </p:cNvPr>
-          <p:cNvSpPr txBox="1"/>
-          <p:nvPr/>
-        </p:nvSpPr>
-        <p:spPr>
-          <a:xfrm rot="20748746">
-            <a:off x="7603438" y="3895114"/>
-            <a:ext cx="936475" cy="307777"/>
-          </a:xfrm>
-          <a:prstGeom prst="rect">
-            <a:avLst/>
-          </a:prstGeom>
-          <a:noFill/>
-        </p:spPr>
-        <p:txBody>
-          <a:bodyPr wrap="none" rtlCol="0">
-            <a:spAutoFit/>
-          </a:bodyPr>
-          <a:lstStyle/>
-          <a:p>
-            <a:r>
-              <a:rPr lang="en-US" dirty="0" err="1">
-                <a:latin typeface="AkayaTelivigala" pitchFamily="2" charset="77"/>
-                <a:cs typeface="Apple Chancery" panose="03020702040506060504" pitchFamily="66" charset="-79"/>
-              </a:rPr>
-              <a:t>HomeTask</a:t>
-            </a:r>
-            <a:endParaRPr lang="en-US" dirty="0">
-              <a:latin typeface="Bradley Hand" pitchFamily="2" charset="77"/>
-              <a:cs typeface="Apple Chancery" panose="03020702040506060504" pitchFamily="66" charset="-79"/>
-            </a:endParaRPr>
-          </a:p>
-        </p:txBody>
-      </p:sp>
     </p:spTree>
     <p:extLst>
       <p:ext uri="{BB962C8B-B14F-4D97-AF65-F5344CB8AC3E}">
@@ -23960,7 +24470,7 @@
 </p:sld>
 </file>
 
-<file path=ppt/slides/slide27.xml><?xml version="1.0" encoding="utf-8"?>
+<file path=ppt/slides/slide28.xml><?xml version="1.0" encoding="utf-8"?>
 <p:sld xmlns:a="http://schemas.openxmlformats.org/drawingml/2006/main" xmlns:r="http://schemas.openxmlformats.org/officeDocument/2006/relationships" xmlns:p="http://schemas.openxmlformats.org/presentationml/2006/main">
   <p:cSld>
     <p:spTree>
@@ -24058,7 +24568,7 @@
                 <a:latin typeface="+mn-lt"/>
                 <a:sym typeface="Roboto"/>
               </a:rPr>
-              <a:t>Подготовка данных и признаковая инженерия</a:t>
+              <a:t>Глубокое обучение</a:t>
             </a:r>
             <a:endParaRPr sz="1200" dirty="0">
               <a:solidFill>
@@ -24114,7 +24624,27 @@
                 <a:latin typeface="+mn-lt"/>
                 <a:sym typeface="Roboto"/>
               </a:rPr>
-              <a:t>Сбор и очистка финансовых данных</a:t>
+              <a:t>Основы нейронных сетей. </a:t>
+            </a:r>
+            <a:r>
+              <a:rPr lang="ru-RU" sz="1200" dirty="0" err="1">
+                <a:solidFill>
+                  <a:srgbClr val="1F1F1F"/>
+                </a:solidFill>
+                <a:latin typeface="+mn-lt"/>
+                <a:sym typeface="Roboto"/>
+              </a:rPr>
+              <a:t>Полносвязные</a:t>
+            </a:r>
+            <a:r>
+              <a:rPr lang="ru-RU" sz="1200" dirty="0">
+                <a:solidFill>
+                  <a:srgbClr val="1F1F1F"/>
+                </a:solidFill>
+                <a:latin typeface="+mn-lt"/>
+                <a:sym typeface="Roboto"/>
+              </a:rPr>
+              <a:t> сети.</a:t>
             </a:r>
             <a:endParaRPr sz="1200" dirty="0">
               <a:solidFill>
@@ -24177,7 +24707,7 @@
                 <a:latin typeface="+mn-lt"/>
                 <a:sym typeface="Roboto"/>
               </a:rPr>
-              <a:t>Визуализация финансовых данных</a:t>
+              <a:t>Глубокие сети</a:t>
             </a:r>
           </a:p>
         </p:txBody>
@@ -24226,14 +24756,24 @@
           <a:lstStyle/>
           <a:p>
             <a:r>
-              <a:rPr lang="ru-RU" sz="1200" dirty="0">
+              <a:rPr lang="ru-RU" sz="1200" dirty="0" err="1">
                 <a:solidFill>
                   <a:srgbClr val="1F1F1F"/>
                 </a:solidFill>
                 <a:latin typeface="+mn-lt"/>
                 <a:sym typeface="Roboto"/>
               </a:rPr>
-              <a:t>Управление отсутствующими данными и аномалиями</a:t>
+              <a:t>Сверточные</a:t>
+            </a:r>
+            <a:r>
+              <a:rPr lang="ru-RU" sz="1200" dirty="0">
+                <a:solidFill>
+                  <a:srgbClr val="1F1F1F"/>
+                </a:solidFill>
+                <a:latin typeface="+mn-lt"/>
+                <a:sym typeface="Roboto"/>
+              </a:rPr>
+              <a:t> сети</a:t>
             </a:r>
             <a:endParaRPr sz="1200" dirty="0">
               <a:solidFill>
@@ -24289,14 +24829,24 @@
           <a:lstStyle/>
           <a:p>
             <a:r>
-              <a:rPr lang="ru-RU" sz="1200" dirty="0">
+              <a:rPr lang="ru-RU" sz="1200" dirty="0" err="1">
                 <a:solidFill>
                   <a:srgbClr val="1F1F1F"/>
                 </a:solidFill>
                 <a:latin typeface="+mn-lt"/>
                 <a:sym typeface="Roboto"/>
               </a:rPr>
-              <a:t>Работа с большими объемами данных в финансах</a:t>
+              <a:t>Рекурентные</a:t>
+            </a:r>
+            <a:r>
+              <a:rPr lang="ru-RU" sz="1200" dirty="0">
+                <a:solidFill>
+                  <a:srgbClr val="1F1F1F"/>
+                </a:solidFill>
+                <a:latin typeface="+mn-lt"/>
+                <a:sym typeface="Roboto"/>
+              </a:rPr>
+              <a:t> сети</a:t>
             </a:r>
             <a:endParaRPr sz="1200" dirty="0">
               <a:solidFill>
@@ -24492,12 +25042,162 @@
           </a:fontRef>
         </p:style>
       </p:cxnSp>
+      <p:sp>
+        <p:nvSpPr>
+          <p:cNvPr id="18" name="Google Shape;271;p44">
+            <a:extLst>
+              <a:ext uri="{FF2B5EF4-FFF2-40B4-BE49-F238E27FC236}">
+                <a16:creationId xmlns:a16="http://schemas.microsoft.com/office/drawing/2014/main" id="{D77AA650-7B6A-2E4F-A234-07C44F1AF1CD}"/>
+              </a:ext>
+            </a:extLst>
+          </p:cNvPr>
+          <p:cNvSpPr/>
+          <p:nvPr/>
+        </p:nvSpPr>
+        <p:spPr>
+          <a:xfrm>
+            <a:off x="2226713" y="3915856"/>
+            <a:ext cx="5355965" cy="396000"/>
+          </a:xfrm>
+          <a:prstGeom prst="roundRect">
+            <a:avLst>
+              <a:gd name="adj" fmla="val 16667"/>
+            </a:avLst>
+          </a:prstGeom>
+          <a:solidFill>
+            <a:srgbClr val="FFD966"/>
+          </a:solidFill>
+          <a:ln>
+            <a:noFill/>
+          </a:ln>
+          <a:effectLst>
+            <a:glow>
+              <a:schemeClr val="accent1">
+                <a:satMod val="175000"/>
+                <a:alpha val="40000"/>
+              </a:schemeClr>
+            </a:glow>
+          </a:effectLst>
+        </p:spPr>
+        <p:txBody>
+          <a:bodyPr spcFirstLastPara="1" wrap="square" lIns="162000" tIns="91425" rIns="162000" bIns="91425" anchor="ctr" anchorCtr="0">
+            <a:noAutofit/>
+          </a:bodyPr>
+          <a:lstStyle/>
+          <a:p>
+            <a:r>
+              <a:rPr lang="ru-RU" sz="1200" dirty="0">
+                <a:solidFill>
+                  <a:srgbClr val="1F1F1F"/>
+                </a:solidFill>
+                <a:latin typeface="+mn-lt"/>
+                <a:sym typeface="Roboto"/>
+              </a:rPr>
+              <a:t>Модель </a:t>
+            </a:r>
+            <a:r>
+              <a:rPr lang="ru-RU" sz="1200" dirty="0" err="1">
+                <a:solidFill>
+                  <a:srgbClr val="1F1F1F"/>
+                </a:solidFill>
+                <a:latin typeface="+mn-lt"/>
+                <a:sym typeface="Roboto"/>
+              </a:rPr>
+              <a:t>трансформера</a:t>
+            </a:r>
+            <a:endParaRPr sz="1200" dirty="0">
+              <a:solidFill>
+                <a:srgbClr val="1F1F1F"/>
+              </a:solidFill>
+              <a:latin typeface="+mn-lt"/>
+              <a:sym typeface="Roboto"/>
+            </a:endParaRPr>
+          </a:p>
+        </p:txBody>
+      </p:sp>
+      <p:cxnSp>
+        <p:nvCxnSpPr>
+          <p:cNvPr id="19" name="Elbow Connector 18">
+            <a:extLst>
+              <a:ext uri="{FF2B5EF4-FFF2-40B4-BE49-F238E27FC236}">
+                <a16:creationId xmlns:a16="http://schemas.microsoft.com/office/drawing/2014/main" id="{4E4FCD50-FA53-BF4C-9AB8-F81862AA8721}"/>
+              </a:ext>
+            </a:extLst>
+          </p:cNvPr>
+          <p:cNvCxnSpPr>
+            <a:cxnSpLocks/>
+            <a:stCxn id="271" idx="2"/>
+            <a:endCxn id="18" idx="1"/>
+          </p:cNvCxnSpPr>
+          <p:nvPr/>
+        </p:nvCxnSpPr>
+        <p:spPr>
+          <a:xfrm rot="16200000" flipH="1">
+            <a:off x="893333" y="2780475"/>
+            <a:ext cx="2430137" cy="236623"/>
+          </a:xfrm>
+          <a:prstGeom prst="bentConnector2">
+            <a:avLst/>
+          </a:prstGeom>
+          <a:ln>
+            <a:solidFill>
+              <a:schemeClr val="tx1"/>
+            </a:solidFill>
+            <a:tailEnd type="triangle"/>
+          </a:ln>
+        </p:spPr>
+        <p:style>
+          <a:lnRef idx="1">
+            <a:schemeClr val="accent1"/>
+          </a:lnRef>
+          <a:fillRef idx="0">
+            <a:schemeClr val="accent1"/>
+          </a:fillRef>
+          <a:effectRef idx="0">
+            <a:schemeClr val="accent1"/>
+          </a:effectRef>
+          <a:fontRef idx="minor">
+            <a:schemeClr val="tx1"/>
+          </a:fontRef>
+        </p:style>
+      </p:cxnSp>
+      <p:pic>
+        <p:nvPicPr>
+          <p:cNvPr id="29" name="Google Shape;225;p40">
+            <a:extLst>
+              <a:ext uri="{FF2B5EF4-FFF2-40B4-BE49-F238E27FC236}">
+                <a16:creationId xmlns:a16="http://schemas.microsoft.com/office/drawing/2014/main" id="{D3188FC7-BF31-944E-B056-08D2A4A16B5A}"/>
+              </a:ext>
+            </a:extLst>
+          </p:cNvPr>
+          <p:cNvPicPr preferRelativeResize="0"/>
+          <p:nvPr/>
+        </p:nvPicPr>
+        <p:blipFill>
+          <a:blip r:embed="rId3"/>
+          <a:srcRect t="2849" b="2849"/>
+          <a:stretch/>
+        </p:blipFill>
+        <p:spPr>
+          <a:xfrm>
+            <a:off x="598455" y="1223612"/>
+            <a:ext cx="419930" cy="396001"/>
+          </a:xfrm>
+          <a:prstGeom prst="ellipse">
+            <a:avLst/>
+          </a:prstGeom>
+          <a:noFill/>
+          <a:ln>
+            <a:noFill/>
+          </a:ln>
+        </p:spPr>
+      </p:pic>
       <p:graphicFrame>
         <p:nvGraphicFramePr>
-          <p:cNvPr id="23" name="Table 23">
+          <p:cNvPr id="22" name="Table 21">
             <a:extLst>
               <a:ext uri="{FF2B5EF4-FFF2-40B4-BE49-F238E27FC236}">
-                <a16:creationId xmlns:a16="http://schemas.microsoft.com/office/drawing/2014/main" id="{7207DC4F-0418-0E43-AEA2-26001954E05D}"/>
+                <a16:creationId xmlns:a16="http://schemas.microsoft.com/office/drawing/2014/main" id="{03319D23-8F4D-AC44-8653-742D41FF3BE2}"/>
               </a:ext>
             </a:extLst>
           </p:cNvPr>
@@ -24507,14 +25207,14 @@
           <p:nvPr>
             <p:extLst>
               <p:ext uri="{D42A27DB-BD31-4B8C-83A1-F6EECF244321}">
-                <p14:modId xmlns:p14="http://schemas.microsoft.com/office/powerpoint/2010/main" val="2760690647"/>
+                <p14:modId xmlns:p14="http://schemas.microsoft.com/office/powerpoint/2010/main" val="269651189"/>
               </p:ext>
             </p:extLst>
           </p:nvPr>
         </p:nvGraphicFramePr>
         <p:xfrm>
-          <a:off x="5355768" y="573874"/>
-          <a:ext cx="2226910" cy="304800"/>
+          <a:off x="5673898" y="573874"/>
+          <a:ext cx="1908780" cy="304800"/>
         </p:xfrm>
         <a:graphic>
           <a:graphicData uri="http://schemas.openxmlformats.org/drawingml/2006/table">
@@ -24563,13 +25263,6 @@
                     </a:ext>
                   </a:extLst>
                 </a:gridCol>
-                <a:gridCol w="318130">
-                  <a:extLst>
-                    <a:ext uri="{9D8B030D-6E8A-4147-A177-3AD203B41FA5}">
-                      <a16:colId xmlns:a16="http://schemas.microsoft.com/office/drawing/2014/main" val="4263781807"/>
-                    </a:ext>
-                  </a:extLst>
-                </a:gridCol>
               </a:tblGrid>
               <a:tr h="250242">
                 <a:tc>
@@ -24588,7 +25281,7 @@
                   <a:tcPr>
                     <a:solidFill>
                       <a:schemeClr val="bg1">
-                        <a:lumMod val="85000"/>
+                        <a:lumMod val="95000"/>
                       </a:schemeClr>
                     </a:solidFill>
                   </a:tcPr>
@@ -24639,7 +25332,7 @@
                   <a:tcPr>
                     <a:solidFill>
                       <a:schemeClr val="bg1">
-                        <a:lumMod val="85000"/>
+                        <a:lumMod val="95000"/>
                       </a:schemeClr>
                     </a:solidFill>
                   </a:tcPr>
@@ -24690,8 +25383,8 @@
                   <a:tcPr>
                     <a:solidFill>
                       <a:schemeClr val="accent1">
-                        <a:lumMod val="60000"/>
-                        <a:lumOff val="40000"/>
+                        <a:lumMod val="40000"/>
+                        <a:lumOff val="60000"/>
                       </a:schemeClr>
                     </a:solidFill>
                   </a:tcPr>
@@ -24753,25 +25446,6 @@
                     </a:solidFill>
                   </a:tcPr>
                 </a:tc>
-                <a:tc>
-                  <a:txBody>
-                    <a:bodyPr/>
-                    <a:lstStyle/>
-                    <a:p>
-                      <a:pPr algn="ctr"/>
-                      <a:r>
-                        <a:rPr lang="ru-RU" dirty="0"/>
-                        <a:t>7</a:t>
-                      </a:r>
-                      <a:endParaRPr lang="en-US" dirty="0"/>
-                    </a:p>
-                  </a:txBody>
-                  <a:tcPr>
-                    <a:solidFill>
-                      <a:srgbClr val="FFD966"/>
-                    </a:solidFill>
-                  </a:tcPr>
-                </a:tc>
                 <a:extLst>
                   <a:ext uri="{0D108BD9-81ED-4DB2-BD59-A6C34878D82A}">
                     <a16:rowId xmlns:a16="http://schemas.microsoft.com/office/drawing/2014/main" val="97753204"/>
@@ -24782,230 +25456,6 @@
           </a:graphicData>
         </a:graphic>
       </p:graphicFrame>
-      <p:sp>
-        <p:nvSpPr>
-          <p:cNvPr id="18" name="Google Shape;271;p44">
-            <a:extLst>
-              <a:ext uri="{FF2B5EF4-FFF2-40B4-BE49-F238E27FC236}">
-                <a16:creationId xmlns:a16="http://schemas.microsoft.com/office/drawing/2014/main" id="{D77AA650-7B6A-2E4F-A234-07C44F1AF1CD}"/>
-              </a:ext>
-            </a:extLst>
-          </p:cNvPr>
-          <p:cNvSpPr/>
-          <p:nvPr/>
-        </p:nvSpPr>
-        <p:spPr>
-          <a:xfrm>
-            <a:off x="2226713" y="3915856"/>
-            <a:ext cx="5355965" cy="396000"/>
-          </a:xfrm>
-          <a:prstGeom prst="roundRect">
-            <a:avLst>
-              <a:gd name="adj" fmla="val 16667"/>
-            </a:avLst>
-          </a:prstGeom>
-          <a:solidFill>
-            <a:srgbClr val="FFD966"/>
-          </a:solidFill>
-          <a:ln>
-            <a:noFill/>
-          </a:ln>
-          <a:effectLst>
-            <a:glow>
-              <a:schemeClr val="accent1">
-                <a:satMod val="175000"/>
-                <a:alpha val="40000"/>
-              </a:schemeClr>
-            </a:glow>
-          </a:effectLst>
-        </p:spPr>
-        <p:txBody>
-          <a:bodyPr spcFirstLastPara="1" wrap="square" lIns="162000" tIns="91425" rIns="162000" bIns="91425" anchor="ctr" anchorCtr="0">
-            <a:noAutofit/>
-          </a:bodyPr>
-          <a:lstStyle/>
-          <a:p>
-            <a:r>
-              <a:rPr lang="ru-RU" sz="1200" dirty="0">
-                <a:solidFill>
-                  <a:srgbClr val="1F1F1F"/>
-                </a:solidFill>
-                <a:latin typeface="+mn-lt"/>
-                <a:sym typeface="Roboto"/>
-              </a:rPr>
-              <a:t>Преобразование данных и создание признаков</a:t>
-            </a:r>
-            <a:endParaRPr sz="1200" dirty="0">
-              <a:solidFill>
-                <a:srgbClr val="1F1F1F"/>
-              </a:solidFill>
-              <a:latin typeface="+mn-lt"/>
-              <a:sym typeface="Roboto"/>
-            </a:endParaRPr>
-          </a:p>
-        </p:txBody>
-      </p:sp>
-      <p:cxnSp>
-        <p:nvCxnSpPr>
-          <p:cNvPr id="19" name="Elbow Connector 18">
-            <a:extLst>
-              <a:ext uri="{FF2B5EF4-FFF2-40B4-BE49-F238E27FC236}">
-                <a16:creationId xmlns:a16="http://schemas.microsoft.com/office/drawing/2014/main" id="{4E4FCD50-FA53-BF4C-9AB8-F81862AA8721}"/>
-              </a:ext>
-            </a:extLst>
-          </p:cNvPr>
-          <p:cNvCxnSpPr>
-            <a:cxnSpLocks/>
-            <a:stCxn id="271" idx="2"/>
-            <a:endCxn id="18" idx="1"/>
-          </p:cNvCxnSpPr>
-          <p:nvPr/>
-        </p:nvCxnSpPr>
-        <p:spPr>
-          <a:xfrm rot="16200000" flipH="1">
-            <a:off x="893333" y="2780475"/>
-            <a:ext cx="2430137" cy="236623"/>
-          </a:xfrm>
-          <a:prstGeom prst="bentConnector2">
-            <a:avLst/>
-          </a:prstGeom>
-          <a:ln>
-            <a:solidFill>
-              <a:schemeClr val="tx1"/>
-            </a:solidFill>
-            <a:tailEnd type="triangle"/>
-          </a:ln>
-        </p:spPr>
-        <p:style>
-          <a:lnRef idx="1">
-            <a:schemeClr val="accent1"/>
-          </a:lnRef>
-          <a:fillRef idx="0">
-            <a:schemeClr val="accent1"/>
-          </a:fillRef>
-          <a:effectRef idx="0">
-            <a:schemeClr val="accent1"/>
-          </a:effectRef>
-          <a:fontRef idx="minor">
-            <a:schemeClr val="tx1"/>
-          </a:fontRef>
-        </p:style>
-      </p:cxnSp>
-      <p:pic>
-        <p:nvPicPr>
-          <p:cNvPr id="46" name="Google Shape;530;p82">
-            <a:extLst>
-              <a:ext uri="{FF2B5EF4-FFF2-40B4-BE49-F238E27FC236}">
-                <a16:creationId xmlns:a16="http://schemas.microsoft.com/office/drawing/2014/main" id="{43F299C2-9666-D540-A69A-8BF402009BEF}"/>
-              </a:ext>
-            </a:extLst>
-          </p:cNvPr>
-          <p:cNvPicPr preferRelativeResize="0">
-            <a:picLocks noChangeAspect="1"/>
-          </p:cNvPicPr>
-          <p:nvPr/>
-        </p:nvPicPr>
-        <p:blipFill rotWithShape="1">
-          <a:blip r:embed="rId3">
-            <a:alphaModFix/>
-            <a:duotone>
-              <a:schemeClr val="accent5">
-                <a:shade val="45000"/>
-                <a:satMod val="135000"/>
-              </a:schemeClr>
-              <a:prstClr val="white"/>
-            </a:duotone>
-          </a:blip>
-          <a:srcRect/>
-          <a:stretch/>
-        </p:blipFill>
-        <p:spPr>
-          <a:xfrm>
-            <a:off x="7244284" y="3951208"/>
-            <a:ext cx="324002" cy="324000"/>
-          </a:xfrm>
-          <a:prstGeom prst="rect">
-            <a:avLst/>
-          </a:prstGeom>
-          <a:noFill/>
-          <a:ln>
-            <a:noFill/>
-          </a:ln>
-        </p:spPr>
-      </p:pic>
-      <p:sp>
-        <p:nvSpPr>
-          <p:cNvPr id="47" name="TextBox 46">
-            <a:extLst>
-              <a:ext uri="{FF2B5EF4-FFF2-40B4-BE49-F238E27FC236}">
-                <a16:creationId xmlns:a16="http://schemas.microsoft.com/office/drawing/2014/main" id="{B64000B9-CA8D-D74A-98B4-3BFBB2C52658}"/>
-              </a:ext>
-            </a:extLst>
-          </p:cNvPr>
-          <p:cNvSpPr txBox="1"/>
-          <p:nvPr/>
-        </p:nvSpPr>
-        <p:spPr>
-          <a:xfrm rot="20748746">
-            <a:off x="7603438" y="3895114"/>
-            <a:ext cx="936475" cy="307777"/>
-          </a:xfrm>
-          <a:prstGeom prst="rect">
-            <a:avLst/>
-          </a:prstGeom>
-          <a:noFill/>
-        </p:spPr>
-        <p:txBody>
-          <a:bodyPr wrap="none" rtlCol="0">
-            <a:spAutoFit/>
-          </a:bodyPr>
-          <a:lstStyle/>
-          <a:p>
-            <a:r>
-              <a:rPr lang="en-US" dirty="0" err="1">
-                <a:latin typeface="AkayaTelivigala" pitchFamily="2" charset="77"/>
-                <a:cs typeface="Apple Chancery" panose="03020702040506060504" pitchFamily="66" charset="-79"/>
-              </a:rPr>
-              <a:t>HomeTask</a:t>
-            </a:r>
-            <a:endParaRPr lang="en-US" dirty="0">
-              <a:latin typeface="Bradley Hand" pitchFamily="2" charset="77"/>
-              <a:cs typeface="Apple Chancery" panose="03020702040506060504" pitchFamily="66" charset="-79"/>
-            </a:endParaRPr>
-          </a:p>
-        </p:txBody>
-      </p:sp>
-      <p:pic>
-        <p:nvPicPr>
-          <p:cNvPr id="29" name="Google Shape;225;p40">
-            <a:extLst>
-              <a:ext uri="{FF2B5EF4-FFF2-40B4-BE49-F238E27FC236}">
-                <a16:creationId xmlns:a16="http://schemas.microsoft.com/office/drawing/2014/main" id="{D3188FC7-BF31-944E-B056-08D2A4A16B5A}"/>
-              </a:ext>
-            </a:extLst>
-          </p:cNvPr>
-          <p:cNvPicPr preferRelativeResize="0"/>
-          <p:nvPr/>
-        </p:nvPicPr>
-        <p:blipFill>
-          <a:blip r:embed="rId4"/>
-          <a:srcRect t="2849" b="2849"/>
-          <a:stretch/>
-        </p:blipFill>
-        <p:spPr>
-          <a:xfrm>
-            <a:off x="598455" y="1223612"/>
-            <a:ext cx="419930" cy="396001"/>
-          </a:xfrm>
-          <a:prstGeom prst="ellipse">
-            <a:avLst/>
-          </a:prstGeom>
-          <a:noFill/>
-          <a:ln>
-            <a:noFill/>
-          </a:ln>
-        </p:spPr>
-      </p:pic>
     </p:spTree>
     <p:extLst>
       <p:ext uri="{BB962C8B-B14F-4D97-AF65-F5344CB8AC3E}">
@@ -25019,7 +25469,7 @@
 </p:sld>
 </file>
 
-<file path=ppt/slides/slide28.xml><?xml version="1.0" encoding="utf-8"?>
+<file path=ppt/slides/slide29.xml><?xml version="1.0" encoding="utf-8"?>
 <p:sld xmlns:a="http://schemas.openxmlformats.org/drawingml/2006/main" xmlns:r="http://schemas.openxmlformats.org/officeDocument/2006/relationships" xmlns:p="http://schemas.openxmlformats.org/presentationml/2006/main">
   <p:cSld>
     <p:spTree>
@@ -25117,7 +25567,7 @@
                 <a:latin typeface="+mn-lt"/>
                 <a:sym typeface="Roboto"/>
               </a:rPr>
-              <a:t>Моделирование и стратегии на финансовых рынках</a:t>
+              <a:t>Продвинутые нейросети</a:t>
             </a:r>
             <a:endParaRPr sz="1200" dirty="0">
               <a:solidFill>
@@ -25166,14 +25616,14 @@
           <a:lstStyle/>
           <a:p>
             <a:r>
-              <a:rPr lang="ru-RU" sz="1200" dirty="0">
+              <a:rPr lang="en-US" sz="1200" dirty="0">
                 <a:solidFill>
                   <a:srgbClr val="1F1F1F"/>
                 </a:solidFill>
                 <a:latin typeface="+mn-lt"/>
                 <a:sym typeface="Roboto"/>
               </a:rPr>
-              <a:t>Основы классификации и регрессии в финансовых приложениях</a:t>
+              <a:t>LLM, BERT</a:t>
             </a:r>
             <a:endParaRPr sz="1200" dirty="0">
               <a:solidFill>
@@ -25236,7 +25686,7 @@
                 <a:latin typeface="+mn-lt"/>
                 <a:sym typeface="Roboto"/>
               </a:rPr>
-              <a:t>Моделирование временных рядов в прогнозировании цен</a:t>
+              <a:t>Оценка тональности новостей. Предобученные модели.</a:t>
             </a:r>
           </a:p>
         </p:txBody>
@@ -25285,24 +25735,34 @@
           <a:lstStyle/>
           <a:p>
             <a:r>
-              <a:rPr lang="ru-RU" sz="1200" dirty="0">
+              <a:rPr lang="en-US" sz="1200" dirty="0">
                 <a:solidFill>
                   <a:srgbClr val="1F1F1F"/>
                 </a:solidFill>
                 <a:latin typeface="+mn-lt"/>
                 <a:sym typeface="Roboto"/>
               </a:rPr>
-              <a:t>Стратегии торговли и оптимизация портфеля с использованием </a:t>
+              <a:t>RL, </a:t>
             </a:r>
             <a:r>
-              <a:rPr lang="en-US" sz="1200" dirty="0">
+              <a:rPr lang="ru-RU" sz="1200" dirty="0">
                 <a:solidFill>
                   <a:srgbClr val="1F1F1F"/>
                 </a:solidFill>
                 <a:latin typeface="+mn-lt"/>
                 <a:sym typeface="Roboto"/>
               </a:rPr>
-              <a:t>ML</a:t>
+              <a:t>фреймворк </a:t>
+            </a:r>
+            <a:r>
+              <a:rPr lang="en-US" sz="1200" dirty="0" err="1">
+                <a:solidFill>
+                  <a:srgbClr val="1F1F1F"/>
+                </a:solidFill>
+                <a:latin typeface="+mn-lt"/>
+                <a:sym typeface="Roboto"/>
+              </a:rPr>
+              <a:t>FinRL</a:t>
             </a:r>
             <a:endParaRPr sz="1200" dirty="0">
               <a:solidFill>
@@ -25365,7 +25825,37 @@
                 <a:latin typeface="+mn-lt"/>
                 <a:sym typeface="Roboto"/>
               </a:rPr>
-              <a:t>Работа с высокочастотными данными в финансах</a:t>
+              <a:t>Применение </a:t>
+            </a:r>
+            <a:r>
+              <a:rPr lang="en-US" sz="1200" dirty="0">
+                <a:solidFill>
+                  <a:srgbClr val="1F1F1F"/>
+                </a:solidFill>
+                <a:latin typeface="+mn-lt"/>
+                <a:sym typeface="Roboto"/>
+              </a:rPr>
+              <a:t>RL</a:t>
+            </a:r>
+            <a:r>
+              <a:rPr lang="ru-RU" sz="1200" dirty="0">
+                <a:solidFill>
+                  <a:srgbClr val="1F1F1F"/>
+                </a:solidFill>
+                <a:latin typeface="+mn-lt"/>
+                <a:sym typeface="Roboto"/>
+              </a:rPr>
+              <a:t> в </a:t>
+            </a:r>
+            <a:r>
+              <a:rPr lang="ru-RU" sz="1200" dirty="0" err="1">
+                <a:solidFill>
+                  <a:srgbClr val="1F1F1F"/>
+                </a:solidFill>
+                <a:latin typeface="+mn-lt"/>
+                <a:sym typeface="Roboto"/>
+              </a:rPr>
+              <a:t>ансаамблях</a:t>
             </a:r>
             <a:endParaRPr sz="1200" dirty="0">
               <a:solidFill>
@@ -25561,12 +26051,152 @@
           </a:fontRef>
         </p:style>
       </p:cxnSp>
+      <p:sp>
+        <p:nvSpPr>
+          <p:cNvPr id="18" name="Google Shape;271;p44">
+            <a:extLst>
+              <a:ext uri="{FF2B5EF4-FFF2-40B4-BE49-F238E27FC236}">
+                <a16:creationId xmlns:a16="http://schemas.microsoft.com/office/drawing/2014/main" id="{D77AA650-7B6A-2E4F-A234-07C44F1AF1CD}"/>
+              </a:ext>
+            </a:extLst>
+          </p:cNvPr>
+          <p:cNvSpPr/>
+          <p:nvPr/>
+        </p:nvSpPr>
+        <p:spPr>
+          <a:xfrm>
+            <a:off x="2226713" y="3915856"/>
+            <a:ext cx="5355965" cy="396000"/>
+          </a:xfrm>
+          <a:prstGeom prst="roundRect">
+            <a:avLst>
+              <a:gd name="adj" fmla="val 16667"/>
+            </a:avLst>
+          </a:prstGeom>
+          <a:solidFill>
+            <a:srgbClr val="FFD966"/>
+          </a:solidFill>
+          <a:ln>
+            <a:noFill/>
+          </a:ln>
+          <a:effectLst>
+            <a:glow>
+              <a:schemeClr val="accent1">
+                <a:satMod val="175000"/>
+                <a:alpha val="40000"/>
+              </a:schemeClr>
+            </a:glow>
+          </a:effectLst>
+        </p:spPr>
+        <p:txBody>
+          <a:bodyPr spcFirstLastPara="1" wrap="square" lIns="162000" tIns="91425" rIns="162000" bIns="91425" anchor="ctr" anchorCtr="0">
+            <a:noAutofit/>
+          </a:bodyPr>
+          <a:lstStyle/>
+          <a:p>
+            <a:r>
+              <a:rPr lang="ru-RU" sz="1200" dirty="0">
+                <a:solidFill>
+                  <a:srgbClr val="1F1F1F"/>
+                </a:solidFill>
+                <a:latin typeface="+mn-lt"/>
+                <a:sym typeface="Roboto"/>
+              </a:rPr>
+              <a:t>Построение финального ансамбля. Подбор гиперпараметров.</a:t>
+            </a:r>
+            <a:endParaRPr sz="1200" dirty="0">
+              <a:solidFill>
+                <a:srgbClr val="1F1F1F"/>
+              </a:solidFill>
+              <a:latin typeface="+mn-lt"/>
+              <a:sym typeface="Roboto"/>
+            </a:endParaRPr>
+          </a:p>
+        </p:txBody>
+      </p:sp>
+      <p:cxnSp>
+        <p:nvCxnSpPr>
+          <p:cNvPr id="19" name="Elbow Connector 18">
+            <a:extLst>
+              <a:ext uri="{FF2B5EF4-FFF2-40B4-BE49-F238E27FC236}">
+                <a16:creationId xmlns:a16="http://schemas.microsoft.com/office/drawing/2014/main" id="{4E4FCD50-FA53-BF4C-9AB8-F81862AA8721}"/>
+              </a:ext>
+            </a:extLst>
+          </p:cNvPr>
+          <p:cNvCxnSpPr>
+            <a:cxnSpLocks/>
+            <a:stCxn id="271" idx="2"/>
+            <a:endCxn id="18" idx="1"/>
+          </p:cNvCxnSpPr>
+          <p:nvPr/>
+        </p:nvCxnSpPr>
+        <p:spPr>
+          <a:xfrm rot="16200000" flipH="1">
+            <a:off x="893333" y="2780475"/>
+            <a:ext cx="2430137" cy="236623"/>
+          </a:xfrm>
+          <a:prstGeom prst="bentConnector2">
+            <a:avLst/>
+          </a:prstGeom>
+          <a:ln>
+            <a:solidFill>
+              <a:schemeClr val="tx1"/>
+            </a:solidFill>
+            <a:tailEnd type="triangle"/>
+          </a:ln>
+        </p:spPr>
+        <p:style>
+          <a:lnRef idx="1">
+            <a:schemeClr val="accent1"/>
+          </a:lnRef>
+          <a:fillRef idx="0">
+            <a:schemeClr val="accent1"/>
+          </a:fillRef>
+          <a:effectRef idx="0">
+            <a:schemeClr val="accent1"/>
+          </a:effectRef>
+          <a:fontRef idx="minor">
+            <a:schemeClr val="tx1"/>
+          </a:fontRef>
+        </p:style>
+      </p:cxnSp>
+      <p:pic>
+        <p:nvPicPr>
+          <p:cNvPr id="29" name="Google Shape;225;p40">
+            <a:extLst>
+              <a:ext uri="{FF2B5EF4-FFF2-40B4-BE49-F238E27FC236}">
+                <a16:creationId xmlns:a16="http://schemas.microsoft.com/office/drawing/2014/main" id="{D3188FC7-BF31-944E-B056-08D2A4A16B5A}"/>
+              </a:ext>
+            </a:extLst>
+          </p:cNvPr>
+          <p:cNvPicPr preferRelativeResize="0"/>
+          <p:nvPr/>
+        </p:nvPicPr>
+        <p:blipFill>
+          <a:blip r:embed="rId3"/>
+          <a:srcRect t="2849" b="2849"/>
+          <a:stretch/>
+        </p:blipFill>
+        <p:spPr>
+          <a:xfrm>
+            <a:off x="598455" y="1223612"/>
+            <a:ext cx="419930" cy="396001"/>
+          </a:xfrm>
+          <a:prstGeom prst="ellipse">
+            <a:avLst/>
+          </a:prstGeom>
+          <a:noFill/>
+          <a:ln>
+            <a:noFill/>
+          </a:ln>
+        </p:spPr>
+      </p:pic>
       <p:graphicFrame>
         <p:nvGraphicFramePr>
-          <p:cNvPr id="23" name="Table 23">
+          <p:cNvPr id="21" name="Table 20">
             <a:extLst>
               <a:ext uri="{FF2B5EF4-FFF2-40B4-BE49-F238E27FC236}">
-                <a16:creationId xmlns:a16="http://schemas.microsoft.com/office/drawing/2014/main" id="{7207DC4F-0418-0E43-AEA2-26001954E05D}"/>
+                <a16:creationId xmlns:a16="http://schemas.microsoft.com/office/drawing/2014/main" id="{C8626EB2-6723-4E4B-BA7B-511DEFCB7AAC}"/>
               </a:ext>
             </a:extLst>
           </p:cNvPr>
@@ -25576,14 +26206,14 @@
           <p:nvPr>
             <p:extLst>
               <p:ext uri="{D42A27DB-BD31-4B8C-83A1-F6EECF244321}">
-                <p14:modId xmlns:p14="http://schemas.microsoft.com/office/powerpoint/2010/main" val="1213552113"/>
+                <p14:modId xmlns:p14="http://schemas.microsoft.com/office/powerpoint/2010/main" val="2776199666"/>
               </p:ext>
             </p:extLst>
           </p:nvPr>
         </p:nvGraphicFramePr>
         <p:xfrm>
-          <a:off x="5355768" y="573874"/>
-          <a:ext cx="2226910" cy="304800"/>
+          <a:off x="5673898" y="573874"/>
+          <a:ext cx="1908780" cy="304800"/>
         </p:xfrm>
         <a:graphic>
           <a:graphicData uri="http://schemas.openxmlformats.org/drawingml/2006/table">
@@ -25632,13 +26262,6 @@
                     </a:ext>
                   </a:extLst>
                 </a:gridCol>
-                <a:gridCol w="318130">
-                  <a:extLst>
-                    <a:ext uri="{9D8B030D-6E8A-4147-A177-3AD203B41FA5}">
-                      <a16:colId xmlns:a16="http://schemas.microsoft.com/office/drawing/2014/main" val="4263781807"/>
-                    </a:ext>
-                  </a:extLst>
-                </a:gridCol>
               </a:tblGrid>
               <a:tr h="250242">
                 <a:tc>
@@ -25657,7 +26280,7 @@
                   <a:tcPr>
                     <a:solidFill>
                       <a:schemeClr val="bg1">
-                        <a:lumMod val="85000"/>
+                        <a:lumMod val="95000"/>
                       </a:schemeClr>
                     </a:solidFill>
                   </a:tcPr>
@@ -25708,7 +26331,7 @@
                   <a:tcPr>
                     <a:solidFill>
                       <a:schemeClr val="bg1">
-                        <a:lumMod val="85000"/>
+                        <a:lumMod val="95000"/>
                       </a:schemeClr>
                     </a:solidFill>
                   </a:tcPr>
@@ -25759,7 +26382,7 @@
                   <a:tcPr>
                     <a:solidFill>
                       <a:schemeClr val="bg1">
-                        <a:lumMod val="85000"/>
+                        <a:lumMod val="95000"/>
                       </a:schemeClr>
                     </a:solidFill>
                   </a:tcPr>
@@ -25780,8 +26403,8 @@
                   <a:tcPr>
                     <a:solidFill>
                       <a:schemeClr val="accent1">
-                        <a:lumMod val="60000"/>
-                        <a:lumOff val="40000"/>
+                        <a:lumMod val="40000"/>
+                        <a:lumOff val="60000"/>
                       </a:schemeClr>
                     </a:solidFill>
                   </a:tcPr>
@@ -25824,25 +26447,6 @@
                     </a:solidFill>
                   </a:tcPr>
                 </a:tc>
-                <a:tc>
-                  <a:txBody>
-                    <a:bodyPr/>
-                    <a:lstStyle/>
-                    <a:p>
-                      <a:pPr algn="ctr"/>
-                      <a:r>
-                        <a:rPr lang="ru-RU" dirty="0"/>
-                        <a:t>7</a:t>
-                      </a:r>
-                      <a:endParaRPr lang="en-US" dirty="0"/>
-                    </a:p>
-                  </a:txBody>
-                  <a:tcPr>
-                    <a:solidFill>
-                      <a:srgbClr val="FFD966"/>
-                    </a:solidFill>
-                  </a:tcPr>
-                </a:tc>
                 <a:extLst>
                   <a:ext uri="{0D108BD9-81ED-4DB2-BD59-A6C34878D82A}">
                     <a16:rowId xmlns:a16="http://schemas.microsoft.com/office/drawing/2014/main" val="97753204"/>
@@ -25853,1327 +26457,10 @@
           </a:graphicData>
         </a:graphic>
       </p:graphicFrame>
-      <p:sp>
-        <p:nvSpPr>
-          <p:cNvPr id="18" name="Google Shape;271;p44">
-            <a:extLst>
-              <a:ext uri="{FF2B5EF4-FFF2-40B4-BE49-F238E27FC236}">
-                <a16:creationId xmlns:a16="http://schemas.microsoft.com/office/drawing/2014/main" id="{D77AA650-7B6A-2E4F-A234-07C44F1AF1CD}"/>
-              </a:ext>
-            </a:extLst>
-          </p:cNvPr>
-          <p:cNvSpPr/>
-          <p:nvPr/>
-        </p:nvSpPr>
-        <p:spPr>
-          <a:xfrm>
-            <a:off x="2226713" y="3915856"/>
-            <a:ext cx="5355965" cy="396000"/>
-          </a:xfrm>
-          <a:prstGeom prst="roundRect">
-            <a:avLst>
-              <a:gd name="adj" fmla="val 16667"/>
-            </a:avLst>
-          </a:prstGeom>
-          <a:solidFill>
-            <a:srgbClr val="FFD966"/>
-          </a:solidFill>
-          <a:ln>
-            <a:noFill/>
-          </a:ln>
-          <a:effectLst>
-            <a:glow>
-              <a:schemeClr val="accent1">
-                <a:satMod val="175000"/>
-                <a:alpha val="40000"/>
-              </a:schemeClr>
-            </a:glow>
-          </a:effectLst>
-        </p:spPr>
-        <p:txBody>
-          <a:bodyPr spcFirstLastPara="1" wrap="square" lIns="162000" tIns="91425" rIns="162000" bIns="91425" anchor="ctr" anchorCtr="0">
-            <a:noAutofit/>
-          </a:bodyPr>
-          <a:lstStyle/>
-          <a:p>
-            <a:r>
-              <a:rPr lang="ru-RU" sz="1200" dirty="0">
-                <a:solidFill>
-                  <a:srgbClr val="1F1F1F"/>
-                </a:solidFill>
-                <a:latin typeface="+mn-lt"/>
-                <a:sym typeface="Roboto"/>
-              </a:rPr>
-              <a:t>Применение регуляризации и оптимизации в финансовых моделях</a:t>
-            </a:r>
-            <a:endParaRPr sz="1200" dirty="0">
-              <a:solidFill>
-                <a:srgbClr val="1F1F1F"/>
-              </a:solidFill>
-              <a:latin typeface="+mn-lt"/>
-              <a:sym typeface="Roboto"/>
-            </a:endParaRPr>
-          </a:p>
-        </p:txBody>
-      </p:sp>
-      <p:cxnSp>
-        <p:nvCxnSpPr>
-          <p:cNvPr id="19" name="Elbow Connector 18">
-            <a:extLst>
-              <a:ext uri="{FF2B5EF4-FFF2-40B4-BE49-F238E27FC236}">
-                <a16:creationId xmlns:a16="http://schemas.microsoft.com/office/drawing/2014/main" id="{4E4FCD50-FA53-BF4C-9AB8-F81862AA8721}"/>
-              </a:ext>
-            </a:extLst>
-          </p:cNvPr>
-          <p:cNvCxnSpPr>
-            <a:cxnSpLocks/>
-            <a:stCxn id="271" idx="2"/>
-            <a:endCxn id="18" idx="1"/>
-          </p:cNvCxnSpPr>
-          <p:nvPr/>
-        </p:nvCxnSpPr>
-        <p:spPr>
-          <a:xfrm rot="16200000" flipH="1">
-            <a:off x="893333" y="2780475"/>
-            <a:ext cx="2430137" cy="236623"/>
-          </a:xfrm>
-          <a:prstGeom prst="bentConnector2">
-            <a:avLst/>
-          </a:prstGeom>
-          <a:ln>
-            <a:solidFill>
-              <a:schemeClr val="tx1"/>
-            </a:solidFill>
-            <a:tailEnd type="triangle"/>
-          </a:ln>
-        </p:spPr>
-        <p:style>
-          <a:lnRef idx="1">
-            <a:schemeClr val="accent1"/>
-          </a:lnRef>
-          <a:fillRef idx="0">
-            <a:schemeClr val="accent1"/>
-          </a:fillRef>
-          <a:effectRef idx="0">
-            <a:schemeClr val="accent1"/>
-          </a:effectRef>
-          <a:fontRef idx="minor">
-            <a:schemeClr val="tx1"/>
-          </a:fontRef>
-        </p:style>
-      </p:cxnSp>
-      <p:pic>
-        <p:nvPicPr>
-          <p:cNvPr id="46" name="Google Shape;530;p82">
-            <a:extLst>
-              <a:ext uri="{FF2B5EF4-FFF2-40B4-BE49-F238E27FC236}">
-                <a16:creationId xmlns:a16="http://schemas.microsoft.com/office/drawing/2014/main" id="{43F299C2-9666-D540-A69A-8BF402009BEF}"/>
-              </a:ext>
-            </a:extLst>
-          </p:cNvPr>
-          <p:cNvPicPr preferRelativeResize="0">
-            <a:picLocks noChangeAspect="1"/>
-          </p:cNvPicPr>
-          <p:nvPr/>
-        </p:nvPicPr>
-        <p:blipFill rotWithShape="1">
-          <a:blip r:embed="rId3">
-            <a:alphaModFix/>
-            <a:duotone>
-              <a:schemeClr val="accent5">
-                <a:shade val="45000"/>
-                <a:satMod val="135000"/>
-              </a:schemeClr>
-              <a:prstClr val="white"/>
-            </a:duotone>
-          </a:blip>
-          <a:srcRect/>
-          <a:stretch/>
-        </p:blipFill>
-        <p:spPr>
-          <a:xfrm>
-            <a:off x="7244284" y="3951208"/>
-            <a:ext cx="324002" cy="324000"/>
-          </a:xfrm>
-          <a:prstGeom prst="rect">
-            <a:avLst/>
-          </a:prstGeom>
-          <a:noFill/>
-          <a:ln>
-            <a:noFill/>
-          </a:ln>
-        </p:spPr>
-      </p:pic>
-      <p:sp>
-        <p:nvSpPr>
-          <p:cNvPr id="47" name="TextBox 46">
-            <a:extLst>
-              <a:ext uri="{FF2B5EF4-FFF2-40B4-BE49-F238E27FC236}">
-                <a16:creationId xmlns:a16="http://schemas.microsoft.com/office/drawing/2014/main" id="{B64000B9-CA8D-D74A-98B4-3BFBB2C52658}"/>
-              </a:ext>
-            </a:extLst>
-          </p:cNvPr>
-          <p:cNvSpPr txBox="1"/>
-          <p:nvPr/>
-        </p:nvSpPr>
-        <p:spPr>
-          <a:xfrm rot="20748746">
-            <a:off x="7603438" y="3895114"/>
-            <a:ext cx="936475" cy="307777"/>
-          </a:xfrm>
-          <a:prstGeom prst="rect">
-            <a:avLst/>
-          </a:prstGeom>
-          <a:noFill/>
-        </p:spPr>
-        <p:txBody>
-          <a:bodyPr wrap="none" rtlCol="0">
-            <a:spAutoFit/>
-          </a:bodyPr>
-          <a:lstStyle/>
-          <a:p>
-            <a:r>
-              <a:rPr lang="en-US" dirty="0" err="1">
-                <a:latin typeface="AkayaTelivigala" pitchFamily="2" charset="77"/>
-                <a:cs typeface="Apple Chancery" panose="03020702040506060504" pitchFamily="66" charset="-79"/>
-              </a:rPr>
-              <a:t>HomeTask</a:t>
-            </a:r>
-            <a:endParaRPr lang="en-US" dirty="0">
-              <a:latin typeface="Bradley Hand" pitchFamily="2" charset="77"/>
-              <a:cs typeface="Apple Chancery" panose="03020702040506060504" pitchFamily="66" charset="-79"/>
-            </a:endParaRPr>
-          </a:p>
-        </p:txBody>
-      </p:sp>
-      <p:pic>
-        <p:nvPicPr>
-          <p:cNvPr id="29" name="Google Shape;225;p40">
-            <a:extLst>
-              <a:ext uri="{FF2B5EF4-FFF2-40B4-BE49-F238E27FC236}">
-                <a16:creationId xmlns:a16="http://schemas.microsoft.com/office/drawing/2014/main" id="{D3188FC7-BF31-944E-B056-08D2A4A16B5A}"/>
-              </a:ext>
-            </a:extLst>
-          </p:cNvPr>
-          <p:cNvPicPr preferRelativeResize="0"/>
-          <p:nvPr/>
-        </p:nvPicPr>
-        <p:blipFill>
-          <a:blip r:embed="rId4"/>
-          <a:srcRect t="2849" b="2849"/>
-          <a:stretch/>
-        </p:blipFill>
-        <p:spPr>
-          <a:xfrm>
-            <a:off x="598455" y="1223612"/>
-            <a:ext cx="419930" cy="396001"/>
-          </a:xfrm>
-          <a:prstGeom prst="ellipse">
-            <a:avLst/>
-          </a:prstGeom>
-          <a:noFill/>
-          <a:ln>
-            <a:noFill/>
-          </a:ln>
-        </p:spPr>
-      </p:pic>
     </p:spTree>
     <p:extLst>
       <p:ext uri="{BB962C8B-B14F-4D97-AF65-F5344CB8AC3E}">
         <p14:creationId xmlns:p14="http://schemas.microsoft.com/office/powerpoint/2010/main" val="2145798135"/>
-      </p:ext>
-    </p:extLst>
-  </p:cSld>
-  <p:clrMapOvr>
-    <a:masterClrMapping/>
-  </p:clrMapOvr>
-</p:sld>
-</file>
-
-<file path=ppt/slides/slide29.xml><?xml version="1.0" encoding="utf-8"?>
-<p:sld xmlns:a="http://schemas.openxmlformats.org/drawingml/2006/main" xmlns:r="http://schemas.openxmlformats.org/officeDocument/2006/relationships" xmlns:p="http://schemas.openxmlformats.org/presentationml/2006/main">
-  <p:cSld>
-    <p:spTree>
-      <p:nvGrpSpPr>
-        <p:cNvPr id="1" name="Shape 269"/>
-        <p:cNvGrpSpPr/>
-        <p:nvPr/>
-      </p:nvGrpSpPr>
-      <p:grpSpPr>
-        <a:xfrm>
-          <a:off x="0" y="0"/>
-          <a:ext cx="0" cy="0"/>
-          <a:chOff x="0" y="0"/>
-          <a:chExt cx="0" cy="0"/>
-        </a:xfrm>
-      </p:grpSpPr>
-      <p:sp>
-        <p:nvSpPr>
-          <p:cNvPr id="270" name="Google Shape;270;p44"/>
-          <p:cNvSpPr txBox="1">
-            <a:spLocks noGrp="1"/>
-          </p:cNvSpPr>
-          <p:nvPr>
-            <p:ph type="title"/>
-          </p:nvPr>
-        </p:nvSpPr>
-        <p:spPr>
-          <a:xfrm>
-            <a:off x="500550" y="330724"/>
-            <a:ext cx="8520600" cy="1095900"/>
-          </a:xfrm>
-          <a:prstGeom prst="rect">
-            <a:avLst/>
-          </a:prstGeom>
-        </p:spPr>
-        <p:txBody>
-          <a:bodyPr spcFirstLastPara="1" wrap="square" lIns="91425" tIns="91425" rIns="91425" bIns="91425" anchor="t" anchorCtr="0">
-            <a:noAutofit/>
-          </a:bodyPr>
-          <a:lstStyle/>
-          <a:p>
-            <a:pPr marL="0" lvl="0" indent="0" algn="l" rtl="0">
-              <a:spcBef>
-                <a:spcPts val="0"/>
-              </a:spcBef>
-              <a:spcAft>
-                <a:spcPts val="0"/>
-              </a:spcAft>
-              <a:buNone/>
-            </a:pPr>
-            <a:r>
-              <a:rPr lang="ru" dirty="0"/>
-              <a:t>Программа курса</a:t>
-            </a:r>
-            <a:endParaRPr dirty="0"/>
-          </a:p>
-        </p:txBody>
-      </p:sp>
-      <p:sp>
-        <p:nvSpPr>
-          <p:cNvPr id="271" name="Google Shape;271;p44"/>
-          <p:cNvSpPr/>
-          <p:nvPr/>
-        </p:nvSpPr>
-        <p:spPr>
-          <a:xfrm>
-            <a:off x="500550" y="1104419"/>
-            <a:ext cx="2979080" cy="579300"/>
-          </a:xfrm>
-          <a:prstGeom prst="roundRect">
-            <a:avLst>
-              <a:gd name="adj" fmla="val 16667"/>
-            </a:avLst>
-          </a:prstGeom>
-          <a:solidFill>
-            <a:srgbClr val="FFD966"/>
-          </a:solidFill>
-          <a:ln>
-            <a:noFill/>
-          </a:ln>
-          <a:effectLst/>
-        </p:spPr>
-        <p:txBody>
-          <a:bodyPr spcFirstLastPara="1" wrap="square" lIns="162000" tIns="91425" rIns="162000" bIns="91425" anchor="ctr" anchorCtr="0">
-            <a:noAutofit/>
-          </a:bodyPr>
-          <a:lstStyle/>
-          <a:p>
-            <a:pPr marL="444500"/>
-            <a:r>
-              <a:rPr lang="ru-RU" sz="1200" dirty="0">
-                <a:solidFill>
-                  <a:srgbClr val="1F1F1F"/>
-                </a:solidFill>
-                <a:latin typeface="+mn-lt"/>
-                <a:sym typeface="Roboto"/>
-              </a:rPr>
-              <a:t>Глубокое обучение и практические аспекты</a:t>
-            </a:r>
-            <a:endParaRPr sz="1200" dirty="0">
-              <a:solidFill>
-                <a:srgbClr val="1F1F1F"/>
-              </a:solidFill>
-              <a:latin typeface="+mn-lt"/>
-              <a:sym typeface="Roboto"/>
-            </a:endParaRPr>
-          </a:p>
-        </p:txBody>
-      </p:sp>
-      <p:sp>
-        <p:nvSpPr>
-          <p:cNvPr id="12" name="Google Shape;271;p44">
-            <a:extLst>
-              <a:ext uri="{FF2B5EF4-FFF2-40B4-BE49-F238E27FC236}">
-                <a16:creationId xmlns:a16="http://schemas.microsoft.com/office/drawing/2014/main" id="{D8FD06C8-E377-A548-A8E0-938A22A6A104}"/>
-              </a:ext>
-            </a:extLst>
-          </p:cNvPr>
-          <p:cNvSpPr/>
-          <p:nvPr/>
-        </p:nvSpPr>
-        <p:spPr>
-          <a:xfrm>
-            <a:off x="2226713" y="1892008"/>
-            <a:ext cx="5355965" cy="396000"/>
-          </a:xfrm>
-          <a:prstGeom prst="roundRect">
-            <a:avLst>
-              <a:gd name="adj" fmla="val 16667"/>
-            </a:avLst>
-          </a:prstGeom>
-          <a:solidFill>
-            <a:srgbClr val="FFD966"/>
-          </a:solidFill>
-          <a:ln>
-            <a:noFill/>
-          </a:ln>
-          <a:effectLst/>
-        </p:spPr>
-        <p:txBody>
-          <a:bodyPr spcFirstLastPara="1" wrap="square" lIns="162000" tIns="91425" rIns="162000" bIns="91425" anchor="ctr" anchorCtr="0">
-            <a:noAutofit/>
-          </a:bodyPr>
-          <a:lstStyle/>
-          <a:p>
-            <a:r>
-              <a:rPr lang="ru-RU" sz="1200" dirty="0">
-                <a:solidFill>
-                  <a:srgbClr val="1F1F1F"/>
-                </a:solidFill>
-                <a:latin typeface="+mn-lt"/>
-                <a:sym typeface="Roboto"/>
-              </a:rPr>
-              <a:t>Введение в глубокое обучение и нейронные сети</a:t>
-            </a:r>
-            <a:endParaRPr sz="1200" dirty="0">
-              <a:solidFill>
-                <a:srgbClr val="1F1F1F"/>
-              </a:solidFill>
-              <a:latin typeface="+mn-lt"/>
-              <a:sym typeface="Roboto"/>
-            </a:endParaRPr>
-          </a:p>
-        </p:txBody>
-      </p:sp>
-      <p:sp>
-        <p:nvSpPr>
-          <p:cNvPr id="13" name="Google Shape;271;p44">
-            <a:extLst>
-              <a:ext uri="{FF2B5EF4-FFF2-40B4-BE49-F238E27FC236}">
-                <a16:creationId xmlns:a16="http://schemas.microsoft.com/office/drawing/2014/main" id="{0FE2E67F-87DB-BA4A-8DD0-D5FDE2391C49}"/>
-              </a:ext>
-            </a:extLst>
-          </p:cNvPr>
-          <p:cNvSpPr/>
-          <p:nvPr/>
-        </p:nvSpPr>
-        <p:spPr>
-          <a:xfrm>
-            <a:off x="2226713" y="2397970"/>
-            <a:ext cx="5355965" cy="396000"/>
-          </a:xfrm>
-          <a:prstGeom prst="roundRect">
-            <a:avLst>
-              <a:gd name="adj" fmla="val 16667"/>
-            </a:avLst>
-          </a:prstGeom>
-          <a:solidFill>
-            <a:srgbClr val="FFD966"/>
-          </a:solidFill>
-          <a:ln>
-            <a:noFill/>
-          </a:ln>
-          <a:effectLst>
-            <a:glow>
-              <a:schemeClr val="accent1">
-                <a:satMod val="175000"/>
-                <a:alpha val="40000"/>
-              </a:schemeClr>
-            </a:glow>
-          </a:effectLst>
-        </p:spPr>
-        <p:txBody>
-          <a:bodyPr spcFirstLastPara="1" wrap="square" lIns="162000" tIns="91425" rIns="162000" bIns="91425" anchor="ctr" anchorCtr="0">
-            <a:noAutofit/>
-          </a:bodyPr>
-          <a:lstStyle/>
-          <a:p>
-            <a:r>
-              <a:rPr lang="ru-RU" sz="1200" dirty="0">
-                <a:solidFill>
-                  <a:srgbClr val="1F1F1F"/>
-                </a:solidFill>
-                <a:latin typeface="+mn-lt"/>
-                <a:sym typeface="Roboto"/>
-              </a:rPr>
-              <a:t>Применение нейронных сетей в анализе финансовых рынков</a:t>
-            </a:r>
-          </a:p>
-        </p:txBody>
-      </p:sp>
-      <p:sp>
-        <p:nvSpPr>
-          <p:cNvPr id="16" name="Google Shape;271;p44">
-            <a:extLst>
-              <a:ext uri="{FF2B5EF4-FFF2-40B4-BE49-F238E27FC236}">
-                <a16:creationId xmlns:a16="http://schemas.microsoft.com/office/drawing/2014/main" id="{7A56B114-1520-2F4F-BC28-2EADE862D379}"/>
-              </a:ext>
-            </a:extLst>
-          </p:cNvPr>
-          <p:cNvSpPr/>
-          <p:nvPr/>
-        </p:nvSpPr>
-        <p:spPr>
-          <a:xfrm>
-            <a:off x="2212321" y="2903932"/>
-            <a:ext cx="5355965" cy="396000"/>
-          </a:xfrm>
-          <a:prstGeom prst="roundRect">
-            <a:avLst>
-              <a:gd name="adj" fmla="val 16667"/>
-            </a:avLst>
-          </a:prstGeom>
-          <a:solidFill>
-            <a:srgbClr val="FFD966"/>
-          </a:solidFill>
-          <a:ln>
-            <a:noFill/>
-          </a:ln>
-          <a:effectLst>
-            <a:glow>
-              <a:schemeClr val="accent1">
-                <a:satMod val="175000"/>
-                <a:alpha val="40000"/>
-              </a:schemeClr>
-            </a:glow>
-          </a:effectLst>
-        </p:spPr>
-        <p:txBody>
-          <a:bodyPr spcFirstLastPara="1" wrap="square" lIns="162000" tIns="91425" rIns="162000" bIns="91425" anchor="ctr" anchorCtr="0">
-            <a:noAutofit/>
-          </a:bodyPr>
-          <a:lstStyle/>
-          <a:p>
-            <a:r>
-              <a:rPr lang="ru-RU" sz="1200" dirty="0">
-                <a:solidFill>
-                  <a:srgbClr val="1F1F1F"/>
-                </a:solidFill>
-                <a:latin typeface="+mn-lt"/>
-                <a:sym typeface="Roboto"/>
-              </a:rPr>
-              <a:t>Этические и регуляторные аспекты применения </a:t>
-            </a:r>
-            <a:r>
-              <a:rPr lang="en-US" sz="1200" dirty="0">
-                <a:solidFill>
-                  <a:srgbClr val="1F1F1F"/>
-                </a:solidFill>
-                <a:latin typeface="+mn-lt"/>
-                <a:sym typeface="Roboto"/>
-              </a:rPr>
-              <a:t>ML </a:t>
-            </a:r>
-            <a:r>
-              <a:rPr lang="ru-RU" sz="1200" dirty="0">
-                <a:solidFill>
-                  <a:srgbClr val="1F1F1F"/>
-                </a:solidFill>
-                <a:latin typeface="+mn-lt"/>
-                <a:sym typeface="Roboto"/>
-              </a:rPr>
-              <a:t>в финансах</a:t>
-            </a:r>
-            <a:endParaRPr sz="1200" dirty="0">
-              <a:solidFill>
-                <a:srgbClr val="1F1F1F"/>
-              </a:solidFill>
-              <a:latin typeface="+mn-lt"/>
-              <a:sym typeface="Roboto"/>
-            </a:endParaRPr>
-          </a:p>
-        </p:txBody>
-      </p:sp>
-      <p:sp>
-        <p:nvSpPr>
-          <p:cNvPr id="17" name="Google Shape;271;p44">
-            <a:extLst>
-              <a:ext uri="{FF2B5EF4-FFF2-40B4-BE49-F238E27FC236}">
-                <a16:creationId xmlns:a16="http://schemas.microsoft.com/office/drawing/2014/main" id="{93DB87C6-9A77-BE48-AFE8-9E6FD684BDEB}"/>
-              </a:ext>
-            </a:extLst>
-          </p:cNvPr>
-          <p:cNvSpPr/>
-          <p:nvPr/>
-        </p:nvSpPr>
-        <p:spPr>
-          <a:xfrm>
-            <a:off x="2226713" y="3409894"/>
-            <a:ext cx="5355965" cy="396000"/>
-          </a:xfrm>
-          <a:prstGeom prst="roundRect">
-            <a:avLst>
-              <a:gd name="adj" fmla="val 16667"/>
-            </a:avLst>
-          </a:prstGeom>
-          <a:solidFill>
-            <a:srgbClr val="FFD966"/>
-          </a:solidFill>
-          <a:ln>
-            <a:noFill/>
-          </a:ln>
-          <a:effectLst>
-            <a:glow>
-              <a:schemeClr val="accent1">
-                <a:satMod val="175000"/>
-                <a:alpha val="40000"/>
-              </a:schemeClr>
-            </a:glow>
-          </a:effectLst>
-        </p:spPr>
-        <p:txBody>
-          <a:bodyPr spcFirstLastPara="1" wrap="square" lIns="162000" tIns="91425" rIns="162000" bIns="91425" anchor="ctr" anchorCtr="0">
-            <a:noAutofit/>
-          </a:bodyPr>
-          <a:lstStyle/>
-          <a:p>
-            <a:r>
-              <a:rPr lang="ru-RU" sz="1200" dirty="0">
-                <a:solidFill>
-                  <a:srgbClr val="1F1F1F"/>
-                </a:solidFill>
-                <a:latin typeface="+mn-lt"/>
-                <a:sym typeface="Roboto"/>
-              </a:rPr>
-              <a:t>Создание и обучение глубоких моделей в </a:t>
-            </a:r>
-            <a:r>
-              <a:rPr lang="en-US" sz="1200" dirty="0">
-                <a:solidFill>
-                  <a:srgbClr val="1F1F1F"/>
-                </a:solidFill>
-                <a:latin typeface="+mn-lt"/>
-                <a:sym typeface="Roboto"/>
-              </a:rPr>
-              <a:t>Python</a:t>
-            </a:r>
-            <a:endParaRPr sz="1200" dirty="0">
-              <a:solidFill>
-                <a:srgbClr val="1F1F1F"/>
-              </a:solidFill>
-              <a:latin typeface="+mn-lt"/>
-              <a:sym typeface="Roboto"/>
-            </a:endParaRPr>
-          </a:p>
-        </p:txBody>
-      </p:sp>
-      <p:cxnSp>
-        <p:nvCxnSpPr>
-          <p:cNvPr id="3" name="Elbow Connector 2">
-            <a:extLst>
-              <a:ext uri="{FF2B5EF4-FFF2-40B4-BE49-F238E27FC236}">
-                <a16:creationId xmlns:a16="http://schemas.microsoft.com/office/drawing/2014/main" id="{C1180B41-AAC0-2546-8533-191E5D9B7F77}"/>
-              </a:ext>
-            </a:extLst>
-          </p:cNvPr>
-          <p:cNvCxnSpPr>
-            <a:cxnSpLocks/>
-            <a:stCxn id="271" idx="2"/>
-            <a:endCxn id="12" idx="1"/>
-          </p:cNvCxnSpPr>
-          <p:nvPr/>
-        </p:nvCxnSpPr>
-        <p:spPr>
-          <a:xfrm rot="16200000" flipH="1">
-            <a:off x="1905257" y="1768551"/>
-            <a:ext cx="406289" cy="236623"/>
-          </a:xfrm>
-          <a:prstGeom prst="bentConnector2">
-            <a:avLst/>
-          </a:prstGeom>
-          <a:ln>
-            <a:solidFill>
-              <a:schemeClr val="tx1"/>
-            </a:solidFill>
-            <a:tailEnd type="triangle"/>
-          </a:ln>
-        </p:spPr>
-        <p:style>
-          <a:lnRef idx="1">
-            <a:schemeClr val="accent1"/>
-          </a:lnRef>
-          <a:fillRef idx="0">
-            <a:schemeClr val="accent1"/>
-          </a:fillRef>
-          <a:effectRef idx="0">
-            <a:schemeClr val="accent1"/>
-          </a:effectRef>
-          <a:fontRef idx="minor">
-            <a:schemeClr val="tx1"/>
-          </a:fontRef>
-        </p:style>
-      </p:cxnSp>
-      <p:cxnSp>
-        <p:nvCxnSpPr>
-          <p:cNvPr id="7" name="Elbow Connector 6">
-            <a:extLst>
-              <a:ext uri="{FF2B5EF4-FFF2-40B4-BE49-F238E27FC236}">
-                <a16:creationId xmlns:a16="http://schemas.microsoft.com/office/drawing/2014/main" id="{F828FA00-64F5-D64E-A4E8-78AD68A71E2D}"/>
-              </a:ext>
-            </a:extLst>
-          </p:cNvPr>
-          <p:cNvCxnSpPr>
-            <a:cxnSpLocks/>
-            <a:stCxn id="271" idx="2"/>
-            <a:endCxn id="13" idx="1"/>
-          </p:cNvCxnSpPr>
-          <p:nvPr/>
-        </p:nvCxnSpPr>
-        <p:spPr>
-          <a:xfrm rot="16200000" flipH="1">
-            <a:off x="1652276" y="2021532"/>
-            <a:ext cx="912251" cy="236623"/>
-          </a:xfrm>
-          <a:prstGeom prst="bentConnector2">
-            <a:avLst/>
-          </a:prstGeom>
-          <a:ln>
-            <a:solidFill>
-              <a:schemeClr val="tx1"/>
-            </a:solidFill>
-            <a:tailEnd type="triangle"/>
-          </a:ln>
-        </p:spPr>
-        <p:style>
-          <a:lnRef idx="1">
-            <a:schemeClr val="accent1"/>
-          </a:lnRef>
-          <a:fillRef idx="0">
-            <a:schemeClr val="accent1"/>
-          </a:fillRef>
-          <a:effectRef idx="0">
-            <a:schemeClr val="accent1"/>
-          </a:effectRef>
-          <a:fontRef idx="minor">
-            <a:schemeClr val="tx1"/>
-          </a:fontRef>
-        </p:style>
-      </p:cxnSp>
-      <p:cxnSp>
-        <p:nvCxnSpPr>
-          <p:cNvPr id="11" name="Elbow Connector 10">
-            <a:extLst>
-              <a:ext uri="{FF2B5EF4-FFF2-40B4-BE49-F238E27FC236}">
-                <a16:creationId xmlns:a16="http://schemas.microsoft.com/office/drawing/2014/main" id="{1B9CA35D-F3DD-2349-BB63-178A3D48C12C}"/>
-              </a:ext>
-            </a:extLst>
-          </p:cNvPr>
-          <p:cNvCxnSpPr>
-            <a:cxnSpLocks/>
-            <a:stCxn id="271" idx="2"/>
-            <a:endCxn id="16" idx="1"/>
-          </p:cNvCxnSpPr>
-          <p:nvPr/>
-        </p:nvCxnSpPr>
-        <p:spPr>
-          <a:xfrm rot="16200000" flipH="1">
-            <a:off x="1392099" y="2281709"/>
-            <a:ext cx="1418213" cy="222231"/>
-          </a:xfrm>
-          <a:prstGeom prst="bentConnector2">
-            <a:avLst/>
-          </a:prstGeom>
-          <a:ln>
-            <a:solidFill>
-              <a:schemeClr val="tx1"/>
-            </a:solidFill>
-            <a:tailEnd type="triangle"/>
-          </a:ln>
-        </p:spPr>
-        <p:style>
-          <a:lnRef idx="1">
-            <a:schemeClr val="accent1"/>
-          </a:lnRef>
-          <a:fillRef idx="0">
-            <a:schemeClr val="accent1"/>
-          </a:fillRef>
-          <a:effectRef idx="0">
-            <a:schemeClr val="accent1"/>
-          </a:effectRef>
-          <a:fontRef idx="minor">
-            <a:schemeClr val="tx1"/>
-          </a:fontRef>
-        </p:style>
-      </p:cxnSp>
-      <p:cxnSp>
-        <p:nvCxnSpPr>
-          <p:cNvPr id="20" name="Elbow Connector 19">
-            <a:extLst>
-              <a:ext uri="{FF2B5EF4-FFF2-40B4-BE49-F238E27FC236}">
-                <a16:creationId xmlns:a16="http://schemas.microsoft.com/office/drawing/2014/main" id="{77BABB97-37B4-2248-9138-F1BB4D6122DE}"/>
-              </a:ext>
-            </a:extLst>
-          </p:cNvPr>
-          <p:cNvCxnSpPr>
-            <a:cxnSpLocks/>
-            <a:stCxn id="271" idx="2"/>
-            <a:endCxn id="17" idx="1"/>
-          </p:cNvCxnSpPr>
-          <p:nvPr/>
-        </p:nvCxnSpPr>
-        <p:spPr>
-          <a:xfrm rot="16200000" flipH="1">
-            <a:off x="1146314" y="2527494"/>
-            <a:ext cx="1924175" cy="236623"/>
-          </a:xfrm>
-          <a:prstGeom prst="bentConnector2">
-            <a:avLst/>
-          </a:prstGeom>
-          <a:ln>
-            <a:solidFill>
-              <a:schemeClr val="tx1"/>
-            </a:solidFill>
-            <a:tailEnd type="triangle"/>
-          </a:ln>
-        </p:spPr>
-        <p:style>
-          <a:lnRef idx="1">
-            <a:schemeClr val="accent1"/>
-          </a:lnRef>
-          <a:fillRef idx="0">
-            <a:schemeClr val="accent1"/>
-          </a:fillRef>
-          <a:effectRef idx="0">
-            <a:schemeClr val="accent1"/>
-          </a:effectRef>
-          <a:fontRef idx="minor">
-            <a:schemeClr val="tx1"/>
-          </a:fontRef>
-        </p:style>
-      </p:cxnSp>
-      <p:graphicFrame>
-        <p:nvGraphicFramePr>
-          <p:cNvPr id="23" name="Table 23">
-            <a:extLst>
-              <a:ext uri="{FF2B5EF4-FFF2-40B4-BE49-F238E27FC236}">
-                <a16:creationId xmlns:a16="http://schemas.microsoft.com/office/drawing/2014/main" id="{7207DC4F-0418-0E43-AEA2-26001954E05D}"/>
-              </a:ext>
-            </a:extLst>
-          </p:cNvPr>
-          <p:cNvGraphicFramePr>
-            <a:graphicFrameLocks noGrp="1"/>
-          </p:cNvGraphicFramePr>
-          <p:nvPr>
-            <p:extLst>
-              <p:ext uri="{D42A27DB-BD31-4B8C-83A1-F6EECF244321}">
-                <p14:modId xmlns:p14="http://schemas.microsoft.com/office/powerpoint/2010/main" val="1874795113"/>
-              </p:ext>
-            </p:extLst>
-          </p:nvPr>
-        </p:nvGraphicFramePr>
-        <p:xfrm>
-          <a:off x="5355768" y="573874"/>
-          <a:ext cx="2226910" cy="304800"/>
-        </p:xfrm>
-        <a:graphic>
-          <a:graphicData uri="http://schemas.openxmlformats.org/drawingml/2006/table">
-            <a:tbl>
-              <a:tblPr firstRow="1" bandRow="1"/>
-              <a:tblGrid>
-                <a:gridCol w="318130">
-                  <a:extLst>
-                    <a:ext uri="{9D8B030D-6E8A-4147-A177-3AD203B41FA5}">
-                      <a16:colId xmlns:a16="http://schemas.microsoft.com/office/drawing/2014/main" val="884960188"/>
-                    </a:ext>
-                  </a:extLst>
-                </a:gridCol>
-                <a:gridCol w="318130">
-                  <a:extLst>
-                    <a:ext uri="{9D8B030D-6E8A-4147-A177-3AD203B41FA5}">
-                      <a16:colId xmlns:a16="http://schemas.microsoft.com/office/drawing/2014/main" val="277746667"/>
-                    </a:ext>
-                  </a:extLst>
-                </a:gridCol>
-                <a:gridCol w="318130">
-                  <a:extLst>
-                    <a:ext uri="{9D8B030D-6E8A-4147-A177-3AD203B41FA5}">
-                      <a16:colId xmlns:a16="http://schemas.microsoft.com/office/drawing/2014/main" val="354781870"/>
-                    </a:ext>
-                  </a:extLst>
-                </a:gridCol>
-                <a:gridCol w="318130">
-                  <a:extLst>
-                    <a:ext uri="{9D8B030D-6E8A-4147-A177-3AD203B41FA5}">
-                      <a16:colId xmlns:a16="http://schemas.microsoft.com/office/drawing/2014/main" val="1334008315"/>
-                    </a:ext>
-                  </a:extLst>
-                </a:gridCol>
-                <a:gridCol w="318130">
-                  <a:extLst>
-                    <a:ext uri="{9D8B030D-6E8A-4147-A177-3AD203B41FA5}">
-                      <a16:colId xmlns:a16="http://schemas.microsoft.com/office/drawing/2014/main" val="3209860974"/>
-                    </a:ext>
-                  </a:extLst>
-                </a:gridCol>
-                <a:gridCol w="318130">
-                  <a:extLst>
-                    <a:ext uri="{9D8B030D-6E8A-4147-A177-3AD203B41FA5}">
-                      <a16:colId xmlns:a16="http://schemas.microsoft.com/office/drawing/2014/main" val="4238538779"/>
-                    </a:ext>
-                  </a:extLst>
-                </a:gridCol>
-                <a:gridCol w="318130">
-                  <a:extLst>
-                    <a:ext uri="{9D8B030D-6E8A-4147-A177-3AD203B41FA5}">
-                      <a16:colId xmlns:a16="http://schemas.microsoft.com/office/drawing/2014/main" val="4263781807"/>
-                    </a:ext>
-                  </a:extLst>
-                </a:gridCol>
-              </a:tblGrid>
-              <a:tr h="250242">
-                <a:tc>
-                  <a:txBody>
-                    <a:bodyPr/>
-                    <a:lstStyle/>
-                    <a:p>
-                      <a:pPr algn="ctr"/>
-                      <a:r>
-                        <a:rPr lang="ru-RU" dirty="0"/>
-                        <a:t>1</a:t>
-                      </a:r>
-                      <a:endParaRPr lang="en-US" dirty="0"/>
-                    </a:p>
-                  </a:txBody>
-                  <a:tcPr>
-                    <a:solidFill>
-                      <a:schemeClr val="bg1">
-                        <a:lumMod val="85000"/>
-                      </a:schemeClr>
-                    </a:solidFill>
-                  </a:tcPr>
-                </a:tc>
-                <a:tc>
-                  <a:txBody>
-                    <a:bodyPr/>
-                    <a:lstStyle/>
-                    <a:p>
-                      <a:pPr marR="0" algn="ctr" rtl="0">
-                        <a:lnSpc>
-                          <a:spcPct val="100000"/>
-                        </a:lnSpc>
-                        <a:spcBef>
-                          <a:spcPts val="0"/>
-                        </a:spcBef>
-                        <a:spcAft>
-                          <a:spcPts val="0"/>
-                        </a:spcAft>
-                        <a:buClr>
-                          <a:srgbClr val="000000"/>
-                        </a:buClr>
-                        <a:buFont typeface="Arial"/>
-                      </a:pPr>
-                      <a:r>
-                        <a:rPr lang="ru-RU" sz="1400" b="0" i="0" u="none" strike="noStrike" cap="none" dirty="0">
-                          <a:solidFill>
-                            <a:schemeClr val="tx1"/>
-                          </a:solidFill>
-                          <a:latin typeface="+mn-lt"/>
-                          <a:ea typeface="+mn-ea"/>
-                          <a:cs typeface="+mn-cs"/>
-                          <a:sym typeface="Arial"/>
-                        </a:rPr>
-                        <a:t>2</a:t>
-                      </a:r>
-                      <a:endParaRPr lang="en-US" sz="1400" b="0" i="0" u="none" strike="noStrike" cap="none" dirty="0">
-                        <a:solidFill>
-                          <a:schemeClr val="tx1"/>
-                        </a:solidFill>
-                        <a:latin typeface="+mn-lt"/>
-                        <a:ea typeface="+mn-ea"/>
-                        <a:cs typeface="+mn-cs"/>
-                        <a:sym typeface="Arial"/>
-                      </a:endParaRPr>
-                    </a:p>
-                  </a:txBody>
-                  <a:tcPr>
-                    <a:solidFill>
-                      <a:schemeClr val="bg1">
-                        <a:lumMod val="85000"/>
-                      </a:schemeClr>
-                    </a:solidFill>
-                  </a:tcPr>
-                </a:tc>
-                <a:tc>
-                  <a:txBody>
-                    <a:bodyPr/>
-                    <a:lstStyle/>
-                    <a:p>
-                      <a:pPr marR="0" algn="ctr" rtl="0">
-                        <a:lnSpc>
-                          <a:spcPct val="100000"/>
-                        </a:lnSpc>
-                        <a:spcBef>
-                          <a:spcPts val="0"/>
-                        </a:spcBef>
-                        <a:spcAft>
-                          <a:spcPts val="0"/>
-                        </a:spcAft>
-                        <a:buClr>
-                          <a:srgbClr val="000000"/>
-                        </a:buClr>
-                        <a:buFont typeface="Arial"/>
-                      </a:pPr>
-                      <a:r>
-                        <a:rPr lang="ru-RU" sz="1400" b="0" i="0" u="none" strike="noStrike" cap="none" dirty="0">
-                          <a:solidFill>
-                            <a:schemeClr val="tx1"/>
-                          </a:solidFill>
-                          <a:latin typeface="+mn-lt"/>
-                          <a:ea typeface="+mn-ea"/>
-                          <a:cs typeface="+mn-cs"/>
-                          <a:sym typeface="Arial"/>
-                        </a:rPr>
-                        <a:t>3</a:t>
-                      </a:r>
-                      <a:endParaRPr lang="en-US" sz="1400" b="0" i="0" u="none" strike="noStrike" cap="none" dirty="0">
-                        <a:solidFill>
-                          <a:schemeClr val="tx1"/>
-                        </a:solidFill>
-                        <a:latin typeface="+mn-lt"/>
-                        <a:ea typeface="+mn-ea"/>
-                        <a:cs typeface="+mn-cs"/>
-                        <a:sym typeface="Arial"/>
-                      </a:endParaRPr>
-                    </a:p>
-                  </a:txBody>
-                  <a:tcPr>
-                    <a:solidFill>
-                      <a:schemeClr val="bg1">
-                        <a:lumMod val="85000"/>
-                      </a:schemeClr>
-                    </a:solidFill>
-                  </a:tcPr>
-                </a:tc>
-                <a:tc>
-                  <a:txBody>
-                    <a:bodyPr/>
-                    <a:lstStyle/>
-                    <a:p>
-                      <a:pPr algn="ctr"/>
-                      <a:r>
-                        <a:rPr lang="ru-RU" dirty="0"/>
-                        <a:t>4</a:t>
-                      </a:r>
-                      <a:endParaRPr lang="en-US" dirty="0"/>
-                    </a:p>
-                  </a:txBody>
-                  <a:tcPr>
-                    <a:solidFill>
-                      <a:schemeClr val="bg1">
-                        <a:lumMod val="85000"/>
-                      </a:schemeClr>
-                    </a:solidFill>
-                  </a:tcPr>
-                </a:tc>
-                <a:tc>
-                  <a:txBody>
-                    <a:bodyPr/>
-                    <a:lstStyle/>
-                    <a:p>
-                      <a:pPr algn="ctr"/>
-                      <a:r>
-                        <a:rPr lang="ru-RU" dirty="0"/>
-                        <a:t>5</a:t>
-                      </a:r>
-                      <a:endParaRPr lang="en-US" dirty="0"/>
-                    </a:p>
-                  </a:txBody>
-                  <a:tcPr>
-                    <a:solidFill>
-                      <a:schemeClr val="accent1">
-                        <a:lumMod val="60000"/>
-                        <a:lumOff val="40000"/>
-                      </a:schemeClr>
-                    </a:solidFill>
-                  </a:tcPr>
-                </a:tc>
-                <a:tc>
-                  <a:txBody>
-                    <a:bodyPr/>
-                    <a:lstStyle/>
-                    <a:p>
-                      <a:pPr algn="ctr"/>
-                      <a:r>
-                        <a:rPr lang="ru-RU" dirty="0"/>
-                        <a:t>6</a:t>
-                      </a:r>
-                      <a:endParaRPr lang="en-US" dirty="0"/>
-                    </a:p>
-                  </a:txBody>
-                  <a:tcPr>
-                    <a:solidFill>
-                      <a:srgbClr val="FFD966"/>
-                    </a:solidFill>
-                  </a:tcPr>
-                </a:tc>
-                <a:tc>
-                  <a:txBody>
-                    <a:bodyPr/>
-                    <a:lstStyle/>
-                    <a:p>
-                      <a:pPr algn="ctr"/>
-                      <a:r>
-                        <a:rPr lang="ru-RU" dirty="0"/>
-                        <a:t>7</a:t>
-                      </a:r>
-                      <a:endParaRPr lang="en-US" dirty="0"/>
-                    </a:p>
-                  </a:txBody>
-                  <a:tcPr>
-                    <a:solidFill>
-                      <a:srgbClr val="FFD966"/>
-                    </a:solidFill>
-                  </a:tcPr>
-                </a:tc>
-                <a:extLst>
-                  <a:ext uri="{0D108BD9-81ED-4DB2-BD59-A6C34878D82A}">
-                    <a16:rowId xmlns:a16="http://schemas.microsoft.com/office/drawing/2014/main" val="97753204"/>
-                  </a:ext>
-                </a:extLst>
-              </a:tr>
-            </a:tbl>
-          </a:graphicData>
-        </a:graphic>
-      </p:graphicFrame>
-      <p:sp>
-        <p:nvSpPr>
-          <p:cNvPr id="18" name="Google Shape;271;p44">
-            <a:extLst>
-              <a:ext uri="{FF2B5EF4-FFF2-40B4-BE49-F238E27FC236}">
-                <a16:creationId xmlns:a16="http://schemas.microsoft.com/office/drawing/2014/main" id="{D77AA650-7B6A-2E4F-A234-07C44F1AF1CD}"/>
-              </a:ext>
-            </a:extLst>
-          </p:cNvPr>
-          <p:cNvSpPr/>
-          <p:nvPr/>
-        </p:nvSpPr>
-        <p:spPr>
-          <a:xfrm>
-            <a:off x="2226713" y="3915856"/>
-            <a:ext cx="5355965" cy="396000"/>
-          </a:xfrm>
-          <a:prstGeom prst="roundRect">
-            <a:avLst>
-              <a:gd name="adj" fmla="val 16667"/>
-            </a:avLst>
-          </a:prstGeom>
-          <a:solidFill>
-            <a:srgbClr val="FFD966"/>
-          </a:solidFill>
-          <a:ln>
-            <a:noFill/>
-          </a:ln>
-          <a:effectLst>
-            <a:glow>
-              <a:schemeClr val="accent1">
-                <a:satMod val="175000"/>
-                <a:alpha val="40000"/>
-              </a:schemeClr>
-            </a:glow>
-          </a:effectLst>
-        </p:spPr>
-        <p:txBody>
-          <a:bodyPr spcFirstLastPara="1" wrap="square" lIns="162000" tIns="91425" rIns="162000" bIns="91425" anchor="ctr" anchorCtr="0">
-            <a:noAutofit/>
-          </a:bodyPr>
-          <a:lstStyle/>
-          <a:p>
-            <a:r>
-              <a:rPr lang="ru-RU" sz="1200" dirty="0">
-                <a:solidFill>
-                  <a:srgbClr val="1F1F1F"/>
-                </a:solidFill>
-                <a:latin typeface="+mn-lt"/>
-                <a:sym typeface="Roboto"/>
-              </a:rPr>
-              <a:t>Продвинутые методы глубокого обучения для анализа финансов</a:t>
-            </a:r>
-            <a:endParaRPr sz="1200" dirty="0">
-              <a:solidFill>
-                <a:srgbClr val="1F1F1F"/>
-              </a:solidFill>
-              <a:latin typeface="+mn-lt"/>
-              <a:sym typeface="Roboto"/>
-            </a:endParaRPr>
-          </a:p>
-        </p:txBody>
-      </p:sp>
-      <p:cxnSp>
-        <p:nvCxnSpPr>
-          <p:cNvPr id="19" name="Elbow Connector 18">
-            <a:extLst>
-              <a:ext uri="{FF2B5EF4-FFF2-40B4-BE49-F238E27FC236}">
-                <a16:creationId xmlns:a16="http://schemas.microsoft.com/office/drawing/2014/main" id="{4E4FCD50-FA53-BF4C-9AB8-F81862AA8721}"/>
-              </a:ext>
-            </a:extLst>
-          </p:cNvPr>
-          <p:cNvCxnSpPr>
-            <a:cxnSpLocks/>
-            <a:stCxn id="271" idx="2"/>
-            <a:endCxn id="18" idx="1"/>
-          </p:cNvCxnSpPr>
-          <p:nvPr/>
-        </p:nvCxnSpPr>
-        <p:spPr>
-          <a:xfrm rot="16200000" flipH="1">
-            <a:off x="893333" y="2780475"/>
-            <a:ext cx="2430137" cy="236623"/>
-          </a:xfrm>
-          <a:prstGeom prst="bentConnector2">
-            <a:avLst/>
-          </a:prstGeom>
-          <a:ln>
-            <a:solidFill>
-              <a:schemeClr val="tx1"/>
-            </a:solidFill>
-            <a:tailEnd type="triangle"/>
-          </a:ln>
-        </p:spPr>
-        <p:style>
-          <a:lnRef idx="1">
-            <a:schemeClr val="accent1"/>
-          </a:lnRef>
-          <a:fillRef idx="0">
-            <a:schemeClr val="accent1"/>
-          </a:fillRef>
-          <a:effectRef idx="0">
-            <a:schemeClr val="accent1"/>
-          </a:effectRef>
-          <a:fontRef idx="minor">
-            <a:schemeClr val="tx1"/>
-          </a:fontRef>
-        </p:style>
-      </p:cxnSp>
-      <p:pic>
-        <p:nvPicPr>
-          <p:cNvPr id="46" name="Google Shape;530;p82">
-            <a:extLst>
-              <a:ext uri="{FF2B5EF4-FFF2-40B4-BE49-F238E27FC236}">
-                <a16:creationId xmlns:a16="http://schemas.microsoft.com/office/drawing/2014/main" id="{43F299C2-9666-D540-A69A-8BF402009BEF}"/>
-              </a:ext>
-            </a:extLst>
-          </p:cNvPr>
-          <p:cNvPicPr preferRelativeResize="0">
-            <a:picLocks noChangeAspect="1"/>
-          </p:cNvPicPr>
-          <p:nvPr/>
-        </p:nvPicPr>
-        <p:blipFill rotWithShape="1">
-          <a:blip r:embed="rId3">
-            <a:alphaModFix/>
-            <a:duotone>
-              <a:schemeClr val="accent5">
-                <a:shade val="45000"/>
-                <a:satMod val="135000"/>
-              </a:schemeClr>
-              <a:prstClr val="white"/>
-            </a:duotone>
-          </a:blip>
-          <a:srcRect/>
-          <a:stretch/>
-        </p:blipFill>
-        <p:spPr>
-          <a:xfrm>
-            <a:off x="7244284" y="3951208"/>
-            <a:ext cx="324002" cy="324000"/>
-          </a:xfrm>
-          <a:prstGeom prst="rect">
-            <a:avLst/>
-          </a:prstGeom>
-          <a:noFill/>
-          <a:ln>
-            <a:noFill/>
-          </a:ln>
-        </p:spPr>
-      </p:pic>
-      <p:sp>
-        <p:nvSpPr>
-          <p:cNvPr id="47" name="TextBox 46">
-            <a:extLst>
-              <a:ext uri="{FF2B5EF4-FFF2-40B4-BE49-F238E27FC236}">
-                <a16:creationId xmlns:a16="http://schemas.microsoft.com/office/drawing/2014/main" id="{B64000B9-CA8D-D74A-98B4-3BFBB2C52658}"/>
-              </a:ext>
-            </a:extLst>
-          </p:cNvPr>
-          <p:cNvSpPr txBox="1"/>
-          <p:nvPr/>
-        </p:nvSpPr>
-        <p:spPr>
-          <a:xfrm rot="20748746">
-            <a:off x="7603438" y="3895114"/>
-            <a:ext cx="936475" cy="307777"/>
-          </a:xfrm>
-          <a:prstGeom prst="rect">
-            <a:avLst/>
-          </a:prstGeom>
-          <a:noFill/>
-        </p:spPr>
-        <p:txBody>
-          <a:bodyPr wrap="none" rtlCol="0">
-            <a:spAutoFit/>
-          </a:bodyPr>
-          <a:lstStyle/>
-          <a:p>
-            <a:r>
-              <a:rPr lang="en-US" dirty="0" err="1">
-                <a:latin typeface="AkayaTelivigala" pitchFamily="2" charset="77"/>
-                <a:cs typeface="Apple Chancery" panose="03020702040506060504" pitchFamily="66" charset="-79"/>
-              </a:rPr>
-              <a:t>HomeTask</a:t>
-            </a:r>
-            <a:endParaRPr lang="en-US" dirty="0">
-              <a:latin typeface="Bradley Hand" pitchFamily="2" charset="77"/>
-              <a:cs typeface="Apple Chancery" panose="03020702040506060504" pitchFamily="66" charset="-79"/>
-            </a:endParaRPr>
-          </a:p>
-        </p:txBody>
-      </p:sp>
-      <p:pic>
-        <p:nvPicPr>
-          <p:cNvPr id="28" name="Google Shape;225;p40">
-            <a:extLst>
-              <a:ext uri="{FF2B5EF4-FFF2-40B4-BE49-F238E27FC236}">
-                <a16:creationId xmlns:a16="http://schemas.microsoft.com/office/drawing/2014/main" id="{BEE14A57-FDBB-024C-84B5-C5C5EFF33A19}"/>
-              </a:ext>
-            </a:extLst>
-          </p:cNvPr>
-          <p:cNvPicPr preferRelativeResize="0"/>
-          <p:nvPr/>
-        </p:nvPicPr>
-        <p:blipFill>
-          <a:blip r:embed="rId4"/>
-          <a:srcRect t="2849" b="2849"/>
-          <a:stretch/>
-        </p:blipFill>
-        <p:spPr>
-          <a:xfrm>
-            <a:off x="595812" y="1196068"/>
-            <a:ext cx="419930" cy="396001"/>
-          </a:xfrm>
-          <a:prstGeom prst="ellipse">
-            <a:avLst/>
-          </a:prstGeom>
-          <a:noFill/>
-          <a:ln>
-            <a:noFill/>
-          </a:ln>
-        </p:spPr>
-      </p:pic>
-    </p:spTree>
-    <p:extLst>
-      <p:ext uri="{BB962C8B-B14F-4D97-AF65-F5344CB8AC3E}">
-        <p14:creationId xmlns:p14="http://schemas.microsoft.com/office/powerpoint/2010/main" val="24310866"/>
       </p:ext>
     </p:extLst>
   </p:cSld>
@@ -28002,17 +27289,7 @@
                 <a:latin typeface="+mn-lt"/>
                 <a:sym typeface="Roboto"/>
               </a:rPr>
-              <a:t>Сложные модели торгового агента и перенос обучения в </a:t>
-            </a:r>
-            <a:r>
-              <a:rPr lang="en-US" sz="1200" dirty="0">
-                <a:solidFill>
-                  <a:srgbClr val="1F1F1F"/>
-                </a:solidFill>
-                <a:latin typeface="+mn-lt"/>
-                <a:sym typeface="Roboto"/>
-              </a:rPr>
-              <a:t>production</a:t>
+              <a:t>Перенос модели в облачную среду</a:t>
             </a:r>
             <a:endParaRPr sz="1200" dirty="0">
               <a:solidFill>
@@ -28061,24 +27338,14 @@
           <a:lstStyle/>
           <a:p>
             <a:r>
-              <a:rPr lang="en-US" sz="1200" dirty="0">
+              <a:rPr lang="ru-RU" sz="1200" dirty="0">
                 <a:solidFill>
                   <a:srgbClr val="1F1F1F"/>
                 </a:solidFill>
                 <a:latin typeface="+mn-lt"/>
                 <a:sym typeface="Roboto"/>
               </a:rPr>
-              <a:t>LLM </a:t>
-            </a:r>
-            <a:r>
-              <a:rPr lang="ru-RU" sz="1200" dirty="0">
-                <a:solidFill>
-                  <a:srgbClr val="1F1F1F"/>
-                </a:solidFill>
-                <a:latin typeface="+mn-lt"/>
-                <a:sym typeface="Roboto"/>
-              </a:rPr>
-              <a:t>модели</a:t>
+              <a:t>Основные торговые площадки</a:t>
             </a:r>
             <a:endParaRPr sz="1200" dirty="0">
               <a:solidFill>
@@ -28104,7 +27371,7 @@
         </p:nvSpPr>
         <p:spPr>
           <a:xfrm>
-            <a:off x="2226713" y="2397970"/>
+            <a:off x="2226713" y="2346643"/>
             <a:ext cx="5355965" cy="396000"/>
           </a:xfrm>
           <a:prstGeom prst="roundRect">
@@ -28134,24 +27401,14 @@
           <a:lstStyle/>
           <a:p>
             <a:r>
-              <a:rPr lang="en-US" sz="1200" dirty="0">
+              <a:rPr lang="ru-RU" sz="1200" dirty="0">
                 <a:solidFill>
                   <a:srgbClr val="1F1F1F"/>
                 </a:solidFill>
                 <a:latin typeface="+mn-lt"/>
                 <a:sym typeface="Roboto"/>
               </a:rPr>
-              <a:t>RL </a:t>
-            </a:r>
-            <a:r>
-              <a:rPr lang="ru-RU" sz="1200" dirty="0">
-                <a:solidFill>
-                  <a:srgbClr val="1F1F1F"/>
-                </a:solidFill>
-                <a:latin typeface="+mn-lt"/>
-                <a:sym typeface="Roboto"/>
-              </a:rPr>
-              <a:t>модели</a:t>
+              <a:t>Облачная инфраструктура</a:t>
             </a:r>
           </a:p>
         </p:txBody>
@@ -28170,7 +27427,7 @@
         </p:nvSpPr>
         <p:spPr>
           <a:xfrm>
-            <a:off x="2212321" y="2903932"/>
+            <a:off x="2212321" y="2801278"/>
             <a:ext cx="5355965" cy="396000"/>
           </a:xfrm>
           <a:prstGeom prst="roundRect">
@@ -28207,7 +27464,37 @@
                 <a:latin typeface="+mn-lt"/>
                 <a:sym typeface="Roboto"/>
               </a:rPr>
-              <a:t>Сборка финального ансамбля</a:t>
+              <a:t>Построение </a:t>
+            </a:r>
+            <a:r>
+              <a:rPr lang="en-US" sz="1200" dirty="0">
+                <a:solidFill>
+                  <a:srgbClr val="1F1F1F"/>
+                </a:solidFill>
+                <a:latin typeface="+mn-lt"/>
+                <a:sym typeface="Roboto"/>
+              </a:rPr>
+              <a:t>API </a:t>
+            </a:r>
+            <a:r>
+              <a:rPr lang="ru-RU" sz="1200" dirty="0">
+                <a:solidFill>
+                  <a:srgbClr val="1F1F1F"/>
+                </a:solidFill>
+                <a:latin typeface="+mn-lt"/>
+                <a:sym typeface="Roboto"/>
+              </a:rPr>
+              <a:t>для модели. </a:t>
+            </a:r>
+            <a:r>
+              <a:rPr lang="en-US" sz="1200" dirty="0">
+                <a:solidFill>
+                  <a:srgbClr val="1F1F1F"/>
+                </a:solidFill>
+                <a:latin typeface="+mn-lt"/>
+                <a:sym typeface="Roboto"/>
+              </a:rPr>
+              <a:t>FastAPI.</a:t>
             </a:r>
             <a:endParaRPr sz="1200" dirty="0">
               <a:solidFill>
@@ -28233,7 +27520,7 @@
         </p:nvSpPr>
         <p:spPr>
           <a:xfrm>
-            <a:off x="2226713" y="3409894"/>
+            <a:off x="2226713" y="3255913"/>
             <a:ext cx="5355965" cy="396000"/>
           </a:xfrm>
           <a:prstGeom prst="roundRect">
@@ -28263,14 +27550,24 @@
           <a:lstStyle/>
           <a:p>
             <a:r>
-              <a:rPr lang="ru-RU" sz="1200" dirty="0">
+              <a:rPr lang="en-US" sz="1200" dirty="0">
                 <a:solidFill>
                   <a:srgbClr val="1F1F1F"/>
                 </a:solidFill>
                 <a:latin typeface="+mn-lt"/>
                 <a:sym typeface="Roboto"/>
               </a:rPr>
-              <a:t>Перенос модели в облачную среду</a:t>
+              <a:t>Docker. </a:t>
+            </a:r>
+            <a:r>
+              <a:rPr lang="ru-RU" sz="1200" dirty="0">
+                <a:solidFill>
+                  <a:srgbClr val="1F1F1F"/>
+                </a:solidFill>
+                <a:latin typeface="+mn-lt"/>
+                <a:sym typeface="Roboto"/>
+              </a:rPr>
+              <a:t>Упаковка модели в контейнер. Подготовка к развертыванию.</a:t>
             </a:r>
             <a:endParaRPr sz="1200" dirty="0">
               <a:solidFill>
@@ -28346,8 +27643,8 @@
         </p:nvCxnSpPr>
         <p:spPr>
           <a:xfrm rot="16200000" flipH="1">
-            <a:off x="1652276" y="2021532"/>
-            <a:ext cx="912251" cy="236623"/>
+            <a:off x="1677939" y="1995869"/>
+            <a:ext cx="860924" cy="236623"/>
           </a:xfrm>
           <a:prstGeom prst="bentConnector2">
             <a:avLst/>
@@ -28392,8 +27689,8 @@
         </p:nvCxnSpPr>
         <p:spPr>
           <a:xfrm rot="16200000" flipH="1">
-            <a:off x="1392099" y="2281709"/>
-            <a:ext cx="1418213" cy="222231"/>
+            <a:off x="1443426" y="2230382"/>
+            <a:ext cx="1315559" cy="222231"/>
           </a:xfrm>
           <a:prstGeom prst="bentConnector2">
             <a:avLst/>
@@ -28438,8 +27735,436 @@
         </p:nvCxnSpPr>
         <p:spPr>
           <a:xfrm rot="16200000" flipH="1">
-            <a:off x="1146314" y="2527494"/>
-            <a:ext cx="1924175" cy="236623"/>
+            <a:off x="1223304" y="2450504"/>
+            <a:ext cx="1770194" cy="236623"/>
+          </a:xfrm>
+          <a:prstGeom prst="bentConnector2">
+            <a:avLst/>
+          </a:prstGeom>
+          <a:ln>
+            <a:solidFill>
+              <a:schemeClr val="tx1"/>
+            </a:solidFill>
+            <a:tailEnd type="triangle"/>
+          </a:ln>
+        </p:spPr>
+        <p:style>
+          <a:lnRef idx="1">
+            <a:schemeClr val="accent1"/>
+          </a:lnRef>
+          <a:fillRef idx="0">
+            <a:schemeClr val="accent1"/>
+          </a:fillRef>
+          <a:effectRef idx="0">
+            <a:schemeClr val="accent1"/>
+          </a:effectRef>
+          <a:fontRef idx="minor">
+            <a:schemeClr val="tx1"/>
+          </a:fontRef>
+        </p:style>
+      </p:cxnSp>
+      <p:sp>
+        <p:nvSpPr>
+          <p:cNvPr id="18" name="Google Shape;271;p44">
+            <a:extLst>
+              <a:ext uri="{FF2B5EF4-FFF2-40B4-BE49-F238E27FC236}">
+                <a16:creationId xmlns:a16="http://schemas.microsoft.com/office/drawing/2014/main" id="{D77AA650-7B6A-2E4F-A234-07C44F1AF1CD}"/>
+              </a:ext>
+            </a:extLst>
+          </p:cNvPr>
+          <p:cNvSpPr/>
+          <p:nvPr/>
+        </p:nvSpPr>
+        <p:spPr>
+          <a:xfrm>
+            <a:off x="2226713" y="3710548"/>
+            <a:ext cx="5355965" cy="396000"/>
+          </a:xfrm>
+          <a:prstGeom prst="roundRect">
+            <a:avLst>
+              <a:gd name="adj" fmla="val 16667"/>
+            </a:avLst>
+          </a:prstGeom>
+          <a:solidFill>
+            <a:srgbClr val="FFD966"/>
+          </a:solidFill>
+          <a:ln>
+            <a:noFill/>
+          </a:ln>
+          <a:effectLst>
+            <a:glow>
+              <a:schemeClr val="accent1">
+                <a:satMod val="175000"/>
+                <a:alpha val="40000"/>
+              </a:schemeClr>
+            </a:glow>
+          </a:effectLst>
+        </p:spPr>
+        <p:txBody>
+          <a:bodyPr spcFirstLastPara="1" wrap="square" lIns="162000" tIns="91425" rIns="162000" bIns="91425" anchor="ctr" anchorCtr="0">
+            <a:noAutofit/>
+          </a:bodyPr>
+          <a:lstStyle/>
+          <a:p>
+            <a:r>
+              <a:rPr lang="ru-RU" sz="1200" dirty="0">
+                <a:solidFill>
+                  <a:srgbClr val="1F1F1F"/>
+                </a:solidFill>
+                <a:latin typeface="+mn-lt"/>
+                <a:sym typeface="Roboto"/>
+              </a:rPr>
+              <a:t>Мониторинг состояния модели. </a:t>
+            </a:r>
+            <a:r>
+              <a:rPr lang="en-US" sz="1200" dirty="0">
+                <a:solidFill>
+                  <a:srgbClr val="1F1F1F"/>
+                </a:solidFill>
+                <a:latin typeface="+mn-lt"/>
+                <a:sym typeface="Roboto"/>
+              </a:rPr>
+              <a:t>Prometheus + Grafana</a:t>
+            </a:r>
+            <a:endParaRPr sz="1200" dirty="0">
+              <a:solidFill>
+                <a:srgbClr val="1F1F1F"/>
+              </a:solidFill>
+              <a:latin typeface="+mn-lt"/>
+              <a:sym typeface="Roboto"/>
+            </a:endParaRPr>
+          </a:p>
+        </p:txBody>
+      </p:sp>
+      <p:cxnSp>
+        <p:nvCxnSpPr>
+          <p:cNvPr id="19" name="Elbow Connector 18">
+            <a:extLst>
+              <a:ext uri="{FF2B5EF4-FFF2-40B4-BE49-F238E27FC236}">
+                <a16:creationId xmlns:a16="http://schemas.microsoft.com/office/drawing/2014/main" id="{4E4FCD50-FA53-BF4C-9AB8-F81862AA8721}"/>
+              </a:ext>
+            </a:extLst>
+          </p:cNvPr>
+          <p:cNvCxnSpPr>
+            <a:cxnSpLocks/>
+            <a:stCxn id="271" idx="2"/>
+            <a:endCxn id="18" idx="1"/>
+          </p:cNvCxnSpPr>
+          <p:nvPr/>
+        </p:nvCxnSpPr>
+        <p:spPr>
+          <a:xfrm rot="16200000" flipH="1">
+            <a:off x="995987" y="2677821"/>
+            <a:ext cx="2224829" cy="236623"/>
+          </a:xfrm>
+          <a:prstGeom prst="bentConnector2">
+            <a:avLst/>
+          </a:prstGeom>
+          <a:ln>
+            <a:solidFill>
+              <a:schemeClr val="tx1"/>
+            </a:solidFill>
+            <a:tailEnd type="triangle"/>
+          </a:ln>
+        </p:spPr>
+        <p:style>
+          <a:lnRef idx="1">
+            <a:schemeClr val="accent1"/>
+          </a:lnRef>
+          <a:fillRef idx="0">
+            <a:schemeClr val="accent1"/>
+          </a:fillRef>
+          <a:effectRef idx="0">
+            <a:schemeClr val="accent1"/>
+          </a:effectRef>
+          <a:fontRef idx="minor">
+            <a:schemeClr val="tx1"/>
+          </a:fontRef>
+        </p:style>
+      </p:cxnSp>
+      <p:pic>
+        <p:nvPicPr>
+          <p:cNvPr id="28" name="Google Shape;225;p40">
+            <a:extLst>
+              <a:ext uri="{FF2B5EF4-FFF2-40B4-BE49-F238E27FC236}">
+                <a16:creationId xmlns:a16="http://schemas.microsoft.com/office/drawing/2014/main" id="{BEE14A57-FDBB-024C-84B5-C5C5EFF33A19}"/>
+              </a:ext>
+            </a:extLst>
+          </p:cNvPr>
+          <p:cNvPicPr preferRelativeResize="0"/>
+          <p:nvPr/>
+        </p:nvPicPr>
+        <p:blipFill>
+          <a:blip r:embed="rId3"/>
+          <a:srcRect t="2849" b="2849"/>
+          <a:stretch/>
+        </p:blipFill>
+        <p:spPr>
+          <a:xfrm>
+            <a:off x="595812" y="1196068"/>
+            <a:ext cx="419930" cy="396001"/>
+          </a:xfrm>
+          <a:prstGeom prst="ellipse">
+            <a:avLst/>
+          </a:prstGeom>
+          <a:noFill/>
+          <a:ln>
+            <a:noFill/>
+          </a:ln>
+        </p:spPr>
+      </p:pic>
+      <p:sp>
+        <p:nvSpPr>
+          <p:cNvPr id="21" name="Google Shape;271;p44">
+            <a:extLst>
+              <a:ext uri="{FF2B5EF4-FFF2-40B4-BE49-F238E27FC236}">
+                <a16:creationId xmlns:a16="http://schemas.microsoft.com/office/drawing/2014/main" id="{3E6E6AD8-58FC-6B48-9349-434CBD7A30D1}"/>
+              </a:ext>
+            </a:extLst>
+          </p:cNvPr>
+          <p:cNvSpPr/>
+          <p:nvPr/>
+        </p:nvSpPr>
+        <p:spPr>
+          <a:xfrm>
+            <a:off x="2226713" y="4165183"/>
+            <a:ext cx="5355965" cy="396000"/>
+          </a:xfrm>
+          <a:prstGeom prst="roundRect">
+            <a:avLst>
+              <a:gd name="adj" fmla="val 16667"/>
+            </a:avLst>
+          </a:prstGeom>
+          <a:solidFill>
+            <a:srgbClr val="FFD966"/>
+          </a:solidFill>
+          <a:ln>
+            <a:noFill/>
+          </a:ln>
+          <a:effectLst>
+            <a:glow>
+              <a:schemeClr val="accent1">
+                <a:satMod val="175000"/>
+                <a:alpha val="40000"/>
+              </a:schemeClr>
+            </a:glow>
+          </a:effectLst>
+        </p:spPr>
+        <p:txBody>
+          <a:bodyPr spcFirstLastPara="1" wrap="square" lIns="162000" tIns="91425" rIns="162000" bIns="91425" anchor="ctr" anchorCtr="0">
+            <a:noAutofit/>
+          </a:bodyPr>
+          <a:lstStyle/>
+          <a:p>
+            <a:r>
+              <a:rPr lang="ru-RU" sz="1200" dirty="0">
+                <a:solidFill>
+                  <a:srgbClr val="1F1F1F"/>
+                </a:solidFill>
+                <a:latin typeface="+mn-lt"/>
+                <a:sym typeface="Roboto"/>
+              </a:rPr>
+              <a:t>Развертывание. </a:t>
+            </a:r>
+            <a:r>
+              <a:rPr lang="en-US" sz="1200" dirty="0">
+                <a:solidFill>
+                  <a:srgbClr val="1F1F1F"/>
+                </a:solidFill>
+                <a:latin typeface="+mn-lt"/>
+                <a:sym typeface="Roboto"/>
+              </a:rPr>
+              <a:t>Docker compose.</a:t>
+            </a:r>
+            <a:endParaRPr sz="1200" dirty="0">
+              <a:solidFill>
+                <a:srgbClr val="1F1F1F"/>
+              </a:solidFill>
+              <a:latin typeface="+mn-lt"/>
+              <a:sym typeface="Roboto"/>
+            </a:endParaRPr>
+          </a:p>
+        </p:txBody>
+      </p:sp>
+      <p:sp>
+        <p:nvSpPr>
+          <p:cNvPr id="22" name="Google Shape;271;p44">
+            <a:extLst>
+              <a:ext uri="{FF2B5EF4-FFF2-40B4-BE49-F238E27FC236}">
+                <a16:creationId xmlns:a16="http://schemas.microsoft.com/office/drawing/2014/main" id="{68A5FCC2-2FDC-E74F-A06C-2B6A9BC99DE2}"/>
+              </a:ext>
+            </a:extLst>
+          </p:cNvPr>
+          <p:cNvSpPr/>
+          <p:nvPr/>
+        </p:nvSpPr>
+        <p:spPr>
+          <a:xfrm>
+            <a:off x="2226713" y="4619817"/>
+            <a:ext cx="5355965" cy="396000"/>
+          </a:xfrm>
+          <a:prstGeom prst="roundRect">
+            <a:avLst>
+              <a:gd name="adj" fmla="val 16667"/>
+            </a:avLst>
+          </a:prstGeom>
+          <a:solidFill>
+            <a:srgbClr val="FFD966"/>
+          </a:solidFill>
+          <a:ln>
+            <a:noFill/>
+          </a:ln>
+          <a:effectLst>
+            <a:glow>
+              <a:schemeClr val="accent1">
+                <a:satMod val="175000"/>
+                <a:alpha val="40000"/>
+              </a:schemeClr>
+            </a:glow>
+          </a:effectLst>
+        </p:spPr>
+        <p:txBody>
+          <a:bodyPr spcFirstLastPara="1" wrap="square" lIns="162000" tIns="91425" rIns="162000" bIns="91425" anchor="ctr" anchorCtr="0">
+            <a:noAutofit/>
+          </a:bodyPr>
+          <a:lstStyle/>
+          <a:p>
+            <a:r>
+              <a:rPr lang="ru-RU" sz="1200" dirty="0">
+                <a:solidFill>
+                  <a:srgbClr val="1F1F1F"/>
+                </a:solidFill>
+                <a:latin typeface="+mn-lt"/>
+                <a:sym typeface="Roboto"/>
+              </a:rPr>
+              <a:t>Автоматизация. </a:t>
+            </a:r>
+            <a:r>
+              <a:rPr lang="en-US" sz="1200" dirty="0" err="1">
+                <a:solidFill>
+                  <a:srgbClr val="1F1F1F"/>
+                </a:solidFill>
+                <a:latin typeface="+mn-lt"/>
+                <a:sym typeface="Roboto"/>
+              </a:rPr>
+              <a:t>MLFlow</a:t>
+            </a:r>
+            <a:r>
+              <a:rPr lang="en-US" sz="1200" dirty="0">
+                <a:solidFill>
+                  <a:srgbClr val="1F1F1F"/>
+                </a:solidFill>
+                <a:latin typeface="+mn-lt"/>
+                <a:sym typeface="Roboto"/>
+              </a:rPr>
+              <a:t>, </a:t>
+            </a:r>
+            <a:r>
+              <a:rPr lang="en-US" sz="1200" dirty="0" err="1">
+                <a:solidFill>
+                  <a:srgbClr val="1F1F1F"/>
+                </a:solidFill>
+                <a:latin typeface="+mn-lt"/>
+                <a:sym typeface="Roboto"/>
+              </a:rPr>
+              <a:t>AirFlow</a:t>
+            </a:r>
+            <a:r>
+              <a:rPr lang="en-US" sz="1200" dirty="0">
+                <a:solidFill>
+                  <a:srgbClr val="1F1F1F"/>
+                </a:solidFill>
+                <a:latin typeface="+mn-lt"/>
+                <a:sym typeface="Roboto"/>
+              </a:rPr>
+              <a:t> </a:t>
+            </a:r>
+            <a:r>
+              <a:rPr lang="ru-RU" sz="1200" dirty="0">
+                <a:solidFill>
+                  <a:srgbClr val="1F1F1F"/>
+                </a:solidFill>
+                <a:latin typeface="+mn-lt"/>
+                <a:sym typeface="Roboto"/>
+              </a:rPr>
+              <a:t>и контроль метрик обучения.</a:t>
+            </a:r>
+            <a:endParaRPr sz="1200" dirty="0">
+              <a:solidFill>
+                <a:srgbClr val="1F1F1F"/>
+              </a:solidFill>
+              <a:latin typeface="+mn-lt"/>
+              <a:sym typeface="Roboto"/>
+            </a:endParaRPr>
+          </a:p>
+        </p:txBody>
+      </p:sp>
+      <p:cxnSp>
+        <p:nvCxnSpPr>
+          <p:cNvPr id="24" name="Elbow Connector 23">
+            <a:extLst>
+              <a:ext uri="{FF2B5EF4-FFF2-40B4-BE49-F238E27FC236}">
+                <a16:creationId xmlns:a16="http://schemas.microsoft.com/office/drawing/2014/main" id="{211BBC0F-59C7-354D-8F68-3218E902DE2E}"/>
+              </a:ext>
+            </a:extLst>
+          </p:cNvPr>
+          <p:cNvCxnSpPr>
+            <a:cxnSpLocks/>
+            <a:stCxn id="271" idx="2"/>
+            <a:endCxn id="21" idx="1"/>
+          </p:cNvCxnSpPr>
+          <p:nvPr/>
+        </p:nvCxnSpPr>
+        <p:spPr>
+          <a:xfrm rot="16200000" flipH="1">
+            <a:off x="768669" y="2905139"/>
+            <a:ext cx="2679464" cy="236623"/>
+          </a:xfrm>
+          <a:prstGeom prst="bentConnector2">
+            <a:avLst/>
+          </a:prstGeom>
+          <a:ln>
+            <a:solidFill>
+              <a:schemeClr val="tx1"/>
+            </a:solidFill>
+            <a:tailEnd type="triangle"/>
+          </a:ln>
+        </p:spPr>
+        <p:style>
+          <a:lnRef idx="1">
+            <a:schemeClr val="accent1"/>
+          </a:lnRef>
+          <a:fillRef idx="0">
+            <a:schemeClr val="accent1"/>
+          </a:fillRef>
+          <a:effectRef idx="0">
+            <a:schemeClr val="accent1"/>
+          </a:effectRef>
+          <a:fontRef idx="minor">
+            <a:schemeClr val="tx1"/>
+          </a:fontRef>
+        </p:style>
+      </p:cxnSp>
+      <p:cxnSp>
+        <p:nvCxnSpPr>
+          <p:cNvPr id="25" name="Elbow Connector 24">
+            <a:extLst>
+              <a:ext uri="{FF2B5EF4-FFF2-40B4-BE49-F238E27FC236}">
+                <a16:creationId xmlns:a16="http://schemas.microsoft.com/office/drawing/2014/main" id="{BDCCE74C-34F8-8349-9D23-816B5D9111C1}"/>
+              </a:ext>
+            </a:extLst>
+          </p:cNvPr>
+          <p:cNvCxnSpPr>
+            <a:cxnSpLocks/>
+            <a:stCxn id="271" idx="2"/>
+            <a:endCxn id="22" idx="1"/>
+          </p:cNvCxnSpPr>
+          <p:nvPr/>
+        </p:nvCxnSpPr>
+        <p:spPr>
+          <a:xfrm rot="16200000" flipH="1">
+            <a:off x="541352" y="3132456"/>
+            <a:ext cx="3134098" cy="236623"/>
           </a:xfrm>
           <a:prstGeom prst="bentConnector2">
             <a:avLst/>
@@ -28468,10 +28193,10 @@
       </p:cxnSp>
       <p:graphicFrame>
         <p:nvGraphicFramePr>
-          <p:cNvPr id="23" name="Table 23">
+          <p:cNvPr id="26" name="Table 25">
             <a:extLst>
               <a:ext uri="{FF2B5EF4-FFF2-40B4-BE49-F238E27FC236}">
-                <a16:creationId xmlns:a16="http://schemas.microsoft.com/office/drawing/2014/main" id="{7207DC4F-0418-0E43-AEA2-26001954E05D}"/>
+                <a16:creationId xmlns:a16="http://schemas.microsoft.com/office/drawing/2014/main" id="{12B7DD74-C1C4-B84E-A639-B50F77EB663A}"/>
               </a:ext>
             </a:extLst>
           </p:cNvPr>
@@ -28481,14 +28206,14 @@
           <p:nvPr>
             <p:extLst>
               <p:ext uri="{D42A27DB-BD31-4B8C-83A1-F6EECF244321}">
-                <p14:modId xmlns:p14="http://schemas.microsoft.com/office/powerpoint/2010/main" val="3146393783"/>
+                <p14:modId xmlns:p14="http://schemas.microsoft.com/office/powerpoint/2010/main" val="4001071165"/>
               </p:ext>
             </p:extLst>
           </p:nvPr>
         </p:nvGraphicFramePr>
         <p:xfrm>
-          <a:off x="5355768" y="573874"/>
-          <a:ext cx="2226910" cy="304800"/>
+          <a:off x="5673898" y="573874"/>
+          <a:ext cx="1908780" cy="304800"/>
         </p:xfrm>
         <a:graphic>
           <a:graphicData uri="http://schemas.openxmlformats.org/drawingml/2006/table">
@@ -28537,13 +28262,6 @@
                     </a:ext>
                   </a:extLst>
                 </a:gridCol>
-                <a:gridCol w="318130">
-                  <a:extLst>
-                    <a:ext uri="{9D8B030D-6E8A-4147-A177-3AD203B41FA5}">
-                      <a16:colId xmlns:a16="http://schemas.microsoft.com/office/drawing/2014/main" val="4263781807"/>
-                    </a:ext>
-                  </a:extLst>
-                </a:gridCol>
               </a:tblGrid>
               <a:tr h="250242">
                 <a:tc>
@@ -28562,7 +28280,7 @@
                   <a:tcPr>
                     <a:solidFill>
                       <a:schemeClr val="bg1">
-                        <a:lumMod val="85000"/>
+                        <a:lumMod val="95000"/>
                       </a:schemeClr>
                     </a:solidFill>
                   </a:tcPr>
@@ -28613,7 +28331,7 @@
                   <a:tcPr>
                     <a:solidFill>
                       <a:schemeClr val="bg1">
-                        <a:lumMod val="85000"/>
+                        <a:lumMod val="95000"/>
                       </a:schemeClr>
                     </a:solidFill>
                   </a:tcPr>
@@ -28664,7 +28382,7 @@
                   <a:tcPr>
                     <a:solidFill>
                       <a:schemeClr val="bg1">
-                        <a:lumMod val="85000"/>
+                        <a:lumMod val="95000"/>
                       </a:schemeClr>
                     </a:solidFill>
                   </a:tcPr>
@@ -28685,7 +28403,7 @@
                   <a:tcPr>
                     <a:solidFill>
                       <a:schemeClr val="bg1">
-                        <a:lumMod val="85000"/>
+                        <a:lumMod val="95000"/>
                       </a:schemeClr>
                     </a:solidFill>
                   </a:tcPr>
@@ -28705,8 +28423,9 @@
                   </a:txBody>
                   <a:tcPr>
                     <a:solidFill>
-                      <a:schemeClr val="bg1">
-                        <a:lumMod val="85000"/>
+                      <a:schemeClr val="accent1">
+                        <a:lumMod val="40000"/>
+                        <a:lumOff val="60000"/>
                       </a:schemeClr>
                     </a:solidFill>
                   </a:tcPr>
@@ -28720,28 +28439,6 @@
                       <a:r>
                         <a:rPr lang="ru-RU" dirty="0"/>
                         <a:t>6</a:t>
-                      </a:r>
-                      <a:endParaRPr lang="en-US" dirty="0"/>
-                    </a:p>
-                  </a:txBody>
-                  <a:tcPr>
-                    <a:solidFill>
-                      <a:schemeClr val="accent1">
-                        <a:lumMod val="60000"/>
-                        <a:lumOff val="40000"/>
-                      </a:schemeClr>
-                    </a:solidFill>
-                  </a:tcPr>
-                </a:tc>
-                <a:tc>
-                  <a:txBody>
-                    <a:bodyPr/>
-                    <a:lstStyle/>
-                    <a:p>
-                      <a:pPr algn="ctr"/>
-                      <a:r>
-                        <a:rPr lang="ru-RU" dirty="0"/>
-                        <a:t>7</a:t>
                       </a:r>
                       <a:endParaRPr lang="en-US" dirty="0"/>
                     </a:p>
@@ -28762,234 +28459,10 @@
           </a:graphicData>
         </a:graphic>
       </p:graphicFrame>
-      <p:sp>
-        <p:nvSpPr>
-          <p:cNvPr id="18" name="Google Shape;271;p44">
-            <a:extLst>
-              <a:ext uri="{FF2B5EF4-FFF2-40B4-BE49-F238E27FC236}">
-                <a16:creationId xmlns:a16="http://schemas.microsoft.com/office/drawing/2014/main" id="{D77AA650-7B6A-2E4F-A234-07C44F1AF1CD}"/>
-              </a:ext>
-            </a:extLst>
-          </p:cNvPr>
-          <p:cNvSpPr/>
-          <p:nvPr/>
-        </p:nvSpPr>
-        <p:spPr>
-          <a:xfrm>
-            <a:off x="2226713" y="3915856"/>
-            <a:ext cx="5355965" cy="396000"/>
-          </a:xfrm>
-          <a:prstGeom prst="roundRect">
-            <a:avLst>
-              <a:gd name="adj" fmla="val 16667"/>
-            </a:avLst>
-          </a:prstGeom>
-          <a:solidFill>
-            <a:srgbClr val="FFD966"/>
-          </a:solidFill>
-          <a:ln>
-            <a:noFill/>
-          </a:ln>
-          <a:effectLst>
-            <a:glow>
-              <a:schemeClr val="accent1">
-                <a:satMod val="175000"/>
-                <a:alpha val="40000"/>
-              </a:schemeClr>
-            </a:glow>
-          </a:effectLst>
-        </p:spPr>
-        <p:txBody>
-          <a:bodyPr spcFirstLastPara="1" wrap="square" lIns="162000" tIns="91425" rIns="162000" bIns="91425" anchor="ctr" anchorCtr="0">
-            <a:noAutofit/>
-          </a:bodyPr>
-          <a:lstStyle/>
-          <a:p>
-            <a:r>
-              <a:rPr lang="ru-RU" sz="1200" dirty="0">
-                <a:solidFill>
-                  <a:srgbClr val="1F1F1F"/>
-                </a:solidFill>
-                <a:latin typeface="+mn-lt"/>
-                <a:sym typeface="Roboto"/>
-              </a:rPr>
-              <a:t>Метрики модели и регулярное переобучение</a:t>
-            </a:r>
-            <a:endParaRPr sz="1200" dirty="0">
-              <a:solidFill>
-                <a:srgbClr val="1F1F1F"/>
-              </a:solidFill>
-              <a:latin typeface="+mn-lt"/>
-              <a:sym typeface="Roboto"/>
-            </a:endParaRPr>
-          </a:p>
-        </p:txBody>
-      </p:sp>
-      <p:cxnSp>
-        <p:nvCxnSpPr>
-          <p:cNvPr id="19" name="Elbow Connector 18">
-            <a:extLst>
-              <a:ext uri="{FF2B5EF4-FFF2-40B4-BE49-F238E27FC236}">
-                <a16:creationId xmlns:a16="http://schemas.microsoft.com/office/drawing/2014/main" id="{4E4FCD50-FA53-BF4C-9AB8-F81862AA8721}"/>
-              </a:ext>
-            </a:extLst>
-          </p:cNvPr>
-          <p:cNvCxnSpPr>
-            <a:cxnSpLocks/>
-            <a:stCxn id="271" idx="2"/>
-            <a:endCxn id="18" idx="1"/>
-          </p:cNvCxnSpPr>
-          <p:nvPr/>
-        </p:nvCxnSpPr>
-        <p:spPr>
-          <a:xfrm rot="16200000" flipH="1">
-            <a:off x="893333" y="2780475"/>
-            <a:ext cx="2430137" cy="236623"/>
-          </a:xfrm>
-          <a:prstGeom prst="bentConnector2">
-            <a:avLst/>
-          </a:prstGeom>
-          <a:ln>
-            <a:solidFill>
-              <a:schemeClr val="tx1"/>
-            </a:solidFill>
-            <a:tailEnd type="triangle"/>
-          </a:ln>
-        </p:spPr>
-        <p:style>
-          <a:lnRef idx="1">
-            <a:schemeClr val="accent1"/>
-          </a:lnRef>
-          <a:fillRef idx="0">
-            <a:schemeClr val="accent1"/>
-          </a:fillRef>
-          <a:effectRef idx="0">
-            <a:schemeClr val="accent1"/>
-          </a:effectRef>
-          <a:fontRef idx="minor">
-            <a:schemeClr val="tx1"/>
-          </a:fontRef>
-        </p:style>
-      </p:cxnSp>
-      <p:pic>
-        <p:nvPicPr>
-          <p:cNvPr id="46" name="Google Shape;530;p82">
-            <a:extLst>
-              <a:ext uri="{FF2B5EF4-FFF2-40B4-BE49-F238E27FC236}">
-                <a16:creationId xmlns:a16="http://schemas.microsoft.com/office/drawing/2014/main" id="{43F299C2-9666-D540-A69A-8BF402009BEF}"/>
-              </a:ext>
-            </a:extLst>
-          </p:cNvPr>
-          <p:cNvPicPr preferRelativeResize="0">
-            <a:picLocks noChangeAspect="1"/>
-          </p:cNvPicPr>
-          <p:nvPr/>
-        </p:nvPicPr>
-        <p:blipFill rotWithShape="1">
-          <a:blip r:embed="rId3">
-            <a:alphaModFix/>
-            <a:duotone>
-              <a:schemeClr val="accent5">
-                <a:shade val="45000"/>
-                <a:satMod val="135000"/>
-              </a:schemeClr>
-              <a:prstClr val="white"/>
-            </a:duotone>
-          </a:blip>
-          <a:srcRect/>
-          <a:stretch/>
-        </p:blipFill>
-        <p:spPr>
-          <a:xfrm>
-            <a:off x="7244284" y="3951208"/>
-            <a:ext cx="324002" cy="324000"/>
-          </a:xfrm>
-          <a:prstGeom prst="rect">
-            <a:avLst/>
-          </a:prstGeom>
-          <a:noFill/>
-          <a:ln>
-            <a:noFill/>
-          </a:ln>
-        </p:spPr>
-      </p:pic>
-      <p:sp>
-        <p:nvSpPr>
-          <p:cNvPr id="47" name="TextBox 46">
-            <a:extLst>
-              <a:ext uri="{FF2B5EF4-FFF2-40B4-BE49-F238E27FC236}">
-                <a16:creationId xmlns:a16="http://schemas.microsoft.com/office/drawing/2014/main" id="{B64000B9-CA8D-D74A-98B4-3BFBB2C52658}"/>
-              </a:ext>
-            </a:extLst>
-          </p:cNvPr>
-          <p:cNvSpPr txBox="1"/>
-          <p:nvPr/>
-        </p:nvSpPr>
-        <p:spPr>
-          <a:xfrm rot="20748746">
-            <a:off x="7603438" y="3895114"/>
-            <a:ext cx="936475" cy="307777"/>
-          </a:xfrm>
-          <a:prstGeom prst="rect">
-            <a:avLst/>
-          </a:prstGeom>
-          <a:noFill/>
-        </p:spPr>
-        <p:txBody>
-          <a:bodyPr wrap="none" rtlCol="0">
-            <a:spAutoFit/>
-          </a:bodyPr>
-          <a:lstStyle/>
-          <a:p>
-            <a:r>
-              <a:rPr lang="en-US" dirty="0" err="1">
-                <a:latin typeface="AkayaTelivigala" pitchFamily="2" charset="77"/>
-                <a:cs typeface="Apple Chancery" panose="03020702040506060504" pitchFamily="66" charset="-79"/>
-              </a:rPr>
-              <a:t>HomeTask</a:t>
-            </a:r>
-            <a:endParaRPr lang="en-US" dirty="0">
-              <a:latin typeface="Bradley Hand" pitchFamily="2" charset="77"/>
-              <a:cs typeface="Apple Chancery" panose="03020702040506060504" pitchFamily="66" charset="-79"/>
-            </a:endParaRPr>
-          </a:p>
-        </p:txBody>
-      </p:sp>
-      <p:pic>
-        <p:nvPicPr>
-          <p:cNvPr id="29" name="Google Shape;225;p40">
-            <a:extLst>
-              <a:ext uri="{FF2B5EF4-FFF2-40B4-BE49-F238E27FC236}">
-                <a16:creationId xmlns:a16="http://schemas.microsoft.com/office/drawing/2014/main" id="{3535B8B9-56A4-1949-8A22-30C06BC53B7D}"/>
-              </a:ext>
-            </a:extLst>
-          </p:cNvPr>
-          <p:cNvPicPr preferRelativeResize="0"/>
-          <p:nvPr/>
-        </p:nvPicPr>
-        <p:blipFill>
-          <a:blip r:embed="rId4"/>
-          <a:srcRect t="2849" b="2849"/>
-          <a:stretch/>
-        </p:blipFill>
-        <p:spPr>
-          <a:xfrm>
-            <a:off x="597212" y="1196068"/>
-            <a:ext cx="419930" cy="396001"/>
-          </a:xfrm>
-          <a:prstGeom prst="ellipse">
-            <a:avLst/>
-          </a:prstGeom>
-          <a:noFill/>
-          <a:ln>
-            <a:noFill/>
-          </a:ln>
-        </p:spPr>
-      </p:pic>
     </p:spTree>
     <p:extLst>
       <p:ext uri="{BB962C8B-B14F-4D97-AF65-F5344CB8AC3E}">
-        <p14:creationId xmlns:p14="http://schemas.microsoft.com/office/powerpoint/2010/main" val="2918862166"/>
+        <p14:creationId xmlns:p14="http://schemas.microsoft.com/office/powerpoint/2010/main" val="24310866"/>
       </p:ext>
     </p:extLst>
   </p:cSld>
@@ -29153,7 +28626,7 @@
                 <a:latin typeface="+mn-lt"/>
                 <a:sym typeface="Roboto"/>
               </a:rPr>
-              <a:t>Планирование и разработка проекта по анализу финансового рынка</a:t>
+              <a:t>Постановка задачи. Особенности выполнения.</a:t>
             </a:r>
             <a:endParaRPr sz="1200" dirty="0">
               <a:solidFill>
@@ -29179,7 +28652,7 @@
         </p:nvSpPr>
         <p:spPr>
           <a:xfrm>
-            <a:off x="2226713" y="2397970"/>
+            <a:off x="2226713" y="2452951"/>
             <a:ext cx="5355965" cy="396000"/>
           </a:xfrm>
           <a:prstGeom prst="roundRect">
@@ -29216,91 +28689,8 @@
                 <a:latin typeface="+mn-lt"/>
                 <a:sym typeface="Roboto"/>
               </a:rPr>
-              <a:t>Работа с реальными данными и создание </a:t>
+              <a:t>Консультация</a:t>
             </a:r>
-            <a:r>
-              <a:rPr lang="en-US" sz="1200" dirty="0">
-                <a:solidFill>
-                  <a:srgbClr val="1F1F1F"/>
-                </a:solidFill>
-                <a:latin typeface="+mn-lt"/>
-                <a:sym typeface="Roboto"/>
-              </a:rPr>
-              <a:t>ML-</a:t>
-            </a:r>
-            <a:r>
-              <a:rPr lang="ru-RU" sz="1200" dirty="0">
-                <a:solidFill>
-                  <a:srgbClr val="1F1F1F"/>
-                </a:solidFill>
-                <a:latin typeface="+mn-lt"/>
-                <a:sym typeface="Roboto"/>
-              </a:rPr>
-              <a:t>моделей для проекта</a:t>
-            </a:r>
-          </a:p>
-        </p:txBody>
-      </p:sp>
-      <p:sp>
-        <p:nvSpPr>
-          <p:cNvPr id="16" name="Google Shape;271;p44">
-            <a:extLst>
-              <a:ext uri="{FF2B5EF4-FFF2-40B4-BE49-F238E27FC236}">
-                <a16:creationId xmlns:a16="http://schemas.microsoft.com/office/drawing/2014/main" id="{7A56B114-1520-2F4F-BC28-2EADE862D379}"/>
-              </a:ext>
-            </a:extLst>
-          </p:cNvPr>
-          <p:cNvSpPr/>
-          <p:nvPr/>
-        </p:nvSpPr>
-        <p:spPr>
-          <a:xfrm>
-            <a:off x="2212321" y="2903932"/>
-            <a:ext cx="5355965" cy="396000"/>
-          </a:xfrm>
-          <a:prstGeom prst="roundRect">
-            <a:avLst>
-              <a:gd name="adj" fmla="val 16667"/>
-            </a:avLst>
-          </a:prstGeom>
-          <a:solidFill>
-            <a:srgbClr val="FFD966"/>
-          </a:solidFill>
-          <a:ln>
-            <a:noFill/>
-          </a:ln>
-          <a:effectLst>
-            <a:glow>
-              <a:schemeClr val="accent1">
-                <a:satMod val="175000"/>
-                <a:alpha val="40000"/>
-              </a:schemeClr>
-            </a:glow>
-          </a:effectLst>
-        </p:spPr>
-        <p:txBody>
-          <a:bodyPr spcFirstLastPara="1" wrap="square" lIns="162000" tIns="91425" rIns="162000" bIns="91425" anchor="ctr" anchorCtr="0">
-            <a:noAutofit/>
-          </a:bodyPr>
-          <a:lstStyle/>
-          <a:p>
-            <a:r>
-              <a:rPr lang="ru-RU" sz="1200" dirty="0">
-                <a:solidFill>
-                  <a:srgbClr val="1F1F1F"/>
-                </a:solidFill>
-                <a:latin typeface="+mn-lt"/>
-                <a:sym typeface="Roboto"/>
-              </a:rPr>
-              <a:t>Оценка результатов и практическое внедрение</a:t>
-            </a:r>
-            <a:endParaRPr sz="1200" dirty="0">
-              <a:solidFill>
-                <a:srgbClr val="1F1F1F"/>
-              </a:solidFill>
-              <a:latin typeface="+mn-lt"/>
-              <a:sym typeface="Roboto"/>
-            </a:endParaRPr>
           </a:p>
         </p:txBody>
       </p:sp>
@@ -29318,7 +28708,7 @@
         </p:nvSpPr>
         <p:spPr>
           <a:xfrm>
-            <a:off x="2226713" y="3409894"/>
+            <a:off x="2226712" y="3013894"/>
             <a:ext cx="5355965" cy="396000"/>
           </a:xfrm>
           <a:prstGeom prst="roundRect">
@@ -29431,54 +28821,8 @@
         </p:nvCxnSpPr>
         <p:spPr>
           <a:xfrm rot="16200000" flipH="1">
-            <a:off x="1652276" y="2021532"/>
-            <a:ext cx="912251" cy="236623"/>
-          </a:xfrm>
-          <a:prstGeom prst="bentConnector2">
-            <a:avLst/>
-          </a:prstGeom>
-          <a:ln>
-            <a:solidFill>
-              <a:schemeClr val="tx1"/>
-            </a:solidFill>
-            <a:tailEnd type="triangle"/>
-          </a:ln>
-        </p:spPr>
-        <p:style>
-          <a:lnRef idx="1">
-            <a:schemeClr val="accent1"/>
-          </a:lnRef>
-          <a:fillRef idx="0">
-            <a:schemeClr val="accent1"/>
-          </a:fillRef>
-          <a:effectRef idx="0">
-            <a:schemeClr val="accent1"/>
-          </a:effectRef>
-          <a:fontRef idx="minor">
-            <a:schemeClr val="tx1"/>
-          </a:fontRef>
-        </p:style>
-      </p:cxnSp>
-      <p:cxnSp>
-        <p:nvCxnSpPr>
-          <p:cNvPr id="11" name="Elbow Connector 10">
-            <a:extLst>
-              <a:ext uri="{FF2B5EF4-FFF2-40B4-BE49-F238E27FC236}">
-                <a16:creationId xmlns:a16="http://schemas.microsoft.com/office/drawing/2014/main" id="{1B9CA35D-F3DD-2349-BB63-178A3D48C12C}"/>
-              </a:ext>
-            </a:extLst>
-          </p:cNvPr>
-          <p:cNvCxnSpPr>
-            <a:cxnSpLocks/>
-            <a:stCxn id="271" idx="2"/>
-            <a:endCxn id="16" idx="1"/>
-          </p:cNvCxnSpPr>
-          <p:nvPr/>
-        </p:nvCxnSpPr>
-        <p:spPr>
-          <a:xfrm rot="16200000" flipH="1">
-            <a:off x="1392099" y="2281709"/>
-            <a:ext cx="1418213" cy="222231"/>
+            <a:off x="1624785" y="2049023"/>
+            <a:ext cx="967232" cy="236623"/>
           </a:xfrm>
           <a:prstGeom prst="bentConnector2">
             <a:avLst/>
@@ -29523,8 +28867,8 @@
         </p:nvCxnSpPr>
         <p:spPr>
           <a:xfrm rot="16200000" flipH="1">
-            <a:off x="1146314" y="2527494"/>
-            <a:ext cx="1924175" cy="236623"/>
+            <a:off x="1344314" y="2329495"/>
+            <a:ext cx="1528175" cy="236622"/>
           </a:xfrm>
           <a:prstGeom prst="bentConnector2">
             <a:avLst/>
@@ -29551,12 +28895,43 @@
           </a:fontRef>
         </p:style>
       </p:cxnSp>
+      <p:pic>
+        <p:nvPicPr>
+          <p:cNvPr id="28" name="Google Shape;225;p40">
+            <a:extLst>
+              <a:ext uri="{FF2B5EF4-FFF2-40B4-BE49-F238E27FC236}">
+                <a16:creationId xmlns:a16="http://schemas.microsoft.com/office/drawing/2014/main" id="{7CE6CEA7-ECB7-B942-AF7F-04849C42950A}"/>
+              </a:ext>
+            </a:extLst>
+          </p:cNvPr>
+          <p:cNvPicPr preferRelativeResize="0"/>
+          <p:nvPr/>
+        </p:nvPicPr>
+        <p:blipFill>
+          <a:blip r:embed="rId3"/>
+          <a:srcRect t="2849" b="2849"/>
+          <a:stretch/>
+        </p:blipFill>
+        <p:spPr>
+          <a:xfrm>
+            <a:off x="551059" y="1196068"/>
+            <a:ext cx="419930" cy="396001"/>
+          </a:xfrm>
+          <a:prstGeom prst="ellipse">
+            <a:avLst/>
+          </a:prstGeom>
+          <a:noFill/>
+          <a:ln>
+            <a:noFill/>
+          </a:ln>
+        </p:spPr>
+      </p:pic>
       <p:graphicFrame>
         <p:nvGraphicFramePr>
-          <p:cNvPr id="23" name="Table 23">
+          <p:cNvPr id="21" name="Table 20">
             <a:extLst>
               <a:ext uri="{FF2B5EF4-FFF2-40B4-BE49-F238E27FC236}">
-                <a16:creationId xmlns:a16="http://schemas.microsoft.com/office/drawing/2014/main" id="{7207DC4F-0418-0E43-AEA2-26001954E05D}"/>
+                <a16:creationId xmlns:a16="http://schemas.microsoft.com/office/drawing/2014/main" id="{B4F64ACD-AA9E-384A-8801-19C3C9666169}"/>
               </a:ext>
             </a:extLst>
           </p:cNvPr>
@@ -29566,14 +28941,14 @@
           <p:nvPr>
             <p:extLst>
               <p:ext uri="{D42A27DB-BD31-4B8C-83A1-F6EECF244321}">
-                <p14:modId xmlns:p14="http://schemas.microsoft.com/office/powerpoint/2010/main" val="143931124"/>
+                <p14:modId xmlns:p14="http://schemas.microsoft.com/office/powerpoint/2010/main" val="3188319896"/>
               </p:ext>
             </p:extLst>
           </p:nvPr>
         </p:nvGraphicFramePr>
         <p:xfrm>
-          <a:off x="5355768" y="573874"/>
-          <a:ext cx="2226910" cy="304800"/>
+          <a:off x="5673898" y="573874"/>
+          <a:ext cx="1908780" cy="304800"/>
         </p:xfrm>
         <a:graphic>
           <a:graphicData uri="http://schemas.openxmlformats.org/drawingml/2006/table">
@@ -29622,13 +28997,6 @@
                     </a:ext>
                   </a:extLst>
                 </a:gridCol>
-                <a:gridCol w="318130">
-                  <a:extLst>
-                    <a:ext uri="{9D8B030D-6E8A-4147-A177-3AD203B41FA5}">
-                      <a16:colId xmlns:a16="http://schemas.microsoft.com/office/drawing/2014/main" val="4263781807"/>
-                    </a:ext>
-                  </a:extLst>
-                </a:gridCol>
               </a:tblGrid>
               <a:tr h="250242">
                 <a:tc>
@@ -29647,7 +29015,7 @@
                   <a:tcPr>
                     <a:solidFill>
                       <a:schemeClr val="bg1">
-                        <a:lumMod val="85000"/>
+                        <a:lumMod val="95000"/>
                       </a:schemeClr>
                     </a:solidFill>
                   </a:tcPr>
@@ -29698,7 +29066,7 @@
                   <a:tcPr>
                     <a:solidFill>
                       <a:schemeClr val="bg1">
-                        <a:lumMod val="85000"/>
+                        <a:lumMod val="95000"/>
                       </a:schemeClr>
                     </a:solidFill>
                   </a:tcPr>
@@ -29749,7 +29117,7 @@
                   <a:tcPr>
                     <a:solidFill>
                       <a:schemeClr val="bg1">
-                        <a:lumMod val="85000"/>
+                        <a:lumMod val="95000"/>
                       </a:schemeClr>
                     </a:solidFill>
                   </a:tcPr>
@@ -29770,7 +29138,7 @@
                   <a:tcPr>
                     <a:solidFill>
                       <a:schemeClr val="bg1">
-                        <a:lumMod val="85000"/>
+                        <a:lumMod val="95000"/>
                       </a:schemeClr>
                     </a:solidFill>
                   </a:tcPr>
@@ -29791,7 +29159,7 @@
                   <a:tcPr>
                     <a:solidFill>
                       <a:schemeClr val="bg1">
-                        <a:lumMod val="85000"/>
+                        <a:lumMod val="95000"/>
                       </a:schemeClr>
                     </a:solidFill>
                   </a:tcPr>
@@ -29811,30 +29179,9 @@
                   </a:txBody>
                   <a:tcPr>
                     <a:solidFill>
-                      <a:schemeClr val="bg1">
-                        <a:lumMod val="85000"/>
-                      </a:schemeClr>
-                    </a:solidFill>
-                  </a:tcPr>
-                </a:tc>
-                <a:tc>
-                  <a:txBody>
-                    <a:bodyPr/>
-                    <a:lstStyle/>
-                    <a:p>
-                      <a:pPr algn="ctr"/>
-                      <a:r>
-                        <a:rPr lang="ru-RU" dirty="0"/>
-                        <a:t>7</a:t>
-                      </a:r>
-                      <a:endParaRPr lang="en-US" dirty="0"/>
-                    </a:p>
-                  </a:txBody>
-                  <a:tcPr>
-                    <a:solidFill>
                       <a:schemeClr val="accent1">
-                        <a:lumMod val="60000"/>
-                        <a:lumOff val="40000"/>
+                        <a:lumMod val="40000"/>
+                        <a:lumOff val="60000"/>
                       </a:schemeClr>
                     </a:solidFill>
                   </a:tcPr>
@@ -29849,146 +29196,6 @@
           </a:graphicData>
         </a:graphic>
       </p:graphicFrame>
-      <p:sp>
-        <p:nvSpPr>
-          <p:cNvPr id="18" name="Google Shape;271;p44">
-            <a:extLst>
-              <a:ext uri="{FF2B5EF4-FFF2-40B4-BE49-F238E27FC236}">
-                <a16:creationId xmlns:a16="http://schemas.microsoft.com/office/drawing/2014/main" id="{D77AA650-7B6A-2E4F-A234-07C44F1AF1CD}"/>
-              </a:ext>
-            </a:extLst>
-          </p:cNvPr>
-          <p:cNvSpPr/>
-          <p:nvPr/>
-        </p:nvSpPr>
-        <p:spPr>
-          <a:xfrm>
-            <a:off x="2226713" y="3915856"/>
-            <a:ext cx="5355965" cy="396000"/>
-          </a:xfrm>
-          <a:prstGeom prst="roundRect">
-            <a:avLst>
-              <a:gd name="adj" fmla="val 16667"/>
-            </a:avLst>
-          </a:prstGeom>
-          <a:solidFill>
-            <a:srgbClr val="FFD966"/>
-          </a:solidFill>
-          <a:ln>
-            <a:noFill/>
-          </a:ln>
-          <a:effectLst>
-            <a:glow>
-              <a:schemeClr val="accent1">
-                <a:satMod val="175000"/>
-                <a:alpha val="40000"/>
-              </a:schemeClr>
-            </a:glow>
-          </a:effectLst>
-        </p:spPr>
-        <p:txBody>
-          <a:bodyPr spcFirstLastPara="1" wrap="square" lIns="162000" tIns="91425" rIns="162000" bIns="91425" anchor="ctr" anchorCtr="0">
-            <a:noAutofit/>
-          </a:bodyPr>
-          <a:lstStyle/>
-          <a:p>
-            <a:r>
-              <a:rPr lang="ru-RU" sz="1200" dirty="0">
-                <a:solidFill>
-                  <a:srgbClr val="1F1F1F"/>
-                </a:solidFill>
-                <a:latin typeface="+mn-lt"/>
-                <a:sym typeface="Roboto"/>
-              </a:rPr>
-              <a:t>Заключение и обзор ключевых концепций курса</a:t>
-            </a:r>
-            <a:endParaRPr sz="1200" dirty="0">
-              <a:solidFill>
-                <a:srgbClr val="1F1F1F"/>
-              </a:solidFill>
-              <a:latin typeface="+mn-lt"/>
-              <a:sym typeface="Roboto"/>
-            </a:endParaRPr>
-          </a:p>
-        </p:txBody>
-      </p:sp>
-      <p:cxnSp>
-        <p:nvCxnSpPr>
-          <p:cNvPr id="19" name="Elbow Connector 18">
-            <a:extLst>
-              <a:ext uri="{FF2B5EF4-FFF2-40B4-BE49-F238E27FC236}">
-                <a16:creationId xmlns:a16="http://schemas.microsoft.com/office/drawing/2014/main" id="{4E4FCD50-FA53-BF4C-9AB8-F81862AA8721}"/>
-              </a:ext>
-            </a:extLst>
-          </p:cNvPr>
-          <p:cNvCxnSpPr>
-            <a:cxnSpLocks/>
-            <a:stCxn id="271" idx="2"/>
-            <a:endCxn id="18" idx="1"/>
-          </p:cNvCxnSpPr>
-          <p:nvPr/>
-        </p:nvCxnSpPr>
-        <p:spPr>
-          <a:xfrm rot="16200000" flipH="1">
-            <a:off x="893333" y="2780475"/>
-            <a:ext cx="2430137" cy="236623"/>
-          </a:xfrm>
-          <a:prstGeom prst="bentConnector2">
-            <a:avLst/>
-          </a:prstGeom>
-          <a:ln>
-            <a:solidFill>
-              <a:schemeClr val="tx1"/>
-            </a:solidFill>
-            <a:tailEnd type="triangle"/>
-          </a:ln>
-        </p:spPr>
-        <p:style>
-          <a:lnRef idx="1">
-            <a:schemeClr val="accent1"/>
-          </a:lnRef>
-          <a:fillRef idx="0">
-            <a:schemeClr val="accent1"/>
-          </a:fillRef>
-          <a:effectRef idx="0">
-            <a:schemeClr val="accent1"/>
-          </a:effectRef>
-          <a:fontRef idx="minor">
-            <a:schemeClr val="tx1"/>
-          </a:fontRef>
-        </p:style>
-      </p:cxnSp>
-      <p:pic>
-        <p:nvPicPr>
-          <p:cNvPr id="28" name="Google Shape;225;p40">
-            <a:extLst>
-              <a:ext uri="{FF2B5EF4-FFF2-40B4-BE49-F238E27FC236}">
-                <a16:creationId xmlns:a16="http://schemas.microsoft.com/office/drawing/2014/main" id="{7CE6CEA7-ECB7-B942-AF7F-04849C42950A}"/>
-              </a:ext>
-            </a:extLst>
-          </p:cNvPr>
-          <p:cNvPicPr preferRelativeResize="0"/>
-          <p:nvPr/>
-        </p:nvPicPr>
-        <p:blipFill>
-          <a:blip r:embed="rId3"/>
-          <a:srcRect t="2849" b="2849"/>
-          <a:stretch/>
-        </p:blipFill>
-        <p:spPr>
-          <a:xfrm>
-            <a:off x="551059" y="1196068"/>
-            <a:ext cx="419930" cy="396001"/>
-          </a:xfrm>
-          <a:prstGeom prst="ellipse">
-            <a:avLst/>
-          </a:prstGeom>
-          <a:noFill/>
-          <a:ln>
-            <a:noFill/>
-          </a:ln>
-        </p:spPr>
-      </p:pic>
     </p:spTree>
     <p:extLst>
       <p:ext uri="{BB962C8B-B14F-4D97-AF65-F5344CB8AC3E}">
